--- a/03-build/pptx/C5_U1_docente.pptx
+++ b/03-build/pptx/C5_U1_docente.pptx
@@ -1944,7 +1944,7 @@
           <a:lstStyle/>
           <a:p>
             <a:r>
-              <a:t>TEACHER · GRAMMAR presente. Onthul rij per rij; laat de klas de uitgang voorspellen. Benadruk: één patroon, drie families; -er/-ir alleen bij nosotros/vosotros anders. Werkwoordsvervoeging verder = aparte Conjugador-tool, niet hier.</a:t>
+              <a:t>TEACHER · GRAMMAR presente. Onthul rij per rij; laat de klas de uitgang voorspellen. Benadruk: één patroon, drie families; -er/-ir alleen bij nosotros/vosotros anders. Werkwoordsvervoeging verder = aparte Conjugador-tool, niet hier. Inoefenen: online cloze-spel «Completa el verbo» (invullen van de juiste vorm) + de cloze-oefening in de cursus (§3.2).</a:t>
             </a:r>
           </a:p>
           <a:p/>
@@ -12572,7 +12572,25 @@
                 </a:solidFill>
                 <a:latin typeface="Inter"/>
               </a:rPr>
-              <a:t>uit het hoofd, tegen 3 klasgenoten.</a:t>
+              <a:t>uit het hoofd, tegen 3 klasgenoten. </a:t>
+            </a:r>
+            <a:r>
+              <a:rPr sz="1200" b="1" i="0">
+                <a:solidFill>
+                  <a:srgbClr val="157355"/>
+                </a:solidFill>
+                <a:latin typeface="Inter"/>
+              </a:rPr>
+              <a:t>Ronda 4: </a:t>
+            </a:r>
+            <a:r>
+              <a:rPr sz="1200" b="0" i="0">
+                <a:solidFill>
+                  <a:srgbClr val="20242E"/>
+                </a:solidFill>
+                <a:latin typeface="Inter"/>
+              </a:rPr>
+              <a:t>grábate en de digitale pagina → terugluisteren.</a:t>
             </a:r>
           </a:p>
         </p:txBody>
@@ -12580,6 +12598,61 @@
       <p:sp>
         <p:nvSpPr>
           <p:cNvPr id="29" name="Rounded Rectangle 28"/>
+          <p:cNvSpPr/>
+          <p:nvPr/>
+        </p:nvSpPr>
+        <p:spPr>
+          <a:xfrm>
+            <a:off x="457200" y="4251960"/>
+            <a:ext cx="3652113" cy="292608"/>
+          </a:xfrm>
+          <a:prstGeom prst="roundRect">
+            <a:avLst>
+              <a:gd name="adj" fmla="val 50000"/>
+            </a:avLst>
+          </a:prstGeom>
+          <a:solidFill>
+            <a:srgbClr val="E4F4EE"/>
+          </a:solidFill>
+          <a:ln>
+            <a:noFill/>
+          </a:ln>
+          <a:effectLst/>
+        </p:spPr>
+        <p:style>
+          <a:lnRef idx="1">
+            <a:schemeClr val="accent1"/>
+          </a:lnRef>
+          <a:fillRef idx="3">
+            <a:schemeClr val="accent1"/>
+          </a:fillRef>
+          <a:effectRef idx="2">
+            <a:schemeClr val="accent1"/>
+          </a:effectRef>
+          <a:fontRef idx="minor">
+            <a:schemeClr val="lt1"/>
+          </a:fontRef>
+        </p:style>
+        <p:txBody>
+          <a:bodyPr rtlCol="0" anchor="ctr" wrap="none" lIns="88900" rIns="88900" tIns="12700" bIns="12700"/>
+          <a:lstStyle/>
+          <a:p>
+            <a:pPr algn="ctr"/>
+            <a:r>
+              <a:rPr sz="1100" b="1">
+                <a:solidFill>
+                  <a:srgbClr val="157355"/>
+                </a:solidFill>
+                <a:latin typeface="Inter"/>
+              </a:rPr>
+              <a:t>🎙️ Grábate online · «Carrusel: preséntate»</a:t>
+            </a:r>
+          </a:p>
+        </p:txBody>
+      </p:sp>
+      <p:sp>
+        <p:nvSpPr>
+          <p:cNvPr id="30" name="Rounded Rectangle 29"/>
           <p:cNvSpPr/>
           <p:nvPr/>
         </p:nvSpPr>
@@ -12636,7 +12709,7 @@
       </p:sp>
       <p:sp>
         <p:nvSpPr>
-          <p:cNvPr id="30" name="Rounded Rectangle 29"/>
+          <p:cNvPr id="31" name="Rounded Rectangle 30"/>
           <p:cNvSpPr/>
           <p:nvPr/>
         </p:nvSpPr>
@@ -12693,7 +12766,7 @@
       </p:sp>
       <p:sp>
         <p:nvSpPr>
-          <p:cNvPr id="31" name="Rounded Rectangle 30">
+          <p:cNvPr id="32" name="Rounded Rectangle 31">
             <a:hlinkClick action="ppaction://hlinksldjump" r:id="rId4"/>
           </p:cNvPr>
           <p:cNvSpPr/>
@@ -12752,7 +12825,7 @@
       </p:sp>
       <p:sp>
         <p:nvSpPr>
-          <p:cNvPr id="32" name="TextBox 31"/>
+          <p:cNvPr id="33" name="TextBox 32"/>
           <p:cNvSpPr txBox="1"/>
           <p:nvPr/>
         </p:nvSpPr>
@@ -12797,7 +12870,7 @@
       </p:sp>
       <p:sp>
         <p:nvSpPr>
-          <p:cNvPr id="33" name="Rounded Rectangle 32"/>
+          <p:cNvPr id="34" name="Rounded Rectangle 33"/>
           <p:cNvSpPr/>
           <p:nvPr/>
         </p:nvSpPr>
@@ -12873,7 +12946,7 @@
       </p:sp>
       <p:sp>
         <p:nvSpPr>
-          <p:cNvPr id="34" name="Rounded Rectangle 33"/>
+          <p:cNvPr id="35" name="Rounded Rectangle 34"/>
           <p:cNvSpPr/>
           <p:nvPr/>
         </p:nvSpPr>
@@ -12928,7 +13001,7 @@
       </p:sp>
       <p:sp>
         <p:nvSpPr>
-          <p:cNvPr id="35" name="Rectangle 34"/>
+          <p:cNvPr id="36" name="Rectangle 35"/>
           <p:cNvSpPr/>
           <p:nvPr/>
         </p:nvSpPr>
@@ -12972,7 +13045,7 @@
       </p:sp>
       <p:sp>
         <p:nvSpPr>
-          <p:cNvPr id="36" name="TextBox 35"/>
+          <p:cNvPr id="37" name="TextBox 36"/>
           <p:cNvSpPr txBox="1"/>
           <p:nvPr/>
         </p:nvSpPr>
@@ -13026,7 +13099,7 @@
       </p:sp>
       <p:sp>
         <p:nvSpPr>
-          <p:cNvPr id="37" name="TextBox 36"/>
+          <p:cNvPr id="38" name="TextBox 37"/>
           <p:cNvSpPr txBox="1"/>
           <p:nvPr/>
         </p:nvSpPr>
@@ -13071,7 +13144,7 @@
       </p:sp>
       <p:sp>
         <p:nvSpPr>
-          <p:cNvPr id="38" name="TextBox 37"/>
+          <p:cNvPr id="39" name="TextBox 38"/>
           <p:cNvSpPr txBox="1"/>
           <p:nvPr/>
         </p:nvSpPr>
@@ -13153,7 +13226,7 @@
                                           </p:stCondLst>
                                         </p:cTn>
                                         <p:tgtEl>
-                                          <p:spTgt spid="33"/>
+                                          <p:spTgt spid="34"/>
                                         </p:tgtEl>
                                         <p:attrNameLst>
                                           <p:attrName>style.visibility</p:attrName>
@@ -13167,7 +13240,7 @@
                                       <p:cBhvr>
                                         <p:cTn id="7" dur="500"/>
                                         <p:tgtEl>
-                                          <p:spTgt spid="33"/>
+                                          <p:spTgt spid="34"/>
                                         </p:tgtEl>
                                       </p:cBhvr>
                                     </p:animEffect>
@@ -13206,7 +13279,7 @@
                                           </p:stCondLst>
                                         </p:cTn>
                                         <p:tgtEl>
-                                          <p:spTgt spid="34"/>
+                                          <p:spTgt spid="35"/>
                                         </p:tgtEl>
                                         <p:attrNameLst>
                                           <p:attrName>style.visibility</p:attrName>
@@ -13220,7 +13293,7 @@
                                       <p:cBhvr>
                                         <p:cTn id="12" dur="500"/>
                                         <p:tgtEl>
-                                          <p:spTgt spid="34"/>
+                                          <p:spTgt spid="35"/>
                                         </p:tgtEl>
                                       </p:cBhvr>
                                     </p:animEffect>

--- a/03-build/pptx/C5_U1_docente.pptx
+++ b/03-build/pptx/C5_U1_docente.pptx
@@ -1400,7 +1400,7 @@
           <a:lstStyle/>
           <a:p>
             <a:r>
-              <a:t>TEACHER · LESSON_MENU. Elke tegel = hyperlink naar de sectie; op elke oefendia staat ⌂ Menú terug. Bij veel zij-instromers: begin gerust bij §1 (datos) — de kern van zich voorstellen. Richttijd 50 min.</a:t>
+              <a:t>TEACHER · LESSON_MENU. Elke tegel = hyperlink naar de sectie; op elke oefendia staat ⌂ Menú terug. Bij veel zij-instromers: begin gerust bij §1 (datos) — de kern van zich voorstellen. Richttijd 50 min. Kruisverwijzing print/HTML: elke sectie verwijst naar «oefen online» op de verrijkte hub (20 juegos + drills + flip cards).</a:t>
             </a:r>
           </a:p>
         </p:txBody>
@@ -31743,7 +31743,62 @@
       </p:sp>
       <p:sp>
         <p:nvSpPr>
-          <p:cNvPr id="57" name="Rectangle 56"/>
+          <p:cNvPr id="57" name="Rounded Rectangle 56"/>
+          <p:cNvSpPr/>
+          <p:nvPr/>
+        </p:nvSpPr>
+        <p:spPr>
+          <a:xfrm>
+            <a:off x="457200" y="6400800"/>
+            <a:ext cx="8110728" cy="292608"/>
+          </a:xfrm>
+          <a:prstGeom prst="roundRect">
+            <a:avLst>
+              <a:gd name="adj" fmla="val 50000"/>
+            </a:avLst>
+          </a:prstGeom>
+          <a:solidFill>
+            <a:srgbClr val="E4F4EE"/>
+          </a:solidFill>
+          <a:ln>
+            <a:noFill/>
+          </a:ln>
+          <a:effectLst/>
+        </p:spPr>
+        <p:style>
+          <a:lnRef idx="1">
+            <a:schemeClr val="accent1"/>
+          </a:lnRef>
+          <a:fillRef idx="3">
+            <a:schemeClr val="accent1"/>
+          </a:fillRef>
+          <a:effectRef idx="2">
+            <a:schemeClr val="accent1"/>
+          </a:effectRef>
+          <a:fontRef idx="minor">
+            <a:schemeClr val="lt1"/>
+          </a:fontRef>
+        </p:style>
+        <p:txBody>
+          <a:bodyPr rtlCol="0" anchor="ctr" wrap="none" lIns="88900" rIns="88900" tIns="12700" bIns="12700"/>
+          <a:lstStyle/>
+          <a:p>
+            <a:pPr algn="ctr"/>
+            <a:r>
+              <a:rPr sz="1100" b="1">
+                <a:solidFill>
+                  <a:srgbClr val="157355"/>
+                </a:solidFill>
+                <a:latin typeface="Inter"/>
+              </a:rPr>
+              <a:t>🔗 Cruzar · libro (§1–§V + Lectura) ↔ página digital (20 juegos · audio · flip cards · recorder)</a:t>
+            </a:r>
+          </a:p>
+        </p:txBody>
+      </p:sp>
+      <p:sp>
+        <p:nvSpPr>
+          <p:cNvPr id="58" name="Rectangle 57"/>
           <p:cNvSpPr/>
           <p:nvPr/>
         </p:nvSpPr>
@@ -31787,7 +31842,7 @@
       </p:sp>
       <p:sp>
         <p:nvSpPr>
-          <p:cNvPr id="58" name="TextBox 57"/>
+          <p:cNvPr id="59" name="TextBox 58"/>
           <p:cNvSpPr txBox="1"/>
           <p:nvPr/>
         </p:nvSpPr>
@@ -31841,7 +31896,7 @@
       </p:sp>
       <p:sp>
         <p:nvSpPr>
-          <p:cNvPr id="59" name="TextBox 58"/>
+          <p:cNvPr id="60" name="TextBox 59"/>
           <p:cNvSpPr txBox="1"/>
           <p:nvPr/>
         </p:nvSpPr>
@@ -31886,7 +31941,7 @@
       </p:sp>
       <p:sp>
         <p:nvSpPr>
-          <p:cNvPr id="60" name="TextBox 59"/>
+          <p:cNvPr id="61" name="TextBox 60"/>
           <p:cNvSpPr txBox="1"/>
           <p:nvPr/>
         </p:nvSpPr>
@@ -34549,7 +34604,7 @@
                 </a:solidFill>
                 <a:latin typeface="Inter"/>
               </a:rPr>
-              <a:t>18 spellen + flip cards + klikbare kaart + recorder op de página digital. QR's in het boek → juiste anker. Conjugador = aparte tool.</a:t>
+              <a:t>20 spellen + flip cards + klikbare kaart + recorder op de página digital. QR's in het boek → juiste anker. Conjugador = aparte tool.</a:t>
             </a:r>
           </a:p>
         </p:txBody>

--- a/03-build/pptx/C5_U1_docente.pptx
+++ b/03-build/pptx/C5_U1_docente.pptx
@@ -6864,7 +6864,6 @@
               <a:srgbClr val="E4E3DE"/>
             </a:solidFill>
           </a:ln>
-          <a:effectLst/>
           <a:effectLst>
             <a:outerShdw blurRad="90000" dist="38000" dir="5400000" rotWithShape="0">
               <a:srgbClr val="20242E">
@@ -7188,7 +7187,6 @@
               <a:srgbClr val="E4E3DE"/>
             </a:solidFill>
           </a:ln>
-          <a:effectLst/>
           <a:effectLst>
             <a:outerShdw blurRad="90000" dist="38000" dir="5400000" rotWithShape="0">
               <a:srgbClr val="20242E">
@@ -7512,7 +7510,6 @@
               <a:srgbClr val="E4E3DE"/>
             </a:solidFill>
           </a:ln>
-          <a:effectLst/>
           <a:effectLst>
             <a:outerShdw blurRad="90000" dist="38000" dir="5400000" rotWithShape="0">
               <a:srgbClr val="20242E">
@@ -7836,7 +7833,6 @@
               <a:srgbClr val="E4E3DE"/>
             </a:solidFill>
           </a:ln>
-          <a:effectLst/>
           <a:effectLst>
             <a:outerShdw blurRad="90000" dist="38000" dir="5400000" rotWithShape="0">
               <a:srgbClr val="20242E">
@@ -13891,7 +13887,6 @@
               <a:srgbClr val="E4E3DE"/>
             </a:solidFill>
           </a:ln>
-          <a:effectLst/>
           <a:effectLst>
             <a:outerShdw blurRad="90000" dist="38000" dir="5400000" rotWithShape="0">
               <a:srgbClr val="20242E">
@@ -14570,7 +14565,6 @@
               <a:srgbClr val="1E9E74"/>
             </a:solidFill>
           </a:ln>
-          <a:effectLst/>
           <a:effectLst>
             <a:outerShdw blurRad="90000" dist="38000" dir="5400000" rotWithShape="0">
               <a:srgbClr val="20242E">
@@ -21542,7 +21536,6 @@
               <a:srgbClr val="1E9E74"/>
             </a:solidFill>
           </a:ln>
-          <a:effectLst/>
           <a:effectLst>
             <a:outerShdw blurRad="90000" dist="38000" dir="5400000" rotWithShape="0">
               <a:srgbClr val="20242E">
@@ -21776,7 +21769,6 @@
               <a:srgbClr val="1E9E74"/>
             </a:solidFill>
           </a:ln>
-          <a:effectLst/>
           <a:effectLst>
             <a:outerShdw blurRad="90000" dist="38000" dir="5400000" rotWithShape="0">
               <a:srgbClr val="20242E">
@@ -22010,7 +22002,6 @@
               <a:srgbClr val="1E9E74"/>
             </a:solidFill>
           </a:ln>
-          <a:effectLst/>
           <a:effectLst>
             <a:outerShdw blurRad="90000" dist="38000" dir="5400000" rotWithShape="0">
               <a:srgbClr val="20242E">
@@ -25575,7 +25566,6 @@
               <a:srgbClr val="1E9E74"/>
             </a:solidFill>
           </a:ln>
-          <a:effectLst/>
           <a:effectLst>
             <a:outerShdw blurRad="90000" dist="38000" dir="5400000" rotWithShape="0">
               <a:srgbClr val="20242E">
@@ -25984,7 +25974,6 @@
               <a:srgbClr val="E4E3DE"/>
             </a:solidFill>
           </a:ln>
-          <a:effectLst/>
           <a:effectLst>
             <a:outerShdw blurRad="90000" dist="38000" dir="5400000" rotWithShape="0">
               <a:srgbClr val="20242E">
@@ -26217,7 +26206,6 @@
               <a:srgbClr val="E4E3DE"/>
             </a:solidFill>
           </a:ln>
-          <a:effectLst/>
           <a:effectLst>
             <a:outerShdw blurRad="90000" dist="38000" dir="5400000" rotWithShape="0">
               <a:srgbClr val="20242E">
@@ -27346,7 +27334,6 @@
               <a:srgbClr val="1E9E74"/>
             </a:solidFill>
           </a:ln>
-          <a:effectLst/>
           <a:effectLst>
             <a:outerShdw blurRad="90000" dist="38000" dir="5400000" rotWithShape="0">
               <a:srgbClr val="20242E">
@@ -27535,7 +27522,6 @@
               <a:srgbClr val="E4E3DE"/>
             </a:solidFill>
           </a:ln>
-          <a:effectLst/>
           <a:effectLst>
             <a:outerShdw blurRad="90000" dist="38000" dir="5400000" rotWithShape="0">
               <a:srgbClr val="20242E">
@@ -27768,7 +27754,6 @@
               <a:srgbClr val="E4E3DE"/>
             </a:solidFill>
           </a:ln>
-          <a:effectLst/>
           <a:effectLst>
             <a:outerShdw blurRad="90000" dist="38000" dir="5400000" rotWithShape="0">
               <a:srgbClr val="20242E">
@@ -28865,7 +28850,6 @@
               <a:srgbClr val="1E9E74"/>
             </a:solidFill>
           </a:ln>
-          <a:effectLst/>
           <a:effectLst>
             <a:outerShdw blurRad="90000" dist="38000" dir="5400000" rotWithShape="0">
               <a:srgbClr val="20242E">
@@ -29168,7 +29152,6 @@
               <a:srgbClr val="1E9E74"/>
             </a:solidFill>
           </a:ln>
-          <a:effectLst/>
           <a:effectLst>
             <a:outerShdw blurRad="90000" dist="38000" dir="5400000" rotWithShape="0">
               <a:srgbClr val="20242E">
@@ -29471,7 +29454,6 @@
               <a:srgbClr val="1E9E74"/>
             </a:solidFill>
           </a:ln>
-          <a:effectLst/>
           <a:effectLst>
             <a:outerShdw blurRad="90000" dist="38000" dir="5400000" rotWithShape="0">
               <a:srgbClr val="20242E">
@@ -29774,7 +29756,6 @@
               <a:srgbClr val="1E9E74"/>
             </a:solidFill>
           </a:ln>
-          <a:effectLst/>
           <a:effectLst>
             <a:outerShdw blurRad="90000" dist="38000" dir="5400000" rotWithShape="0">
               <a:srgbClr val="20242E">
@@ -30077,7 +30058,6 @@
               <a:srgbClr val="157355"/>
             </a:solidFill>
           </a:ln>
-          <a:effectLst/>
           <a:effectLst>
             <a:outerShdw blurRad="90000" dist="38000" dir="5400000" rotWithShape="0">
               <a:srgbClr val="20242E">
@@ -30380,7 +30360,6 @@
               <a:srgbClr val="157355"/>
             </a:solidFill>
           </a:ln>
-          <a:effectLst/>
           <a:effectLst>
             <a:outerShdw blurRad="90000" dist="38000" dir="5400000" rotWithShape="0">
               <a:srgbClr val="20242E">
@@ -30683,7 +30662,6 @@
               <a:srgbClr val="B7860B"/>
             </a:solidFill>
           </a:ln>
-          <a:effectLst/>
           <a:effectLst>
             <a:outerShdw blurRad="90000" dist="38000" dir="5400000" rotWithShape="0">
               <a:srgbClr val="20242E">
@@ -30986,7 +30964,6 @@
               <a:srgbClr val="157355"/>
             </a:solidFill>
           </a:ln>
-          <a:effectLst/>
           <a:effectLst>
             <a:outerShdw blurRad="90000" dist="38000" dir="5400000" rotWithShape="0">
               <a:srgbClr val="20242E">
@@ -35838,7 +35815,6 @@
           <a:ln>
             <a:noFill/>
           </a:ln>
-          <a:effectLst/>
           <a:effectLst>
             <a:outerShdw blurRad="90000" dist="38000" dir="5400000" rotWithShape="0">
               <a:srgbClr val="20242E">
@@ -37551,7 +37527,6 @@
           <a:ln>
             <a:noFill/>
           </a:ln>
-          <a:effectLst/>
           <a:effectLst>
             <a:outerShdw blurRad="90000" dist="38000" dir="5400000" rotWithShape="0">
               <a:srgbClr val="20242E">
@@ -37694,7 +37669,6 @@
           <a:ln>
             <a:noFill/>
           </a:ln>
-          <a:effectLst/>
           <a:effectLst>
             <a:outerShdw blurRad="90000" dist="38000" dir="5400000" rotWithShape="0">
               <a:srgbClr val="20242E">
@@ -37837,7 +37811,6 @@
           <a:ln>
             <a:noFill/>
           </a:ln>
-          <a:effectLst/>
           <a:effectLst>
             <a:outerShdw blurRad="90000" dist="38000" dir="5400000" rotWithShape="0">
               <a:srgbClr val="20242E">
@@ -37980,7 +37953,6 @@
           <a:ln>
             <a:noFill/>
           </a:ln>
-          <a:effectLst/>
           <a:effectLst>
             <a:outerShdw blurRad="90000" dist="38000" dir="5400000" rotWithShape="0">
               <a:srgbClr val="20242E">
@@ -38123,7 +38095,6 @@
           <a:ln>
             <a:noFill/>
           </a:ln>
-          <a:effectLst/>
           <a:effectLst>
             <a:outerShdw blurRad="90000" dist="38000" dir="5400000" rotWithShape="0">
               <a:srgbClr val="20242E">
@@ -42473,7 +42444,6 @@
           <a:ln>
             <a:noFill/>
           </a:ln>
-          <a:effectLst/>
           <a:effectLst>
             <a:outerShdw blurRad="90000" dist="38000" dir="5400000" rotWithShape="0">
               <a:srgbClr val="20242E">
@@ -46793,7 +46763,6 @@
               <a:srgbClr val="1E9E74"/>
             </a:solidFill>
           </a:ln>
-          <a:effectLst/>
           <a:effectLst>
             <a:outerShdw blurRad="90000" dist="38000" dir="5400000" rotWithShape="0">
               <a:srgbClr val="20242E">
@@ -46938,7 +46907,6 @@
               <a:srgbClr val="1E9E74"/>
             </a:solidFill>
           </a:ln>
-          <a:effectLst/>
           <a:effectLst>
             <a:outerShdw blurRad="90000" dist="38000" dir="5400000" rotWithShape="0">
               <a:srgbClr val="20242E">
@@ -47083,7 +47051,6 @@
               <a:srgbClr val="1E9E74"/>
             </a:solidFill>
           </a:ln>
-          <a:effectLst/>
           <a:effectLst>
             <a:outerShdw blurRad="90000" dist="38000" dir="5400000" rotWithShape="0">
               <a:srgbClr val="20242E">
@@ -47228,7 +47195,6 @@
               <a:srgbClr val="1E9E74"/>
             </a:solidFill>
           </a:ln>
-          <a:effectLst/>
           <a:effectLst>
             <a:outerShdw blurRad="90000" dist="38000" dir="5400000" rotWithShape="0">
               <a:srgbClr val="20242E">
@@ -47373,7 +47339,6 @@
               <a:srgbClr val="1E9E74"/>
             </a:solidFill>
           </a:ln>
-          <a:effectLst/>
           <a:effectLst>
             <a:outerShdw blurRad="90000" dist="38000" dir="5400000" rotWithShape="0">
               <a:srgbClr val="20242E">
@@ -47518,7 +47483,6 @@
               <a:srgbClr val="1E9E74"/>
             </a:solidFill>
           </a:ln>
-          <a:effectLst/>
           <a:effectLst>
             <a:outerShdw blurRad="90000" dist="38000" dir="5400000" rotWithShape="0">
               <a:srgbClr val="20242E">
@@ -49100,7 +49064,6 @@
           <a:ln>
             <a:noFill/>
           </a:ln>
-          <a:effectLst/>
           <a:effectLst>
             <a:outerShdw blurRad="90000" dist="38000" dir="5400000" rotWithShape="0">
               <a:srgbClr val="20242E">
@@ -49198,7 +49161,6 @@
           <a:ln>
             <a:noFill/>
           </a:ln>
-          <a:effectLst/>
           <a:effectLst>
             <a:outerShdw blurRad="90000" dist="38000" dir="5400000" rotWithShape="0">
               <a:srgbClr val="20242E">
@@ -49296,7 +49258,6 @@
           <a:ln>
             <a:noFill/>
           </a:ln>
-          <a:effectLst/>
           <a:effectLst>
             <a:outerShdw blurRad="90000" dist="38000" dir="5400000" rotWithShape="0">
               <a:srgbClr val="20242E">
@@ -56823,7 +56784,6 @@
               <a:srgbClr val="1E9E74"/>
             </a:solidFill>
           </a:ln>
-          <a:effectLst/>
           <a:effectLst>
             <a:outerShdw blurRad="90000" dist="38000" dir="5400000" rotWithShape="0">
               <a:srgbClr val="20242E">

--- a/03-build/pptx/C5_U1_docente.pptx
+++ b/03-build/pptx/C5_U1_docente.pptx
@@ -13,6 +13,9 @@
     <p:sldId id="261" r:id="rId13"/>
     <p:sldId id="262" r:id="rId14"/>
     <p:sldId id="263" r:id="rId15"/>
+    <p:sldId id="279" r:id="rId31"/>
+    <p:sldId id="280" r:id="rId32"/>
+    <p:sldId id="281" r:id="rId33"/>
     <p:sldId id="264" r:id="rId16"/>
     <p:sldId id="265" r:id="rId17"/>
     <p:sldId id="266" r:id="rId18"/>
@@ -1760,6 +1763,255 @@
           </p:nvPr>
         </p:nvSpPr>
         <p:spPr/>
+      </p:sp>
+    </p:spTree>
+  </p:cSld>
+  <p:clrMapOvr>
+    <a:masterClrMapping/>
+  </p:clrMapOvr>
+</p:notes>
+</file>
+
+<file path=ppt/notesSlides/notesSlide24.xml><?xml version="1.0" encoding="utf-8"?>
+<p:notes xmlns:a="http://schemas.openxmlformats.org/drawingml/2006/main" xmlns:p="http://schemas.openxmlformats.org/presentationml/2006/main" xmlns:r="http://schemas.openxmlformats.org/officeDocument/2006/relationships">
+  <p:cSld>
+    <p:spTree>
+      <p:nvGrpSpPr>
+        <p:cNvPr id="1" name=""/>
+        <p:cNvGrpSpPr/>
+        <p:nvPr/>
+      </p:nvGrpSpPr>
+      <p:grpSpPr>
+        <a:xfrm>
+          <a:off x="0" y="0"/>
+          <a:ext cx="0" cy="0"/>
+          <a:chOff x="0" y="0"/>
+          <a:chExt cx="0" cy="0"/>
+        </a:xfrm>
+      </p:grpSpPr>
+      <p:sp>
+        <p:nvSpPr>
+          <p:cNvPr id="2" name="Slide Image Placeholder 1"/>
+          <p:cNvSpPr>
+            <a:spLocks noGrp="1"/>
+          </p:cNvSpPr>
+          <p:nvPr>
+            <p:ph type="sldImg" idx="2"/>
+          </p:nvPr>
+        </p:nvSpPr>
+        <p:spPr/>
+      </p:sp>
+      <p:sp>
+        <p:nvSpPr>
+          <p:cNvPr id="3" name="Notes Placeholder 2"/>
+          <p:cNvSpPr>
+            <a:spLocks noGrp="1"/>
+          </p:cNvSpPr>
+          <p:nvPr>
+            <p:ph type="body" idx="3" sz="quarter"/>
+          </p:nvPr>
+        </p:nvSpPr>
+        <p:spPr/>
+        <p:txBody>
+          <a:bodyPr/>
+          <a:lstStyle/>
+          <a:p>
+            <a:r>
+              <a:t>RETO 1 · Rueda de prensa — 🎭 simulatie met beperking</a:t>
+            </a:r>
+          </a:p>
+          <a:p>
+            <a:r>
+              <a:t>OPDRACHT: De pers vraagt, de ster antwoordt. Alleen vragen mét een vraagwoord tellen.</a:t>
+            </a:r>
+          </a:p>
+          <a:p>
+            <a:r>
+              <a:t>DE REGEL: Een ja/nee-vraag kost je je beurt. Je moet dus met qué, quién, dónde, cuándo, cómo, cuánto of por qué beginnen — en niemand mag hetzelfde vraagwoord twee keer gebruiken.</a:t>
+            </a:r>
+          </a:p>
+          <a:p>
+            <a:r>
+              <a:t>VERLOOP: La estrella coge una ficha secreta y se sienta delante. | La prensa levanta la mano. Una pregunta por periodista. | El/la profe tacha el interrogativo usado: ya no se puede repetir. | Al final la prensa escribe el titular en una frase.</a:t>
+            </a:r>
+          </a:p>
+          <a:p>
+            <a:r>
+              <a:t>SLEUTEL: De zeven vraagwoorden zijn precies die van §4.1 — het spel dwingt de klas ze alle zeven te gebruiken in plaats van drie keer «¿qué?».  ||  «¿Por qué…?» is de moeilijkste en blijft meestal tot het laatst over. Hou hem bewust achter de hand voor de sterkste leerling.  ||  Valstrik: «¿Cuántos años tienes?» — leerlingen zeggen vaak «¿Cuánto años?». Cuántos beweegt mee met años.</a:t>
+            </a:r>
+          </a:p>
+          <a:p>
+            <a:r>
+              <a:t>NOTA: Het verbod op herhaling is wat het spel maakt. Zet de zeven vraagwoorden op het scherm en streep ze zichtbaar door — de spanning stijgt met elke doorhaling.</a:t>
+            </a:r>
+          </a:p>
+        </p:txBody>
+      </p:sp>
+    </p:spTree>
+  </p:cSld>
+  <p:clrMapOvr>
+    <a:masterClrMapping/>
+  </p:clrMapOvr>
+</p:notes>
+</file>
+
+<file path=ppt/notesSlides/notesSlide25.xml><?xml version="1.0" encoding="utf-8"?>
+<p:notes xmlns:a="http://schemas.openxmlformats.org/drawingml/2006/main" xmlns:p="http://schemas.openxmlformats.org/presentationml/2006/main" xmlns:r="http://schemas.openxmlformats.org/officeDocument/2006/relationships">
+  <p:cSld>
+    <p:spTree>
+      <p:nvGrpSpPr>
+        <p:cNvPr id="1" name=""/>
+        <p:cNvGrpSpPr/>
+        <p:nvPr/>
+      </p:nvGrpSpPr>
+      <p:grpSpPr>
+        <a:xfrm>
+          <a:off x="0" y="0"/>
+          <a:ext cx="0" cy="0"/>
+          <a:chOff x="0" y="0"/>
+          <a:chExt cx="0" cy="0"/>
+        </a:xfrm>
+      </p:grpSpPr>
+      <p:sp>
+        <p:nvSpPr>
+          <p:cNvPr id="2" name="Slide Image Placeholder 1"/>
+          <p:cNvSpPr>
+            <a:spLocks noGrp="1"/>
+          </p:cNvSpPr>
+          <p:nvPr>
+            <p:ph type="sldImg" idx="2"/>
+          </p:nvPr>
+        </p:nvSpPr>
+        <p:spPr/>
+      </p:sp>
+      <p:sp>
+        <p:nvSpPr>
+          <p:cNvPr id="3" name="Notes Placeholder 2"/>
+          <p:cNvSpPr>
+            <a:spLocks noGrp="1"/>
+          </p:cNvSpPr>
+          <p:nvPr>
+            <p:ph type="body" idx="3" sz="quarter"/>
+          </p:nvPr>
+        </p:nvSpPr>
+        <p:spPr/>
+        <p:txBody>
+          <a:bodyPr/>
+          <a:lstStyle/>
+          <a:p>
+            <a:r>
+              <a:t>RETO 4 · Preguntas prohibidas — ✍️ creatieve beperking</a:t>
+            </a:r>
+          </a:p>
+          <a:p>
+            <a:r>
+              <a:t>OPDRACHT: Achterhaal leeftijd, stad en talen van je partner zónder «¿cuántos años…?», «¿dónde…?» of «¿qué lenguas…?» te gebruiken.</a:t>
+            </a:r>
+          </a:p>
+          <a:p>
+            <a:r>
+              <a:t>DE REGEL: De drie rechtstreekse vragen zijn verboden. Je moet er dus omheen: met een voorstel, een vergelijking of een gok die je laat bevestigen.</a:t>
+            </a:r>
+          </a:p>
+          <a:p>
+            <a:r>
+              <a:t>VERLOOP: Mira las tres preguntas prohibidas. Piensa un rodeo para cada una. | Pregunta. Tu compañero/a solo contesta lo que le preguntas de verdad. | Anota los tres datos. ¿Los tienes todos? Cambiad de papel. | Comparad: ¿qué rodeo ha funcionado mejor?</a:t>
+            </a:r>
+          </a:p>
+          <a:p>
+            <a:r>
+              <a:t>SLEUTEL: Er is geen enkel juist antwoord — wel een meetbaar resultaat: heb je de drie gegevens binnen zonder de verboden vragen?  ||  De sterkste omweg is meestal de gok met bevestiging («¿Eres del dos mil nueve?»): die levert een getal op zonder ernaar te vragen.  ||  Deze reto bereidt de omweg-strategie voor die in U2 terugkomt bij «Mi gente, sin la palabra familia».</a:t>
+            </a:r>
+          </a:p>
+          <a:p>
+            <a:r>
+              <a:t>NOTA: Kort houden. Tien minuten is genoeg; daarna wordt de beperking een spel op zich en verdwijnt het luisteren.</a:t>
+            </a:r>
+          </a:p>
+        </p:txBody>
+      </p:sp>
+    </p:spTree>
+  </p:cSld>
+  <p:clrMapOvr>
+    <a:masterClrMapping/>
+  </p:clrMapOvr>
+</p:notes>
+</file>
+
+<file path=ppt/notesSlides/notesSlide26.xml><?xml version="1.0" encoding="utf-8"?>
+<p:notes xmlns:a="http://schemas.openxmlformats.org/drawingml/2006/main" xmlns:p="http://schemas.openxmlformats.org/presentationml/2006/main" xmlns:r="http://schemas.openxmlformats.org/officeDocument/2006/relationships">
+  <p:cSld>
+    <p:spTree>
+      <p:nvGrpSpPr>
+        <p:cNvPr id="1" name=""/>
+        <p:cNvGrpSpPr/>
+        <p:nvPr/>
+      </p:nvGrpSpPr>
+      <p:grpSpPr>
+        <a:xfrm>
+          <a:off x="0" y="0"/>
+          <a:ext cx="0" cy="0"/>
+          <a:chOff x="0" y="0"/>
+          <a:chExt cx="0" cy="0"/>
+        </a:xfrm>
+      </p:grpSpPr>
+      <p:sp>
+        <p:nvSpPr>
+          <p:cNvPr id="2" name="Slide Image Placeholder 1"/>
+          <p:cNvSpPr>
+            <a:spLocks noGrp="1"/>
+          </p:cNvSpPr>
+          <p:nvPr>
+            <p:ph type="sldImg" idx="2"/>
+          </p:nvPr>
+        </p:nvSpPr>
+        <p:spPr/>
+      </p:sp>
+      <p:sp>
+        <p:nvSpPr>
+          <p:cNvPr id="3" name="Notes Placeholder 2"/>
+          <p:cNvSpPr>
+            <a:spLocks noGrp="1"/>
+          </p:cNvSpPr>
+          <p:nvPr>
+            <p:ph type="body" idx="3" sz="quarter"/>
+          </p:nvPr>
+        </p:nvSpPr>
+        <p:spPr/>
+        <p:txBody>
+          <a:bodyPr/>
+          <a:lstStyle/>
+          <a:p>
+            <a:r>
+              <a:t>RETO 9 · Perfil para el algoritmo — ⚖️ onderhandeling &amp; dilemma</a:t>
+            </a:r>
+          </a:p>
+          <a:p>
+            <a:r>
+              <a:t>OPDRACHT: Het algoritme stelt uitwisselingsduo's voor. Elk voorstel wordt verdedigd met «son… porque…». Zonder reden geen match.</a:t>
+            </a:r>
+          </a:p>
+          <a:p>
+            <a:r>
+              <a:t>DE REGEL: Het algoritme mag niemand koppelen op naam of op wie bevriend is. Alleen gegevens uit de profielen tellen, en de reden moet met «son» of «tienen» geformuleerd worden.</a:t>
+            </a:r>
+          </a:p>
+          <a:p>
+            <a:r>
+              <a:t>VERLOOP: Escribe tu perfil en cuatro frases. Sin nombre. | Los perfiles van al azar a la pizarra, numerados. | El algoritmo (tres alumnos) propone parejas y las justifica. | La clase acepta o rechaza. ¿Rechazo? Hay que dar una razón mejor.</a:t>
+            </a:r>
+          </a:p>
+          <a:p>
+            <a:r>
+              <a:t>SLEUTEL: De didactische winst zit in het weigeren: wie «nee» zegt, moet een béter argument geven, en dus opnieuw een zin met ser of tener bouwen.  ||  Model: «El tres y el ocho son pareja porque los dos son belgas y tienen dieciséis años.» — «No, porque uno vive en un pueblo y el otro en la ciudad.»  ||  Let op de valstrik van §2: nationaliteit met kleine letter (belgas, no Belgas).</a:t>
+            </a:r>
+          </a:p>
+          <a:p>
+            <a:r>
+              <a:t>NOTA: Werkt alleen anoniem. Zodra er namen bij komen, gaat het over vriendschappen in plaats van over gegevens — en dan verdwijnt het Spaans.</a:t>
+            </a:r>
+          </a:p>
+        </p:txBody>
       </p:sp>
     </p:spTree>
   </p:cSld>
@@ -38399,6 +38651,6464 @@
                 <a:latin typeface="Inter"/>
               </a:rPr>
               <a:t>23</a:t>
+            </a:r>
+          </a:p>
+        </p:txBody>
+      </p:sp>
+    </p:spTree>
+  </p:cSld>
+  <p:clrMapOvr>
+    <a:masterClrMapping/>
+  </p:clrMapOvr>
+</p:sld>
+</file>
+
+<file path=ppt/slides/slide24.xml><?xml version="1.0" encoding="utf-8"?>
+<p:sld xmlns:a="http://schemas.openxmlformats.org/drawingml/2006/main" xmlns:p="http://schemas.openxmlformats.org/presentationml/2006/main" xmlns:r="http://schemas.openxmlformats.org/officeDocument/2006/relationships">
+  <p:cSld>
+    <p:spTree>
+      <p:nvGrpSpPr>
+        <p:cNvPr id="1" name=""/>
+        <p:cNvGrpSpPr/>
+        <p:nvPr/>
+      </p:nvGrpSpPr>
+      <p:grpSpPr/>
+      <p:sp>
+        <p:nvSpPr>
+          <p:cNvPr id="2" name="Fondo"/>
+          <p:cNvSpPr/>
+          <p:nvPr/>
+        </p:nvSpPr>
+        <p:spPr>
+          <a:xfrm>
+            <a:off x="0" y="0"/>
+            <a:ext cx="12191695" cy="6858000"/>
+          </a:xfrm>
+          <a:prstGeom prst="rect">
+            <a:avLst/>
+          </a:prstGeom>
+          <a:solidFill>
+            <a:srgbClr val="FCFBF8"/>
+          </a:solidFill>
+          <a:ln>
+            <a:noFill/>
+          </a:ln>
+          <a:effectLst/>
+        </p:spPr>
+        <p:style>
+          <a:lnRef idx="1">
+            <a:schemeClr val="accent1"/>
+          </a:lnRef>
+          <a:fillRef idx="3">
+            <a:schemeClr val="accent1"/>
+          </a:fillRef>
+          <a:effectRef idx="2">
+            <a:schemeClr val="accent1"/>
+          </a:effectRef>
+          <a:fontRef idx="minor">
+            <a:schemeClr val="lt1"/>
+          </a:fontRef>
+        </p:style>
+        <p:txBody>
+          <a:bodyPr rtlCol="0" anchor="ctr"/>
+          <a:lstStyle/>
+          <a:p/>
+        </p:txBody>
+      </p:sp>
+      <p:sp>
+        <p:nvSpPr>
+          <p:cNvPr id="3" name="Cabecera"/>
+          <p:cNvSpPr/>
+          <p:nvPr/>
+        </p:nvSpPr>
+        <p:spPr>
+          <a:xfrm>
+            <a:off x="0" y="0"/>
+            <a:ext cx="12191695" cy="1078992"/>
+          </a:xfrm>
+          <a:prstGeom prst="rect">
+            <a:avLst/>
+          </a:prstGeom>
+          <a:solidFill>
+            <a:srgbClr val="1E9E74"/>
+          </a:solidFill>
+          <a:ln>
+            <a:noFill/>
+          </a:ln>
+          <a:effectLst/>
+        </p:spPr>
+        <p:style>
+          <a:lnRef idx="1">
+            <a:schemeClr val="accent1"/>
+          </a:lnRef>
+          <a:fillRef idx="3">
+            <a:schemeClr val="accent1"/>
+          </a:fillRef>
+          <a:effectRef idx="2">
+            <a:schemeClr val="accent1"/>
+          </a:effectRef>
+          <a:fontRef idx="minor">
+            <a:schemeClr val="lt1"/>
+          </a:fontRef>
+        </p:style>
+        <p:txBody>
+          <a:bodyPr rtlCol="0" anchor="ctr"/>
+          <a:lstStyle/>
+          <a:p/>
+        </p:txBody>
+      </p:sp>
+      <p:sp>
+        <p:nvSpPr>
+          <p:cNvPr id="4" name="Chip"/>
+          <p:cNvSpPr/>
+          <p:nvPr/>
+        </p:nvSpPr>
+        <p:spPr>
+          <a:xfrm>
+            <a:off x="457200" y="182880"/>
+            <a:ext cx="3017520" cy="292608"/>
+          </a:xfrm>
+          <a:prstGeom prst="roundRect">
+            <a:avLst>
+              <a:gd name="adj" fmla="val 50000"/>
+            </a:avLst>
+          </a:prstGeom>
+          <a:solidFill>
+            <a:srgbClr val="FFFFFF"/>
+          </a:solidFill>
+          <a:ln>
+            <a:noFill/>
+          </a:ln>
+          <a:effectLst/>
+        </p:spPr>
+        <p:style>
+          <a:lnRef idx="1">
+            <a:schemeClr val="accent1"/>
+          </a:lnRef>
+          <a:fillRef idx="3">
+            <a:schemeClr val="accent1"/>
+          </a:fillRef>
+          <a:effectRef idx="2">
+            <a:schemeClr val="accent1"/>
+          </a:effectRef>
+          <a:fontRef idx="minor">
+            <a:schemeClr val="lt1"/>
+          </a:fontRef>
+        </p:style>
+        <p:txBody>
+          <a:bodyPr rtlCol="0" anchor="ctr"/>
+          <a:lstStyle/>
+          <a:p/>
+        </p:txBody>
+      </p:sp>
+      <p:sp>
+        <p:nvSpPr>
+          <p:cNvPr id="5" name="ChipTxt"/>
+          <p:cNvSpPr txBox="1"/>
+          <p:nvPr/>
+        </p:nvSpPr>
+        <p:spPr>
+          <a:xfrm>
+            <a:off x="457200" y="173736"/>
+            <a:ext cx="3017520" cy="310896"/>
+          </a:xfrm>
+          <a:prstGeom prst="rect">
+            <a:avLst/>
+          </a:prstGeom>
+          <a:noFill/>
+        </p:spPr>
+        <p:txBody>
+          <a:bodyPr wrap="square" anchor="ctr" lIns="45720" rIns="45720" tIns="27432" bIns="27432">
+            <a:normAutofit/>
+          </a:bodyPr>
+          <a:lstStyle/>
+          <a:p>
+            <a:pPr algn="ctr"/>
+            <a:r>
+              <a:rPr sz="950" b="1">
+                <a:solidFill>
+                  <a:srgbClr val="157355"/>
+                </a:solidFill>
+                <a:latin typeface="Inter"/>
+              </a:rPr>
+              <a:t>RETO 1 · SIMULATIE MET BEPERKING</a:t>
+            </a:r>
+          </a:p>
+        </p:txBody>
+      </p:sp>
+      <p:sp>
+        <p:nvSpPr>
+          <p:cNvPr id="6" name="Titulo"/>
+          <p:cNvSpPr txBox="1"/>
+          <p:nvPr/>
+        </p:nvSpPr>
+        <p:spPr>
+          <a:xfrm>
+            <a:off x="457200" y="502920"/>
+            <a:ext cx="8412480" cy="475488"/>
+          </a:xfrm>
+          <a:prstGeom prst="rect">
+            <a:avLst/>
+          </a:prstGeom>
+          <a:noFill/>
+        </p:spPr>
+        <p:txBody>
+          <a:bodyPr wrap="square" anchor="t" lIns="45720" rIns="45720" tIns="27432" bIns="27432">
+            <a:normAutofit/>
+          </a:bodyPr>
+          <a:lstStyle/>
+          <a:p>
+            <a:pPr algn="l"/>
+            <a:r>
+              <a:rPr sz="2700" b="1">
+                <a:solidFill>
+                  <a:srgbClr val="FFFFFF"/>
+                </a:solidFill>
+                <a:latin typeface="Bricolage Grotesque"/>
+              </a:rPr>
+              <a:t>Rueda de prensa</a:t>
+            </a:r>
+          </a:p>
+        </p:txBody>
+      </p:sp>
+      <p:sp>
+        <p:nvSpPr>
+          <p:cNvPr id="7" name="Badges"/>
+          <p:cNvSpPr txBox="1"/>
+          <p:nvPr/>
+        </p:nvSpPr>
+        <p:spPr>
+          <a:xfrm>
+            <a:off x="9052560" y="256032"/>
+            <a:ext cx="2651760" cy="640080"/>
+          </a:xfrm>
+          <a:prstGeom prst="rect">
+            <a:avLst/>
+          </a:prstGeom>
+          <a:noFill/>
+        </p:spPr>
+        <p:txBody>
+          <a:bodyPr wrap="square" anchor="t" lIns="45720" rIns="45720" tIns="27432" bIns="27432">
+            <a:normAutofit/>
+          </a:bodyPr>
+          <a:lstStyle/>
+          <a:p>
+            <a:pPr algn="r"/>
+            <a:r>
+              <a:rPr sz="1000">
+                <a:solidFill>
+                  <a:srgbClr val="E4F4EE"/>
+                </a:solidFill>
+                <a:latin typeface="Inter"/>
+              </a:rPr>
+              <a:t>🏫 Toda la clase</a:t>
+            </a:r>
+          </a:p>
+          <a:p>
+            <a:pPr algn="r"/>
+            <a:r>
+              <a:rPr sz="1000">
+                <a:solidFill>
+                  <a:srgbClr val="E4F4EE"/>
+                </a:solidFill>
+                <a:latin typeface="Inter"/>
+              </a:rPr>
+              <a:t>± 15 min · ★★★</a:t>
+            </a:r>
+          </a:p>
+        </p:txBody>
+      </p:sp>
+      <p:sp>
+        <p:nvSpPr>
+          <p:cNvPr id="8" name="Gancho"/>
+          <p:cNvSpPr txBox="1"/>
+          <p:nvPr/>
+        </p:nvSpPr>
+        <p:spPr>
+          <a:xfrm>
+            <a:off x="457200" y="1225296"/>
+            <a:ext cx="11274552" cy="566928"/>
+          </a:xfrm>
+          <a:prstGeom prst="rect">
+            <a:avLst/>
+          </a:prstGeom>
+          <a:noFill/>
+        </p:spPr>
+        <p:txBody>
+          <a:bodyPr wrap="square" anchor="t" lIns="45720" rIns="45720" tIns="27432" bIns="27432">
+            <a:normAutofit/>
+          </a:bodyPr>
+          <a:lstStyle/>
+          <a:p>
+            <a:pPr algn="l"/>
+            <a:r>
+              <a:rPr sz="1600" b="1">
+                <a:solidFill>
+                  <a:srgbClr val="157355"/>
+                </a:solidFill>
+                <a:latin typeface="Bricolage Grotesque"/>
+              </a:rPr>
+              <a:t>Silencio, empieza la rueda de prensa. Tenéis tres minutos con la estrella.</a:t>
+            </a:r>
+          </a:p>
+          <a:p>
+            <a:pPr algn="l"/>
+            <a:r>
+              <a:rPr sz="1100" i="1">
+                <a:solidFill>
+                  <a:srgbClr val="6A6E78"/>
+                </a:solidFill>
+                <a:latin typeface="Inter"/>
+              </a:rPr>
+              <a:t>Stilte, de persconferentie begint. Jullie krijgen drie minuten met de ster.</a:t>
+            </a:r>
+          </a:p>
+        </p:txBody>
+      </p:sp>
+      <p:sp>
+        <p:nvSpPr>
+          <p:cNvPr id="9" name="ReglaCaja"/>
+          <p:cNvSpPr/>
+          <p:nvPr/>
+        </p:nvSpPr>
+        <p:spPr>
+          <a:xfrm>
+            <a:off x="457200" y="1847088"/>
+            <a:ext cx="11274552" cy="658368"/>
+          </a:xfrm>
+          <a:prstGeom prst="roundRect">
+            <a:avLst>
+              <a:gd name="adj" fmla="val 5000"/>
+            </a:avLst>
+          </a:prstGeom>
+          <a:solidFill>
+            <a:srgbClr val="FBF3D6"/>
+          </a:solidFill>
+          <a:ln>
+            <a:noFill/>
+          </a:ln>
+          <a:effectLst/>
+        </p:spPr>
+        <p:style>
+          <a:lnRef idx="1">
+            <a:schemeClr val="accent1"/>
+          </a:lnRef>
+          <a:fillRef idx="3">
+            <a:schemeClr val="accent1"/>
+          </a:fillRef>
+          <a:effectRef idx="2">
+            <a:schemeClr val="accent1"/>
+          </a:effectRef>
+          <a:fontRef idx="minor">
+            <a:schemeClr val="lt1"/>
+          </a:fontRef>
+        </p:style>
+        <p:txBody>
+          <a:bodyPr rtlCol="0" anchor="ctr"/>
+          <a:lstStyle/>
+          <a:p/>
+        </p:txBody>
+      </p:sp>
+      <p:sp>
+        <p:nvSpPr>
+          <p:cNvPr id="10" name="ReglaTxt"/>
+          <p:cNvSpPr txBox="1"/>
+          <p:nvPr/>
+        </p:nvSpPr>
+        <p:spPr>
+          <a:xfrm>
+            <a:off x="603504" y="1883664"/>
+            <a:ext cx="10972800" cy="585216"/>
+          </a:xfrm>
+          <a:prstGeom prst="rect">
+            <a:avLst/>
+          </a:prstGeom>
+          <a:noFill/>
+        </p:spPr>
+        <p:txBody>
+          <a:bodyPr wrap="square" anchor="t" lIns="45720" rIns="45720" tIns="27432" bIns="27432">
+            <a:normAutofit/>
+          </a:bodyPr>
+          <a:lstStyle/>
+          <a:p>
+            <a:pPr algn="l"/>
+            <a:r>
+              <a:rPr sz="850" b="1">
+                <a:solidFill>
+                  <a:srgbClr val="B7860B"/>
+                </a:solidFill>
+                <a:latin typeface="Inter"/>
+              </a:rPr>
+              <a:t>LA REGLA DEL RETO</a:t>
+            </a:r>
+          </a:p>
+          <a:p>
+            <a:pPr algn="l"/>
+            <a:r>
+              <a:rPr sz="1100">
+                <a:solidFill>
+                  <a:srgbClr val="20242E"/>
+                </a:solidFill>
+                <a:latin typeface="Inter"/>
+              </a:rPr>
+              <a:t>Een ja/nee-vraag kost je je beurt. Je moet dus met qué, quién, dónde, cuándo, cómo, cuánto of por qué beginnen — en niemand mag hetzelfde vraagwoord twee keer gebruiken.</a:t>
+            </a:r>
+          </a:p>
+        </p:txBody>
+      </p:sp>
+      <p:sp>
+        <p:nvSpPr>
+          <p:cNvPr id="11" name="Tarjeta 0"/>
+          <p:cNvSpPr/>
+          <p:nvPr/>
+        </p:nvSpPr>
+        <p:spPr>
+          <a:xfrm>
+            <a:off x="457200" y="2670048"/>
+            <a:ext cx="2708910" cy="1170432"/>
+          </a:xfrm>
+          <a:prstGeom prst="roundRect">
+            <a:avLst>
+              <a:gd name="adj" fmla="val 6000"/>
+            </a:avLst>
+          </a:prstGeom>
+          <a:solidFill>
+            <a:srgbClr val="FFFFFF"/>
+          </a:solidFill>
+          <a:ln w="12700">
+            <a:solidFill>
+              <a:srgbClr val="E4E3DE"/>
+            </a:solidFill>
+          </a:ln>
+          <a:effectLst/>
+        </p:spPr>
+        <p:style>
+          <a:lnRef idx="1">
+            <a:schemeClr val="accent1"/>
+          </a:lnRef>
+          <a:fillRef idx="3">
+            <a:schemeClr val="accent1"/>
+          </a:fillRef>
+          <a:effectRef idx="2">
+            <a:schemeClr val="accent1"/>
+          </a:effectRef>
+          <a:fontRef idx="minor">
+            <a:schemeClr val="lt1"/>
+          </a:fontRef>
+        </p:style>
+        <p:txBody>
+          <a:bodyPr rtlCol="0" anchor="ctr"/>
+          <a:lstStyle/>
+          <a:p/>
+        </p:txBody>
+      </p:sp>
+      <p:sp>
+        <p:nvSpPr>
+          <p:cNvPr id="12" name="TarjetaTxt 0"/>
+          <p:cNvSpPr txBox="1"/>
+          <p:nvPr/>
+        </p:nvSpPr>
+        <p:spPr>
+          <a:xfrm>
+            <a:off x="548640" y="2724912"/>
+            <a:ext cx="2526030" cy="859536"/>
+          </a:xfrm>
+          <a:prstGeom prst="rect">
+            <a:avLst/>
+          </a:prstGeom>
+          <a:noFill/>
+        </p:spPr>
+        <p:txBody>
+          <a:bodyPr wrap="square" anchor="t" lIns="45720" rIns="45720" tIns="27432" bIns="27432">
+            <a:normAutofit/>
+          </a:bodyPr>
+          <a:lstStyle/>
+          <a:p>
+            <a:pPr algn="l"/>
+            <a:r>
+              <a:rPr sz="1100" b="1">
+                <a:solidFill>
+                  <a:srgbClr val="157355"/>
+                </a:solidFill>
+                <a:latin typeface="Bricolage Grotesque"/>
+              </a:rPr>
+              <a:t>¿Qué…?</a:t>
+            </a:r>
+          </a:p>
+          <a:p>
+            <a:pPr algn="l"/>
+            <a:r>
+              <a:rPr sz="1000">
+                <a:solidFill>
+                  <a:srgbClr val="20242E"/>
+                </a:solidFill>
+                <a:latin typeface="Inter"/>
+              </a:rPr>
+              <a:t>wat</a:t>
+            </a:r>
+          </a:p>
+        </p:txBody>
+      </p:sp>
+      <p:sp>
+        <p:nvSpPr>
+          <p:cNvPr id="13" name="Onthul 0"/>
+          <p:cNvSpPr/>
+          <p:nvPr/>
+        </p:nvSpPr>
+        <p:spPr>
+          <a:xfrm>
+            <a:off x="548640" y="3547872"/>
+            <a:ext cx="2526030" cy="237744"/>
+          </a:xfrm>
+          <a:prstGeom prst="roundRect">
+            <a:avLst>
+              <a:gd name="adj" fmla="val 20000"/>
+            </a:avLst>
+          </a:prstGeom>
+          <a:solidFill>
+            <a:srgbClr val="E4F4EE"/>
+          </a:solidFill>
+          <a:ln>
+            <a:noFill/>
+          </a:ln>
+          <a:effectLst/>
+        </p:spPr>
+        <p:style>
+          <a:lnRef idx="1">
+            <a:schemeClr val="accent1"/>
+          </a:lnRef>
+          <a:fillRef idx="3">
+            <a:schemeClr val="accent1"/>
+          </a:fillRef>
+          <a:effectRef idx="2">
+            <a:schemeClr val="accent1"/>
+          </a:effectRef>
+          <a:fontRef idx="minor">
+            <a:schemeClr val="lt1"/>
+          </a:fontRef>
+        </p:style>
+        <p:txBody>
+          <a:bodyPr rtlCol="0" anchor="ctr"/>
+          <a:lstStyle/>
+          <a:p/>
+        </p:txBody>
+      </p:sp>
+      <p:sp>
+        <p:nvSpPr>
+          <p:cNvPr id="14" name="OnthulTxt 0"/>
+          <p:cNvSpPr txBox="1"/>
+          <p:nvPr/>
+        </p:nvSpPr>
+        <p:spPr>
+          <a:xfrm>
+            <a:off x="566928" y="3547872"/>
+            <a:ext cx="2489454" cy="237744"/>
+          </a:xfrm>
+          <a:prstGeom prst="rect">
+            <a:avLst/>
+          </a:prstGeom>
+          <a:noFill/>
+        </p:spPr>
+        <p:txBody>
+          <a:bodyPr wrap="square" anchor="ctr" lIns="45720" rIns="45720" tIns="27432" bIns="27432">
+            <a:normAutofit/>
+          </a:bodyPr>
+          <a:lstStyle/>
+          <a:p>
+            <a:pPr algn="l"/>
+            <a:r>
+              <a:rPr sz="850" b="1">
+                <a:solidFill>
+                  <a:srgbClr val="157355"/>
+                </a:solidFill>
+                <a:latin typeface="Inter"/>
+              </a:rPr>
+              <a:t>· usado ·</a:t>
+            </a:r>
+          </a:p>
+        </p:txBody>
+      </p:sp>
+      <p:sp>
+        <p:nvSpPr>
+          <p:cNvPr id="15" name="Tarjeta 1"/>
+          <p:cNvSpPr/>
+          <p:nvPr/>
+        </p:nvSpPr>
+        <p:spPr>
+          <a:xfrm>
+            <a:off x="3312414" y="2670048"/>
+            <a:ext cx="2708910" cy="1170432"/>
+          </a:xfrm>
+          <a:prstGeom prst="roundRect">
+            <a:avLst>
+              <a:gd name="adj" fmla="val 6000"/>
+            </a:avLst>
+          </a:prstGeom>
+          <a:solidFill>
+            <a:srgbClr val="FFFFFF"/>
+          </a:solidFill>
+          <a:ln w="12700">
+            <a:solidFill>
+              <a:srgbClr val="E4E3DE"/>
+            </a:solidFill>
+          </a:ln>
+          <a:effectLst/>
+        </p:spPr>
+        <p:style>
+          <a:lnRef idx="1">
+            <a:schemeClr val="accent1"/>
+          </a:lnRef>
+          <a:fillRef idx="3">
+            <a:schemeClr val="accent1"/>
+          </a:fillRef>
+          <a:effectRef idx="2">
+            <a:schemeClr val="accent1"/>
+          </a:effectRef>
+          <a:fontRef idx="minor">
+            <a:schemeClr val="lt1"/>
+          </a:fontRef>
+        </p:style>
+        <p:txBody>
+          <a:bodyPr rtlCol="0" anchor="ctr"/>
+          <a:lstStyle/>
+          <a:p/>
+        </p:txBody>
+      </p:sp>
+      <p:sp>
+        <p:nvSpPr>
+          <p:cNvPr id="16" name="TarjetaTxt 1"/>
+          <p:cNvSpPr txBox="1"/>
+          <p:nvPr/>
+        </p:nvSpPr>
+        <p:spPr>
+          <a:xfrm>
+            <a:off x="3403854" y="2724912"/>
+            <a:ext cx="2526030" cy="859536"/>
+          </a:xfrm>
+          <a:prstGeom prst="rect">
+            <a:avLst/>
+          </a:prstGeom>
+          <a:noFill/>
+        </p:spPr>
+        <p:txBody>
+          <a:bodyPr wrap="square" anchor="t" lIns="45720" rIns="45720" tIns="27432" bIns="27432">
+            <a:normAutofit/>
+          </a:bodyPr>
+          <a:lstStyle/>
+          <a:p>
+            <a:pPr algn="l"/>
+            <a:r>
+              <a:rPr sz="1100" b="1">
+                <a:solidFill>
+                  <a:srgbClr val="157355"/>
+                </a:solidFill>
+                <a:latin typeface="Bricolage Grotesque"/>
+              </a:rPr>
+              <a:t>¿Quién…?</a:t>
+            </a:r>
+          </a:p>
+          <a:p>
+            <a:pPr algn="l"/>
+            <a:r>
+              <a:rPr sz="1000">
+                <a:solidFill>
+                  <a:srgbClr val="20242E"/>
+                </a:solidFill>
+                <a:latin typeface="Inter"/>
+              </a:rPr>
+              <a:t>wie</a:t>
+            </a:r>
+          </a:p>
+        </p:txBody>
+      </p:sp>
+      <p:sp>
+        <p:nvSpPr>
+          <p:cNvPr id="17" name="Onthul 1"/>
+          <p:cNvSpPr/>
+          <p:nvPr/>
+        </p:nvSpPr>
+        <p:spPr>
+          <a:xfrm>
+            <a:off x="3403854" y="3547872"/>
+            <a:ext cx="2526030" cy="237744"/>
+          </a:xfrm>
+          <a:prstGeom prst="roundRect">
+            <a:avLst>
+              <a:gd name="adj" fmla="val 20000"/>
+            </a:avLst>
+          </a:prstGeom>
+          <a:solidFill>
+            <a:srgbClr val="E4F4EE"/>
+          </a:solidFill>
+          <a:ln>
+            <a:noFill/>
+          </a:ln>
+          <a:effectLst/>
+        </p:spPr>
+        <p:style>
+          <a:lnRef idx="1">
+            <a:schemeClr val="accent1"/>
+          </a:lnRef>
+          <a:fillRef idx="3">
+            <a:schemeClr val="accent1"/>
+          </a:fillRef>
+          <a:effectRef idx="2">
+            <a:schemeClr val="accent1"/>
+          </a:effectRef>
+          <a:fontRef idx="minor">
+            <a:schemeClr val="lt1"/>
+          </a:fontRef>
+        </p:style>
+        <p:txBody>
+          <a:bodyPr rtlCol="0" anchor="ctr"/>
+          <a:lstStyle/>
+          <a:p/>
+        </p:txBody>
+      </p:sp>
+      <p:sp>
+        <p:nvSpPr>
+          <p:cNvPr id="18" name="OnthulTxt 1"/>
+          <p:cNvSpPr txBox="1"/>
+          <p:nvPr/>
+        </p:nvSpPr>
+        <p:spPr>
+          <a:xfrm>
+            <a:off x="3422142" y="3547872"/>
+            <a:ext cx="2489454" cy="237744"/>
+          </a:xfrm>
+          <a:prstGeom prst="rect">
+            <a:avLst/>
+          </a:prstGeom>
+          <a:noFill/>
+        </p:spPr>
+        <p:txBody>
+          <a:bodyPr wrap="square" anchor="ctr" lIns="45720" rIns="45720" tIns="27432" bIns="27432">
+            <a:normAutofit/>
+          </a:bodyPr>
+          <a:lstStyle/>
+          <a:p>
+            <a:pPr algn="l"/>
+            <a:r>
+              <a:rPr sz="850" b="1">
+                <a:solidFill>
+                  <a:srgbClr val="157355"/>
+                </a:solidFill>
+                <a:latin typeface="Inter"/>
+              </a:rPr>
+              <a:t>· usado ·</a:t>
+            </a:r>
+          </a:p>
+        </p:txBody>
+      </p:sp>
+      <p:sp>
+        <p:nvSpPr>
+          <p:cNvPr id="19" name="Tarjeta 2"/>
+          <p:cNvSpPr/>
+          <p:nvPr/>
+        </p:nvSpPr>
+        <p:spPr>
+          <a:xfrm>
+            <a:off x="6167628" y="2670048"/>
+            <a:ext cx="2708910" cy="1170432"/>
+          </a:xfrm>
+          <a:prstGeom prst="roundRect">
+            <a:avLst>
+              <a:gd name="adj" fmla="val 6000"/>
+            </a:avLst>
+          </a:prstGeom>
+          <a:solidFill>
+            <a:srgbClr val="FFFFFF"/>
+          </a:solidFill>
+          <a:ln w="12700">
+            <a:solidFill>
+              <a:srgbClr val="E4E3DE"/>
+            </a:solidFill>
+          </a:ln>
+          <a:effectLst/>
+        </p:spPr>
+        <p:style>
+          <a:lnRef idx="1">
+            <a:schemeClr val="accent1"/>
+          </a:lnRef>
+          <a:fillRef idx="3">
+            <a:schemeClr val="accent1"/>
+          </a:fillRef>
+          <a:effectRef idx="2">
+            <a:schemeClr val="accent1"/>
+          </a:effectRef>
+          <a:fontRef idx="minor">
+            <a:schemeClr val="lt1"/>
+          </a:fontRef>
+        </p:style>
+        <p:txBody>
+          <a:bodyPr rtlCol="0" anchor="ctr"/>
+          <a:lstStyle/>
+          <a:p/>
+        </p:txBody>
+      </p:sp>
+      <p:sp>
+        <p:nvSpPr>
+          <p:cNvPr id="20" name="TarjetaTxt 2"/>
+          <p:cNvSpPr txBox="1"/>
+          <p:nvPr/>
+        </p:nvSpPr>
+        <p:spPr>
+          <a:xfrm>
+            <a:off x="6259068" y="2724912"/>
+            <a:ext cx="2526030" cy="859536"/>
+          </a:xfrm>
+          <a:prstGeom prst="rect">
+            <a:avLst/>
+          </a:prstGeom>
+          <a:noFill/>
+        </p:spPr>
+        <p:txBody>
+          <a:bodyPr wrap="square" anchor="t" lIns="45720" rIns="45720" tIns="27432" bIns="27432">
+            <a:normAutofit/>
+          </a:bodyPr>
+          <a:lstStyle/>
+          <a:p>
+            <a:pPr algn="l"/>
+            <a:r>
+              <a:rPr sz="1100" b="1">
+                <a:solidFill>
+                  <a:srgbClr val="157355"/>
+                </a:solidFill>
+                <a:latin typeface="Bricolage Grotesque"/>
+              </a:rPr>
+              <a:t>¿Dónde…?</a:t>
+            </a:r>
+          </a:p>
+          <a:p>
+            <a:pPr algn="l"/>
+            <a:r>
+              <a:rPr sz="1000">
+                <a:solidFill>
+                  <a:srgbClr val="20242E"/>
+                </a:solidFill>
+                <a:latin typeface="Inter"/>
+              </a:rPr>
+              <a:t>waar</a:t>
+            </a:r>
+          </a:p>
+        </p:txBody>
+      </p:sp>
+      <p:sp>
+        <p:nvSpPr>
+          <p:cNvPr id="21" name="Onthul 2"/>
+          <p:cNvSpPr/>
+          <p:nvPr/>
+        </p:nvSpPr>
+        <p:spPr>
+          <a:xfrm>
+            <a:off x="6259068" y="3547872"/>
+            <a:ext cx="2526030" cy="237744"/>
+          </a:xfrm>
+          <a:prstGeom prst="roundRect">
+            <a:avLst>
+              <a:gd name="adj" fmla="val 20000"/>
+            </a:avLst>
+          </a:prstGeom>
+          <a:solidFill>
+            <a:srgbClr val="E4F4EE"/>
+          </a:solidFill>
+          <a:ln>
+            <a:noFill/>
+          </a:ln>
+          <a:effectLst/>
+        </p:spPr>
+        <p:style>
+          <a:lnRef idx="1">
+            <a:schemeClr val="accent1"/>
+          </a:lnRef>
+          <a:fillRef idx="3">
+            <a:schemeClr val="accent1"/>
+          </a:fillRef>
+          <a:effectRef idx="2">
+            <a:schemeClr val="accent1"/>
+          </a:effectRef>
+          <a:fontRef idx="minor">
+            <a:schemeClr val="lt1"/>
+          </a:fontRef>
+        </p:style>
+        <p:txBody>
+          <a:bodyPr rtlCol="0" anchor="ctr"/>
+          <a:lstStyle/>
+          <a:p/>
+        </p:txBody>
+      </p:sp>
+      <p:sp>
+        <p:nvSpPr>
+          <p:cNvPr id="22" name="OnthulTxt 2"/>
+          <p:cNvSpPr txBox="1"/>
+          <p:nvPr/>
+        </p:nvSpPr>
+        <p:spPr>
+          <a:xfrm>
+            <a:off x="6277356" y="3547872"/>
+            <a:ext cx="2489454" cy="237744"/>
+          </a:xfrm>
+          <a:prstGeom prst="rect">
+            <a:avLst/>
+          </a:prstGeom>
+          <a:noFill/>
+        </p:spPr>
+        <p:txBody>
+          <a:bodyPr wrap="square" anchor="ctr" lIns="45720" rIns="45720" tIns="27432" bIns="27432">
+            <a:normAutofit/>
+          </a:bodyPr>
+          <a:lstStyle/>
+          <a:p>
+            <a:pPr algn="l"/>
+            <a:r>
+              <a:rPr sz="850" b="1">
+                <a:solidFill>
+                  <a:srgbClr val="157355"/>
+                </a:solidFill>
+                <a:latin typeface="Inter"/>
+              </a:rPr>
+              <a:t>· usado ·</a:t>
+            </a:r>
+          </a:p>
+        </p:txBody>
+      </p:sp>
+      <p:sp>
+        <p:nvSpPr>
+          <p:cNvPr id="23" name="Tarjeta 3"/>
+          <p:cNvSpPr/>
+          <p:nvPr/>
+        </p:nvSpPr>
+        <p:spPr>
+          <a:xfrm>
+            <a:off x="9022842" y="2670048"/>
+            <a:ext cx="2708910" cy="1170432"/>
+          </a:xfrm>
+          <a:prstGeom prst="roundRect">
+            <a:avLst>
+              <a:gd name="adj" fmla="val 6000"/>
+            </a:avLst>
+          </a:prstGeom>
+          <a:solidFill>
+            <a:srgbClr val="FFFFFF"/>
+          </a:solidFill>
+          <a:ln w="12700">
+            <a:solidFill>
+              <a:srgbClr val="E4E3DE"/>
+            </a:solidFill>
+          </a:ln>
+          <a:effectLst/>
+        </p:spPr>
+        <p:style>
+          <a:lnRef idx="1">
+            <a:schemeClr val="accent1"/>
+          </a:lnRef>
+          <a:fillRef idx="3">
+            <a:schemeClr val="accent1"/>
+          </a:fillRef>
+          <a:effectRef idx="2">
+            <a:schemeClr val="accent1"/>
+          </a:effectRef>
+          <a:fontRef idx="minor">
+            <a:schemeClr val="lt1"/>
+          </a:fontRef>
+        </p:style>
+        <p:txBody>
+          <a:bodyPr rtlCol="0" anchor="ctr"/>
+          <a:lstStyle/>
+          <a:p/>
+        </p:txBody>
+      </p:sp>
+      <p:sp>
+        <p:nvSpPr>
+          <p:cNvPr id="24" name="TarjetaTxt 3"/>
+          <p:cNvSpPr txBox="1"/>
+          <p:nvPr/>
+        </p:nvSpPr>
+        <p:spPr>
+          <a:xfrm>
+            <a:off x="9114282" y="2724912"/>
+            <a:ext cx="2526030" cy="859536"/>
+          </a:xfrm>
+          <a:prstGeom prst="rect">
+            <a:avLst/>
+          </a:prstGeom>
+          <a:noFill/>
+        </p:spPr>
+        <p:txBody>
+          <a:bodyPr wrap="square" anchor="t" lIns="45720" rIns="45720" tIns="27432" bIns="27432">
+            <a:normAutofit/>
+          </a:bodyPr>
+          <a:lstStyle/>
+          <a:p>
+            <a:pPr algn="l"/>
+            <a:r>
+              <a:rPr sz="1100" b="1">
+                <a:solidFill>
+                  <a:srgbClr val="157355"/>
+                </a:solidFill>
+                <a:latin typeface="Bricolage Grotesque"/>
+              </a:rPr>
+              <a:t>¿Cuándo…?</a:t>
+            </a:r>
+          </a:p>
+          <a:p>
+            <a:pPr algn="l"/>
+            <a:r>
+              <a:rPr sz="1000">
+                <a:solidFill>
+                  <a:srgbClr val="20242E"/>
+                </a:solidFill>
+                <a:latin typeface="Inter"/>
+              </a:rPr>
+              <a:t>wanneer</a:t>
+            </a:r>
+          </a:p>
+        </p:txBody>
+      </p:sp>
+      <p:sp>
+        <p:nvSpPr>
+          <p:cNvPr id="25" name="Onthul 3"/>
+          <p:cNvSpPr/>
+          <p:nvPr/>
+        </p:nvSpPr>
+        <p:spPr>
+          <a:xfrm>
+            <a:off x="9114282" y="3547872"/>
+            <a:ext cx="2526030" cy="237744"/>
+          </a:xfrm>
+          <a:prstGeom prst="roundRect">
+            <a:avLst>
+              <a:gd name="adj" fmla="val 20000"/>
+            </a:avLst>
+          </a:prstGeom>
+          <a:solidFill>
+            <a:srgbClr val="E4F4EE"/>
+          </a:solidFill>
+          <a:ln>
+            <a:noFill/>
+          </a:ln>
+          <a:effectLst/>
+        </p:spPr>
+        <p:style>
+          <a:lnRef idx="1">
+            <a:schemeClr val="accent1"/>
+          </a:lnRef>
+          <a:fillRef idx="3">
+            <a:schemeClr val="accent1"/>
+          </a:fillRef>
+          <a:effectRef idx="2">
+            <a:schemeClr val="accent1"/>
+          </a:effectRef>
+          <a:fontRef idx="minor">
+            <a:schemeClr val="lt1"/>
+          </a:fontRef>
+        </p:style>
+        <p:txBody>
+          <a:bodyPr rtlCol="0" anchor="ctr"/>
+          <a:lstStyle/>
+          <a:p/>
+        </p:txBody>
+      </p:sp>
+      <p:sp>
+        <p:nvSpPr>
+          <p:cNvPr id="26" name="OnthulTxt 3"/>
+          <p:cNvSpPr txBox="1"/>
+          <p:nvPr/>
+        </p:nvSpPr>
+        <p:spPr>
+          <a:xfrm>
+            <a:off x="9132570" y="3547872"/>
+            <a:ext cx="2489454" cy="237744"/>
+          </a:xfrm>
+          <a:prstGeom prst="rect">
+            <a:avLst/>
+          </a:prstGeom>
+          <a:noFill/>
+        </p:spPr>
+        <p:txBody>
+          <a:bodyPr wrap="square" anchor="ctr" lIns="45720" rIns="45720" tIns="27432" bIns="27432">
+            <a:normAutofit/>
+          </a:bodyPr>
+          <a:lstStyle/>
+          <a:p>
+            <a:pPr algn="l"/>
+            <a:r>
+              <a:rPr sz="850" b="1">
+                <a:solidFill>
+                  <a:srgbClr val="157355"/>
+                </a:solidFill>
+                <a:latin typeface="Inter"/>
+              </a:rPr>
+              <a:t>· usado ·</a:t>
+            </a:r>
+          </a:p>
+        </p:txBody>
+      </p:sp>
+      <p:sp>
+        <p:nvSpPr>
+          <p:cNvPr id="27" name="Tarjeta 4"/>
+          <p:cNvSpPr/>
+          <p:nvPr/>
+        </p:nvSpPr>
+        <p:spPr>
+          <a:xfrm>
+            <a:off x="457200" y="3968496"/>
+            <a:ext cx="2708910" cy="1170432"/>
+          </a:xfrm>
+          <a:prstGeom prst="roundRect">
+            <a:avLst>
+              <a:gd name="adj" fmla="val 6000"/>
+            </a:avLst>
+          </a:prstGeom>
+          <a:solidFill>
+            <a:srgbClr val="FFFFFF"/>
+          </a:solidFill>
+          <a:ln w="12700">
+            <a:solidFill>
+              <a:srgbClr val="E4E3DE"/>
+            </a:solidFill>
+          </a:ln>
+          <a:effectLst/>
+        </p:spPr>
+        <p:style>
+          <a:lnRef idx="1">
+            <a:schemeClr val="accent1"/>
+          </a:lnRef>
+          <a:fillRef idx="3">
+            <a:schemeClr val="accent1"/>
+          </a:fillRef>
+          <a:effectRef idx="2">
+            <a:schemeClr val="accent1"/>
+          </a:effectRef>
+          <a:fontRef idx="minor">
+            <a:schemeClr val="lt1"/>
+          </a:fontRef>
+        </p:style>
+        <p:txBody>
+          <a:bodyPr rtlCol="0" anchor="ctr"/>
+          <a:lstStyle/>
+          <a:p/>
+        </p:txBody>
+      </p:sp>
+      <p:sp>
+        <p:nvSpPr>
+          <p:cNvPr id="28" name="TarjetaTxt 4"/>
+          <p:cNvSpPr txBox="1"/>
+          <p:nvPr/>
+        </p:nvSpPr>
+        <p:spPr>
+          <a:xfrm>
+            <a:off x="548640" y="4023360"/>
+            <a:ext cx="2526030" cy="859536"/>
+          </a:xfrm>
+          <a:prstGeom prst="rect">
+            <a:avLst/>
+          </a:prstGeom>
+          <a:noFill/>
+        </p:spPr>
+        <p:txBody>
+          <a:bodyPr wrap="square" anchor="t" lIns="45720" rIns="45720" tIns="27432" bIns="27432">
+            <a:normAutofit/>
+          </a:bodyPr>
+          <a:lstStyle/>
+          <a:p>
+            <a:pPr algn="l"/>
+            <a:r>
+              <a:rPr sz="1100" b="1">
+                <a:solidFill>
+                  <a:srgbClr val="157355"/>
+                </a:solidFill>
+                <a:latin typeface="Bricolage Grotesque"/>
+              </a:rPr>
+              <a:t>¿Cómo…?</a:t>
+            </a:r>
+          </a:p>
+          <a:p>
+            <a:pPr algn="l"/>
+            <a:r>
+              <a:rPr sz="1000">
+                <a:solidFill>
+                  <a:srgbClr val="20242E"/>
+                </a:solidFill>
+                <a:latin typeface="Inter"/>
+              </a:rPr>
+              <a:t>hoe</a:t>
+            </a:r>
+          </a:p>
+        </p:txBody>
+      </p:sp>
+      <p:sp>
+        <p:nvSpPr>
+          <p:cNvPr id="29" name="Onthul 4"/>
+          <p:cNvSpPr/>
+          <p:nvPr/>
+        </p:nvSpPr>
+        <p:spPr>
+          <a:xfrm>
+            <a:off x="548640" y="4846320"/>
+            <a:ext cx="2526030" cy="237744"/>
+          </a:xfrm>
+          <a:prstGeom prst="roundRect">
+            <a:avLst>
+              <a:gd name="adj" fmla="val 20000"/>
+            </a:avLst>
+          </a:prstGeom>
+          <a:solidFill>
+            <a:srgbClr val="E4F4EE"/>
+          </a:solidFill>
+          <a:ln>
+            <a:noFill/>
+          </a:ln>
+          <a:effectLst/>
+        </p:spPr>
+        <p:style>
+          <a:lnRef idx="1">
+            <a:schemeClr val="accent1"/>
+          </a:lnRef>
+          <a:fillRef idx="3">
+            <a:schemeClr val="accent1"/>
+          </a:fillRef>
+          <a:effectRef idx="2">
+            <a:schemeClr val="accent1"/>
+          </a:effectRef>
+          <a:fontRef idx="minor">
+            <a:schemeClr val="lt1"/>
+          </a:fontRef>
+        </p:style>
+        <p:txBody>
+          <a:bodyPr rtlCol="0" anchor="ctr"/>
+          <a:lstStyle/>
+          <a:p/>
+        </p:txBody>
+      </p:sp>
+      <p:sp>
+        <p:nvSpPr>
+          <p:cNvPr id="30" name="OnthulTxt 4"/>
+          <p:cNvSpPr txBox="1"/>
+          <p:nvPr/>
+        </p:nvSpPr>
+        <p:spPr>
+          <a:xfrm>
+            <a:off x="566928" y="4846320"/>
+            <a:ext cx="2489454" cy="237744"/>
+          </a:xfrm>
+          <a:prstGeom prst="rect">
+            <a:avLst/>
+          </a:prstGeom>
+          <a:noFill/>
+        </p:spPr>
+        <p:txBody>
+          <a:bodyPr wrap="square" anchor="ctr" lIns="45720" rIns="45720" tIns="27432" bIns="27432">
+            <a:normAutofit/>
+          </a:bodyPr>
+          <a:lstStyle/>
+          <a:p>
+            <a:pPr algn="l"/>
+            <a:r>
+              <a:rPr sz="850" b="1">
+                <a:solidFill>
+                  <a:srgbClr val="157355"/>
+                </a:solidFill>
+                <a:latin typeface="Inter"/>
+              </a:rPr>
+              <a:t>· usado ·</a:t>
+            </a:r>
+          </a:p>
+        </p:txBody>
+      </p:sp>
+      <p:sp>
+        <p:nvSpPr>
+          <p:cNvPr id="31" name="Tarjeta 5"/>
+          <p:cNvSpPr/>
+          <p:nvPr/>
+        </p:nvSpPr>
+        <p:spPr>
+          <a:xfrm>
+            <a:off x="3312414" y="3968496"/>
+            <a:ext cx="2708910" cy="1170432"/>
+          </a:xfrm>
+          <a:prstGeom prst="roundRect">
+            <a:avLst>
+              <a:gd name="adj" fmla="val 6000"/>
+            </a:avLst>
+          </a:prstGeom>
+          <a:solidFill>
+            <a:srgbClr val="FFFFFF"/>
+          </a:solidFill>
+          <a:ln w="12700">
+            <a:solidFill>
+              <a:srgbClr val="E4E3DE"/>
+            </a:solidFill>
+          </a:ln>
+          <a:effectLst/>
+        </p:spPr>
+        <p:style>
+          <a:lnRef idx="1">
+            <a:schemeClr val="accent1"/>
+          </a:lnRef>
+          <a:fillRef idx="3">
+            <a:schemeClr val="accent1"/>
+          </a:fillRef>
+          <a:effectRef idx="2">
+            <a:schemeClr val="accent1"/>
+          </a:effectRef>
+          <a:fontRef idx="minor">
+            <a:schemeClr val="lt1"/>
+          </a:fontRef>
+        </p:style>
+        <p:txBody>
+          <a:bodyPr rtlCol="0" anchor="ctr"/>
+          <a:lstStyle/>
+          <a:p/>
+        </p:txBody>
+      </p:sp>
+      <p:sp>
+        <p:nvSpPr>
+          <p:cNvPr id="32" name="TarjetaTxt 5"/>
+          <p:cNvSpPr txBox="1"/>
+          <p:nvPr/>
+        </p:nvSpPr>
+        <p:spPr>
+          <a:xfrm>
+            <a:off x="3403854" y="4023360"/>
+            <a:ext cx="2526030" cy="859536"/>
+          </a:xfrm>
+          <a:prstGeom prst="rect">
+            <a:avLst/>
+          </a:prstGeom>
+          <a:noFill/>
+        </p:spPr>
+        <p:txBody>
+          <a:bodyPr wrap="square" anchor="t" lIns="45720" rIns="45720" tIns="27432" bIns="27432">
+            <a:normAutofit/>
+          </a:bodyPr>
+          <a:lstStyle/>
+          <a:p>
+            <a:pPr algn="l"/>
+            <a:r>
+              <a:rPr sz="1100" b="1">
+                <a:solidFill>
+                  <a:srgbClr val="157355"/>
+                </a:solidFill>
+                <a:latin typeface="Bricolage Grotesque"/>
+              </a:rPr>
+              <a:t>¿Cuántos…?</a:t>
+            </a:r>
+          </a:p>
+          <a:p>
+            <a:pPr algn="l"/>
+            <a:r>
+              <a:rPr sz="1000">
+                <a:solidFill>
+                  <a:srgbClr val="20242E"/>
+                </a:solidFill>
+                <a:latin typeface="Inter"/>
+              </a:rPr>
+              <a:t>hoeveel</a:t>
+            </a:r>
+          </a:p>
+        </p:txBody>
+      </p:sp>
+      <p:sp>
+        <p:nvSpPr>
+          <p:cNvPr id="33" name="Onthul 5"/>
+          <p:cNvSpPr/>
+          <p:nvPr/>
+        </p:nvSpPr>
+        <p:spPr>
+          <a:xfrm>
+            <a:off x="3403854" y="4846320"/>
+            <a:ext cx="2526030" cy="237744"/>
+          </a:xfrm>
+          <a:prstGeom prst="roundRect">
+            <a:avLst>
+              <a:gd name="adj" fmla="val 20000"/>
+            </a:avLst>
+          </a:prstGeom>
+          <a:solidFill>
+            <a:srgbClr val="E4F4EE"/>
+          </a:solidFill>
+          <a:ln>
+            <a:noFill/>
+          </a:ln>
+          <a:effectLst/>
+        </p:spPr>
+        <p:style>
+          <a:lnRef idx="1">
+            <a:schemeClr val="accent1"/>
+          </a:lnRef>
+          <a:fillRef idx="3">
+            <a:schemeClr val="accent1"/>
+          </a:fillRef>
+          <a:effectRef idx="2">
+            <a:schemeClr val="accent1"/>
+          </a:effectRef>
+          <a:fontRef idx="minor">
+            <a:schemeClr val="lt1"/>
+          </a:fontRef>
+        </p:style>
+        <p:txBody>
+          <a:bodyPr rtlCol="0" anchor="ctr"/>
+          <a:lstStyle/>
+          <a:p/>
+        </p:txBody>
+      </p:sp>
+      <p:sp>
+        <p:nvSpPr>
+          <p:cNvPr id="34" name="OnthulTxt 5"/>
+          <p:cNvSpPr txBox="1"/>
+          <p:nvPr/>
+        </p:nvSpPr>
+        <p:spPr>
+          <a:xfrm>
+            <a:off x="3422142" y="4846320"/>
+            <a:ext cx="2489454" cy="237744"/>
+          </a:xfrm>
+          <a:prstGeom prst="rect">
+            <a:avLst/>
+          </a:prstGeom>
+          <a:noFill/>
+        </p:spPr>
+        <p:txBody>
+          <a:bodyPr wrap="square" anchor="ctr" lIns="45720" rIns="45720" tIns="27432" bIns="27432">
+            <a:normAutofit/>
+          </a:bodyPr>
+          <a:lstStyle/>
+          <a:p>
+            <a:pPr algn="l"/>
+            <a:r>
+              <a:rPr sz="850" b="1">
+                <a:solidFill>
+                  <a:srgbClr val="157355"/>
+                </a:solidFill>
+                <a:latin typeface="Inter"/>
+              </a:rPr>
+              <a:t>· usado ·</a:t>
+            </a:r>
+          </a:p>
+        </p:txBody>
+      </p:sp>
+      <p:sp>
+        <p:nvSpPr>
+          <p:cNvPr id="35" name="Tarjeta 6"/>
+          <p:cNvSpPr/>
+          <p:nvPr/>
+        </p:nvSpPr>
+        <p:spPr>
+          <a:xfrm>
+            <a:off x="6167628" y="3968496"/>
+            <a:ext cx="2708910" cy="1170432"/>
+          </a:xfrm>
+          <a:prstGeom prst="roundRect">
+            <a:avLst>
+              <a:gd name="adj" fmla="val 6000"/>
+            </a:avLst>
+          </a:prstGeom>
+          <a:solidFill>
+            <a:srgbClr val="FFFFFF"/>
+          </a:solidFill>
+          <a:ln w="12700">
+            <a:solidFill>
+              <a:srgbClr val="E4E3DE"/>
+            </a:solidFill>
+          </a:ln>
+          <a:effectLst/>
+        </p:spPr>
+        <p:style>
+          <a:lnRef idx="1">
+            <a:schemeClr val="accent1"/>
+          </a:lnRef>
+          <a:fillRef idx="3">
+            <a:schemeClr val="accent1"/>
+          </a:fillRef>
+          <a:effectRef idx="2">
+            <a:schemeClr val="accent1"/>
+          </a:effectRef>
+          <a:fontRef idx="minor">
+            <a:schemeClr val="lt1"/>
+          </a:fontRef>
+        </p:style>
+        <p:txBody>
+          <a:bodyPr rtlCol="0" anchor="ctr"/>
+          <a:lstStyle/>
+          <a:p/>
+        </p:txBody>
+      </p:sp>
+      <p:sp>
+        <p:nvSpPr>
+          <p:cNvPr id="36" name="TarjetaTxt 6"/>
+          <p:cNvSpPr txBox="1"/>
+          <p:nvPr/>
+        </p:nvSpPr>
+        <p:spPr>
+          <a:xfrm>
+            <a:off x="6259068" y="4023360"/>
+            <a:ext cx="2526030" cy="859536"/>
+          </a:xfrm>
+          <a:prstGeom prst="rect">
+            <a:avLst/>
+          </a:prstGeom>
+          <a:noFill/>
+        </p:spPr>
+        <p:txBody>
+          <a:bodyPr wrap="square" anchor="t" lIns="45720" rIns="45720" tIns="27432" bIns="27432">
+            <a:normAutofit/>
+          </a:bodyPr>
+          <a:lstStyle/>
+          <a:p>
+            <a:pPr algn="l"/>
+            <a:r>
+              <a:rPr sz="1100" b="1">
+                <a:solidFill>
+                  <a:srgbClr val="157355"/>
+                </a:solidFill>
+                <a:latin typeface="Bricolage Grotesque"/>
+              </a:rPr>
+              <a:t>¿Por qué…?</a:t>
+            </a:r>
+          </a:p>
+          <a:p>
+            <a:pPr algn="l"/>
+            <a:r>
+              <a:rPr sz="1000">
+                <a:solidFill>
+                  <a:srgbClr val="20242E"/>
+                </a:solidFill>
+                <a:latin typeface="Inter"/>
+              </a:rPr>
+              <a:t>waarom</a:t>
+            </a:r>
+          </a:p>
+        </p:txBody>
+      </p:sp>
+      <p:sp>
+        <p:nvSpPr>
+          <p:cNvPr id="37" name="Onthul 6"/>
+          <p:cNvSpPr/>
+          <p:nvPr/>
+        </p:nvSpPr>
+        <p:spPr>
+          <a:xfrm>
+            <a:off x="6259068" y="4846320"/>
+            <a:ext cx="2526030" cy="237744"/>
+          </a:xfrm>
+          <a:prstGeom prst="roundRect">
+            <a:avLst>
+              <a:gd name="adj" fmla="val 20000"/>
+            </a:avLst>
+          </a:prstGeom>
+          <a:solidFill>
+            <a:srgbClr val="E4F4EE"/>
+          </a:solidFill>
+          <a:ln>
+            <a:noFill/>
+          </a:ln>
+          <a:effectLst/>
+        </p:spPr>
+        <p:style>
+          <a:lnRef idx="1">
+            <a:schemeClr val="accent1"/>
+          </a:lnRef>
+          <a:fillRef idx="3">
+            <a:schemeClr val="accent1"/>
+          </a:fillRef>
+          <a:effectRef idx="2">
+            <a:schemeClr val="accent1"/>
+          </a:effectRef>
+          <a:fontRef idx="minor">
+            <a:schemeClr val="lt1"/>
+          </a:fontRef>
+        </p:style>
+        <p:txBody>
+          <a:bodyPr rtlCol="0" anchor="ctr"/>
+          <a:lstStyle/>
+          <a:p/>
+        </p:txBody>
+      </p:sp>
+      <p:sp>
+        <p:nvSpPr>
+          <p:cNvPr id="38" name="OnthulTxt 6"/>
+          <p:cNvSpPr txBox="1"/>
+          <p:nvPr/>
+        </p:nvSpPr>
+        <p:spPr>
+          <a:xfrm>
+            <a:off x="6277356" y="4846320"/>
+            <a:ext cx="2489454" cy="237744"/>
+          </a:xfrm>
+          <a:prstGeom prst="rect">
+            <a:avLst/>
+          </a:prstGeom>
+          <a:noFill/>
+        </p:spPr>
+        <p:txBody>
+          <a:bodyPr wrap="square" anchor="ctr" lIns="45720" rIns="45720" tIns="27432" bIns="27432">
+            <a:normAutofit/>
+          </a:bodyPr>
+          <a:lstStyle/>
+          <a:p>
+            <a:pPr algn="l"/>
+            <a:r>
+              <a:rPr sz="850" b="1">
+                <a:solidFill>
+                  <a:srgbClr val="157355"/>
+                </a:solidFill>
+                <a:latin typeface="Inter"/>
+              </a:rPr>
+              <a:t>· usado ·</a:t>
+            </a:r>
+          </a:p>
+        </p:txBody>
+      </p:sp>
+      <p:sp>
+        <p:nvSpPr>
+          <p:cNvPr id="39" name="Tarjeta 7"/>
+          <p:cNvSpPr/>
+          <p:nvPr/>
+        </p:nvSpPr>
+        <p:spPr>
+          <a:xfrm>
+            <a:off x="9022842" y="3968496"/>
+            <a:ext cx="2708910" cy="1170432"/>
+          </a:xfrm>
+          <a:prstGeom prst="roundRect">
+            <a:avLst>
+              <a:gd name="adj" fmla="val 6000"/>
+            </a:avLst>
+          </a:prstGeom>
+          <a:solidFill>
+            <a:srgbClr val="FFFFFF"/>
+          </a:solidFill>
+          <a:ln w="12700">
+            <a:solidFill>
+              <a:srgbClr val="E4E3DE"/>
+            </a:solidFill>
+          </a:ln>
+          <a:effectLst/>
+        </p:spPr>
+        <p:style>
+          <a:lnRef idx="1">
+            <a:schemeClr val="accent1"/>
+          </a:lnRef>
+          <a:fillRef idx="3">
+            <a:schemeClr val="accent1"/>
+          </a:fillRef>
+          <a:effectRef idx="2">
+            <a:schemeClr val="accent1"/>
+          </a:effectRef>
+          <a:fontRef idx="minor">
+            <a:schemeClr val="lt1"/>
+          </a:fontRef>
+        </p:style>
+        <p:txBody>
+          <a:bodyPr rtlCol="0" anchor="ctr"/>
+          <a:lstStyle/>
+          <a:p/>
+        </p:txBody>
+      </p:sp>
+      <p:sp>
+        <p:nvSpPr>
+          <p:cNvPr id="40" name="TarjetaTxt 7"/>
+          <p:cNvSpPr txBox="1"/>
+          <p:nvPr/>
+        </p:nvSpPr>
+        <p:spPr>
+          <a:xfrm>
+            <a:off x="9114282" y="4023360"/>
+            <a:ext cx="2526030" cy="1060704"/>
+          </a:xfrm>
+          <a:prstGeom prst="rect">
+            <a:avLst/>
+          </a:prstGeom>
+          <a:noFill/>
+        </p:spPr>
+        <p:txBody>
+          <a:bodyPr wrap="square" anchor="t" lIns="45720" rIns="45720" tIns="27432" bIns="27432">
+            <a:normAutofit/>
+          </a:bodyPr>
+          <a:lstStyle/>
+          <a:p>
+            <a:pPr algn="l"/>
+            <a:r>
+              <a:rPr sz="1100" b="1">
+                <a:solidFill>
+                  <a:srgbClr val="157355"/>
+                </a:solidFill>
+                <a:latin typeface="Bricolage Grotesque"/>
+              </a:rPr>
+              <a:t>★ una futbolista del Real Madrid</a:t>
+            </a:r>
+          </a:p>
+          <a:p>
+            <a:pPr algn="l"/>
+            <a:r>
+              <a:rPr sz="1000">
+                <a:solidFill>
+                  <a:srgbClr val="20242E"/>
+                </a:solidFill>
+                <a:latin typeface="Inter"/>
+              </a:rPr>
+              <a:t>speelt sinds haar zesde, woont in Madrid, spreekt drie talen</a:t>
+            </a:r>
+          </a:p>
+        </p:txBody>
+      </p:sp>
+      <p:sp>
+        <p:nvSpPr>
+          <p:cNvPr id="41" name="Tarjeta 8"/>
+          <p:cNvSpPr/>
+          <p:nvPr/>
+        </p:nvSpPr>
+        <p:spPr>
+          <a:xfrm>
+            <a:off x="457200" y="5266944"/>
+            <a:ext cx="2708910" cy="1170432"/>
+          </a:xfrm>
+          <a:prstGeom prst="roundRect">
+            <a:avLst>
+              <a:gd name="adj" fmla="val 6000"/>
+            </a:avLst>
+          </a:prstGeom>
+          <a:solidFill>
+            <a:srgbClr val="FFFFFF"/>
+          </a:solidFill>
+          <a:ln w="12700">
+            <a:solidFill>
+              <a:srgbClr val="E4E3DE"/>
+            </a:solidFill>
+          </a:ln>
+          <a:effectLst/>
+        </p:spPr>
+        <p:style>
+          <a:lnRef idx="1">
+            <a:schemeClr val="accent1"/>
+          </a:lnRef>
+          <a:fillRef idx="3">
+            <a:schemeClr val="accent1"/>
+          </a:fillRef>
+          <a:effectRef idx="2">
+            <a:schemeClr val="accent1"/>
+          </a:effectRef>
+          <a:fontRef idx="minor">
+            <a:schemeClr val="lt1"/>
+          </a:fontRef>
+        </p:style>
+        <p:txBody>
+          <a:bodyPr rtlCol="0" anchor="ctr"/>
+          <a:lstStyle/>
+          <a:p/>
+        </p:txBody>
+      </p:sp>
+      <p:sp>
+        <p:nvSpPr>
+          <p:cNvPr id="42" name="TarjetaTxt 8"/>
+          <p:cNvSpPr txBox="1"/>
+          <p:nvPr/>
+        </p:nvSpPr>
+        <p:spPr>
+          <a:xfrm>
+            <a:off x="548640" y="5321808"/>
+            <a:ext cx="2526030" cy="1060704"/>
+          </a:xfrm>
+          <a:prstGeom prst="rect">
+            <a:avLst/>
+          </a:prstGeom>
+          <a:noFill/>
+        </p:spPr>
+        <p:txBody>
+          <a:bodyPr wrap="square" anchor="t" lIns="45720" rIns="45720" tIns="27432" bIns="27432">
+            <a:normAutofit/>
+          </a:bodyPr>
+          <a:lstStyle/>
+          <a:p>
+            <a:pPr algn="l"/>
+            <a:r>
+              <a:rPr sz="1100" b="1">
+                <a:solidFill>
+                  <a:srgbClr val="157355"/>
+                </a:solidFill>
+                <a:latin typeface="Bricolage Grotesque"/>
+              </a:rPr>
+              <a:t>★ un cantante de Sevilla</a:t>
+            </a:r>
+          </a:p>
+          <a:p>
+            <a:pPr algn="l"/>
+            <a:r>
+              <a:rPr sz="1000">
+                <a:solidFill>
+                  <a:srgbClr val="20242E"/>
+                </a:solidFill>
+                <a:latin typeface="Inter"/>
+              </a:rPr>
+              <a:t>zingt flamenco-pop, twintig jaar, woont bij zijn oma</a:t>
+            </a:r>
+          </a:p>
+        </p:txBody>
+      </p:sp>
+      <p:sp>
+        <p:nvSpPr>
+          <p:cNvPr id="43" name="Tarjeta 9"/>
+          <p:cNvSpPr/>
+          <p:nvPr/>
+        </p:nvSpPr>
+        <p:spPr>
+          <a:xfrm>
+            <a:off x="3312414" y="5266944"/>
+            <a:ext cx="2708910" cy="1170432"/>
+          </a:xfrm>
+          <a:prstGeom prst="roundRect">
+            <a:avLst>
+              <a:gd name="adj" fmla="val 6000"/>
+            </a:avLst>
+          </a:prstGeom>
+          <a:solidFill>
+            <a:srgbClr val="FFFFFF"/>
+          </a:solidFill>
+          <a:ln w="12700">
+            <a:solidFill>
+              <a:srgbClr val="E4E3DE"/>
+            </a:solidFill>
+          </a:ln>
+          <a:effectLst/>
+        </p:spPr>
+        <p:style>
+          <a:lnRef idx="1">
+            <a:schemeClr val="accent1"/>
+          </a:lnRef>
+          <a:fillRef idx="3">
+            <a:schemeClr val="accent1"/>
+          </a:fillRef>
+          <a:effectRef idx="2">
+            <a:schemeClr val="accent1"/>
+          </a:effectRef>
+          <a:fontRef idx="minor">
+            <a:schemeClr val="lt1"/>
+          </a:fontRef>
+        </p:style>
+        <p:txBody>
+          <a:bodyPr rtlCol="0" anchor="ctr"/>
+          <a:lstStyle/>
+          <a:p/>
+        </p:txBody>
+      </p:sp>
+      <p:sp>
+        <p:nvSpPr>
+          <p:cNvPr id="44" name="TarjetaTxt 9"/>
+          <p:cNvSpPr txBox="1"/>
+          <p:nvPr/>
+        </p:nvSpPr>
+        <p:spPr>
+          <a:xfrm>
+            <a:off x="3403854" y="5321808"/>
+            <a:ext cx="2526030" cy="1060704"/>
+          </a:xfrm>
+          <a:prstGeom prst="rect">
+            <a:avLst/>
+          </a:prstGeom>
+          <a:noFill/>
+        </p:spPr>
+        <p:txBody>
+          <a:bodyPr wrap="square" anchor="t" lIns="45720" rIns="45720" tIns="27432" bIns="27432">
+            <a:normAutofit/>
+          </a:bodyPr>
+          <a:lstStyle/>
+          <a:p>
+            <a:pPr algn="l"/>
+            <a:r>
+              <a:rPr sz="1100" b="1">
+                <a:solidFill>
+                  <a:srgbClr val="157355"/>
+                </a:solidFill>
+                <a:latin typeface="Bricolage Grotesque"/>
+              </a:rPr>
+              <a:t>★ una astronauta mexicana</a:t>
+            </a:r>
+          </a:p>
+          <a:p>
+            <a:pPr algn="l"/>
+            <a:r>
+              <a:rPr sz="1000">
+                <a:solidFill>
+                  <a:srgbClr val="20242E"/>
+                </a:solidFill>
+                <a:latin typeface="Inter"/>
+              </a:rPr>
+              <a:t>werkt in Houston, spreekt Spaans en Engels, heeft twee kinderen</a:t>
+            </a:r>
+          </a:p>
+        </p:txBody>
+      </p:sp>
+      <p:sp>
+        <p:nvSpPr>
+          <p:cNvPr id="45" name="Tarjeta 10"/>
+          <p:cNvSpPr/>
+          <p:nvPr/>
+        </p:nvSpPr>
+        <p:spPr>
+          <a:xfrm>
+            <a:off x="6167628" y="5266944"/>
+            <a:ext cx="2708910" cy="1170432"/>
+          </a:xfrm>
+          <a:prstGeom prst="roundRect">
+            <a:avLst>
+              <a:gd name="adj" fmla="val 6000"/>
+            </a:avLst>
+          </a:prstGeom>
+          <a:solidFill>
+            <a:srgbClr val="FFFFFF"/>
+          </a:solidFill>
+          <a:ln w="12700">
+            <a:solidFill>
+              <a:srgbClr val="E4E3DE"/>
+            </a:solidFill>
+          </a:ln>
+          <a:effectLst/>
+        </p:spPr>
+        <p:style>
+          <a:lnRef idx="1">
+            <a:schemeClr val="accent1"/>
+          </a:lnRef>
+          <a:fillRef idx="3">
+            <a:schemeClr val="accent1"/>
+          </a:fillRef>
+          <a:effectRef idx="2">
+            <a:schemeClr val="accent1"/>
+          </a:effectRef>
+          <a:fontRef idx="minor">
+            <a:schemeClr val="lt1"/>
+          </a:fontRef>
+        </p:style>
+        <p:txBody>
+          <a:bodyPr rtlCol="0" anchor="ctr"/>
+          <a:lstStyle/>
+          <a:p/>
+        </p:txBody>
+      </p:sp>
+      <p:sp>
+        <p:nvSpPr>
+          <p:cNvPr id="46" name="TarjetaTxt 10"/>
+          <p:cNvSpPr txBox="1"/>
+          <p:nvPr/>
+        </p:nvSpPr>
+        <p:spPr>
+          <a:xfrm>
+            <a:off x="6259068" y="5321808"/>
+            <a:ext cx="2526030" cy="1060704"/>
+          </a:xfrm>
+          <a:prstGeom prst="rect">
+            <a:avLst/>
+          </a:prstGeom>
+          <a:noFill/>
+        </p:spPr>
+        <p:txBody>
+          <a:bodyPr wrap="square" anchor="t" lIns="45720" rIns="45720" tIns="27432" bIns="27432">
+            <a:normAutofit/>
+          </a:bodyPr>
+          <a:lstStyle/>
+          <a:p>
+            <a:pPr algn="l"/>
+            <a:r>
+              <a:rPr sz="1100" b="1">
+                <a:solidFill>
+                  <a:srgbClr val="157355"/>
+                </a:solidFill>
+                <a:latin typeface="Bricolage Grotesque"/>
+              </a:rPr>
+              <a:t>★ un cocinero peruano</a:t>
+            </a:r>
+          </a:p>
+          <a:p>
+            <a:pPr algn="l"/>
+            <a:r>
+              <a:rPr sz="1000">
+                <a:solidFill>
+                  <a:srgbClr val="20242E"/>
+                </a:solidFill>
+                <a:latin typeface="Inter"/>
+              </a:rPr>
+              <a:t>restaurant in Lima, kookt ceviche, veertig jaar</a:t>
+            </a:r>
+          </a:p>
+        </p:txBody>
+      </p:sp>
+    </p:spTree>
+  </p:cSld>
+  <p:clrMapOvr>
+    <a:masterClrMapping/>
+  </p:clrMapOvr>
+  <p:timing>
+    <p:tnLst>
+      <p:par>
+        <p:cTn id="1" dur="indefinite" restart="never" nodeType="tmRoot">
+          <p:childTnLst>
+            <p:seq concurrent="1" nextAc="seek">
+              <p:cTn id="2" dur="indefinite" nodeType="mainSeq">
+                <p:childTnLst>
+                  <p:par>
+                    <p:cTn id="5" fill="hold">
+                      <p:stCondLst>
+                        <p:cond delay="indefinite"/>
+                      </p:stCondLst>
+                      <p:childTnLst>
+                        <p:par>
+                          <p:cTn id="6" fill="hold">
+                            <p:stCondLst>
+                              <p:cond delay="0"/>
+                            </p:stCondLst>
+                            <p:childTnLst>
+                              <p:par>
+                                <p:cTn id="7" presetID="10" presetClass="entr" presetSubtype="0" fill="hold" grpId="0" nodeType="clickEffect">
+                                  <p:stCondLst>
+                                    <p:cond delay="0"/>
+                                  </p:stCondLst>
+                                  <p:childTnLst>
+                                    <p:set>
+                                      <p:cBhvr>
+                                        <p:cTn id="8" dur="1" fill="hold">
+                                          <p:stCondLst>
+                                            <p:cond delay="0"/>
+                                          </p:stCondLst>
+                                        </p:cTn>
+                                        <p:tgtEl>
+                                          <p:spTgt spid="13"/>
+                                        </p:tgtEl>
+                                        <p:attrNameLst>
+                                          <p:attrName>style.visibility</p:attrName>
+                                        </p:attrNameLst>
+                                      </p:cBhvr>
+                                      <p:to>
+                                        <p:strVal val="visible"/>
+                                      </p:to>
+                                    </p:set>
+                                    <p:animEffect transition="in" filter="fade">
+                                      <p:cBhvr>
+                                        <p:cTn id="9" dur="500"/>
+                                        <p:tgtEl>
+                                          <p:spTgt spid="13"/>
+                                        </p:tgtEl>
+                                      </p:cBhvr>
+                                    </p:animEffect>
+                                  </p:childTnLst>
+                                </p:cTn>
+                              </p:par>
+                            </p:childTnLst>
+                          </p:cTn>
+                        </p:par>
+                      </p:childTnLst>
+                    </p:cTn>
+                  </p:par>
+                  <p:par>
+                    <p:cTn id="10" fill="hold">
+                      <p:stCondLst>
+                        <p:cond delay="indefinite"/>
+                      </p:stCondLst>
+                      <p:childTnLst>
+                        <p:par>
+                          <p:cTn id="11" fill="hold">
+                            <p:stCondLst>
+                              <p:cond delay="0"/>
+                            </p:stCondLst>
+                            <p:childTnLst>
+                              <p:par>
+                                <p:cTn id="12" presetID="10" presetClass="entr" presetSubtype="0" fill="hold" grpId="0" nodeType="clickEffect">
+                                  <p:stCondLst>
+                                    <p:cond delay="0"/>
+                                  </p:stCondLst>
+                                  <p:childTnLst>
+                                    <p:set>
+                                      <p:cBhvr>
+                                        <p:cTn id="13" dur="1" fill="hold">
+                                          <p:stCondLst>
+                                            <p:cond delay="0"/>
+                                          </p:stCondLst>
+                                        </p:cTn>
+                                        <p:tgtEl>
+                                          <p:spTgt spid="14"/>
+                                        </p:tgtEl>
+                                        <p:attrNameLst>
+                                          <p:attrName>style.visibility</p:attrName>
+                                        </p:attrNameLst>
+                                      </p:cBhvr>
+                                      <p:to>
+                                        <p:strVal val="visible"/>
+                                      </p:to>
+                                    </p:set>
+                                    <p:animEffect transition="in" filter="fade">
+                                      <p:cBhvr>
+                                        <p:cTn id="14" dur="500"/>
+                                        <p:tgtEl>
+                                          <p:spTgt spid="14"/>
+                                        </p:tgtEl>
+                                      </p:cBhvr>
+                                    </p:animEffect>
+                                  </p:childTnLst>
+                                </p:cTn>
+                              </p:par>
+                            </p:childTnLst>
+                          </p:cTn>
+                        </p:par>
+                      </p:childTnLst>
+                    </p:cTn>
+                  </p:par>
+                  <p:par>
+                    <p:cTn id="15" fill="hold">
+                      <p:stCondLst>
+                        <p:cond delay="indefinite"/>
+                      </p:stCondLst>
+                      <p:childTnLst>
+                        <p:par>
+                          <p:cTn id="16" fill="hold">
+                            <p:stCondLst>
+                              <p:cond delay="0"/>
+                            </p:stCondLst>
+                            <p:childTnLst>
+                              <p:par>
+                                <p:cTn id="17" presetID="10" presetClass="entr" presetSubtype="0" fill="hold" grpId="0" nodeType="clickEffect">
+                                  <p:stCondLst>
+                                    <p:cond delay="0"/>
+                                  </p:stCondLst>
+                                  <p:childTnLst>
+                                    <p:set>
+                                      <p:cBhvr>
+                                        <p:cTn id="18" dur="1" fill="hold">
+                                          <p:stCondLst>
+                                            <p:cond delay="0"/>
+                                          </p:stCondLst>
+                                        </p:cTn>
+                                        <p:tgtEl>
+                                          <p:spTgt spid="17"/>
+                                        </p:tgtEl>
+                                        <p:attrNameLst>
+                                          <p:attrName>style.visibility</p:attrName>
+                                        </p:attrNameLst>
+                                      </p:cBhvr>
+                                      <p:to>
+                                        <p:strVal val="visible"/>
+                                      </p:to>
+                                    </p:set>
+                                    <p:animEffect transition="in" filter="fade">
+                                      <p:cBhvr>
+                                        <p:cTn id="19" dur="500"/>
+                                        <p:tgtEl>
+                                          <p:spTgt spid="17"/>
+                                        </p:tgtEl>
+                                      </p:cBhvr>
+                                    </p:animEffect>
+                                  </p:childTnLst>
+                                </p:cTn>
+                              </p:par>
+                            </p:childTnLst>
+                          </p:cTn>
+                        </p:par>
+                      </p:childTnLst>
+                    </p:cTn>
+                  </p:par>
+                  <p:par>
+                    <p:cTn id="20" fill="hold">
+                      <p:stCondLst>
+                        <p:cond delay="indefinite"/>
+                      </p:stCondLst>
+                      <p:childTnLst>
+                        <p:par>
+                          <p:cTn id="21" fill="hold">
+                            <p:stCondLst>
+                              <p:cond delay="0"/>
+                            </p:stCondLst>
+                            <p:childTnLst>
+                              <p:par>
+                                <p:cTn id="22" presetID="10" presetClass="entr" presetSubtype="0" fill="hold" grpId="0" nodeType="clickEffect">
+                                  <p:stCondLst>
+                                    <p:cond delay="0"/>
+                                  </p:stCondLst>
+                                  <p:childTnLst>
+                                    <p:set>
+                                      <p:cBhvr>
+                                        <p:cTn id="23" dur="1" fill="hold">
+                                          <p:stCondLst>
+                                            <p:cond delay="0"/>
+                                          </p:stCondLst>
+                                        </p:cTn>
+                                        <p:tgtEl>
+                                          <p:spTgt spid="18"/>
+                                        </p:tgtEl>
+                                        <p:attrNameLst>
+                                          <p:attrName>style.visibility</p:attrName>
+                                        </p:attrNameLst>
+                                      </p:cBhvr>
+                                      <p:to>
+                                        <p:strVal val="visible"/>
+                                      </p:to>
+                                    </p:set>
+                                    <p:animEffect transition="in" filter="fade">
+                                      <p:cBhvr>
+                                        <p:cTn id="24" dur="500"/>
+                                        <p:tgtEl>
+                                          <p:spTgt spid="18"/>
+                                        </p:tgtEl>
+                                      </p:cBhvr>
+                                    </p:animEffect>
+                                  </p:childTnLst>
+                                </p:cTn>
+                              </p:par>
+                            </p:childTnLst>
+                          </p:cTn>
+                        </p:par>
+                      </p:childTnLst>
+                    </p:cTn>
+                  </p:par>
+                  <p:par>
+                    <p:cTn id="25" fill="hold">
+                      <p:stCondLst>
+                        <p:cond delay="indefinite"/>
+                      </p:stCondLst>
+                      <p:childTnLst>
+                        <p:par>
+                          <p:cTn id="26" fill="hold">
+                            <p:stCondLst>
+                              <p:cond delay="0"/>
+                            </p:stCondLst>
+                            <p:childTnLst>
+                              <p:par>
+                                <p:cTn id="27" presetID="10" presetClass="entr" presetSubtype="0" fill="hold" grpId="0" nodeType="clickEffect">
+                                  <p:stCondLst>
+                                    <p:cond delay="0"/>
+                                  </p:stCondLst>
+                                  <p:childTnLst>
+                                    <p:set>
+                                      <p:cBhvr>
+                                        <p:cTn id="28" dur="1" fill="hold">
+                                          <p:stCondLst>
+                                            <p:cond delay="0"/>
+                                          </p:stCondLst>
+                                        </p:cTn>
+                                        <p:tgtEl>
+                                          <p:spTgt spid="21"/>
+                                        </p:tgtEl>
+                                        <p:attrNameLst>
+                                          <p:attrName>style.visibility</p:attrName>
+                                        </p:attrNameLst>
+                                      </p:cBhvr>
+                                      <p:to>
+                                        <p:strVal val="visible"/>
+                                      </p:to>
+                                    </p:set>
+                                    <p:animEffect transition="in" filter="fade">
+                                      <p:cBhvr>
+                                        <p:cTn id="29" dur="500"/>
+                                        <p:tgtEl>
+                                          <p:spTgt spid="21"/>
+                                        </p:tgtEl>
+                                      </p:cBhvr>
+                                    </p:animEffect>
+                                  </p:childTnLst>
+                                </p:cTn>
+                              </p:par>
+                            </p:childTnLst>
+                          </p:cTn>
+                        </p:par>
+                      </p:childTnLst>
+                    </p:cTn>
+                  </p:par>
+                  <p:par>
+                    <p:cTn id="30" fill="hold">
+                      <p:stCondLst>
+                        <p:cond delay="indefinite"/>
+                      </p:stCondLst>
+                      <p:childTnLst>
+                        <p:par>
+                          <p:cTn id="31" fill="hold">
+                            <p:stCondLst>
+                              <p:cond delay="0"/>
+                            </p:stCondLst>
+                            <p:childTnLst>
+                              <p:par>
+                                <p:cTn id="32" presetID="10" presetClass="entr" presetSubtype="0" fill="hold" grpId="0" nodeType="clickEffect">
+                                  <p:stCondLst>
+                                    <p:cond delay="0"/>
+                                  </p:stCondLst>
+                                  <p:childTnLst>
+                                    <p:set>
+                                      <p:cBhvr>
+                                        <p:cTn id="33" dur="1" fill="hold">
+                                          <p:stCondLst>
+                                            <p:cond delay="0"/>
+                                          </p:stCondLst>
+                                        </p:cTn>
+                                        <p:tgtEl>
+                                          <p:spTgt spid="22"/>
+                                        </p:tgtEl>
+                                        <p:attrNameLst>
+                                          <p:attrName>style.visibility</p:attrName>
+                                        </p:attrNameLst>
+                                      </p:cBhvr>
+                                      <p:to>
+                                        <p:strVal val="visible"/>
+                                      </p:to>
+                                    </p:set>
+                                    <p:animEffect transition="in" filter="fade">
+                                      <p:cBhvr>
+                                        <p:cTn id="34" dur="500"/>
+                                        <p:tgtEl>
+                                          <p:spTgt spid="22"/>
+                                        </p:tgtEl>
+                                      </p:cBhvr>
+                                    </p:animEffect>
+                                  </p:childTnLst>
+                                </p:cTn>
+                              </p:par>
+                            </p:childTnLst>
+                          </p:cTn>
+                        </p:par>
+                      </p:childTnLst>
+                    </p:cTn>
+                  </p:par>
+                  <p:par>
+                    <p:cTn id="35" fill="hold">
+                      <p:stCondLst>
+                        <p:cond delay="indefinite"/>
+                      </p:stCondLst>
+                      <p:childTnLst>
+                        <p:par>
+                          <p:cTn id="36" fill="hold">
+                            <p:stCondLst>
+                              <p:cond delay="0"/>
+                            </p:stCondLst>
+                            <p:childTnLst>
+                              <p:par>
+                                <p:cTn id="37" presetID="10" presetClass="entr" presetSubtype="0" fill="hold" grpId="0" nodeType="clickEffect">
+                                  <p:stCondLst>
+                                    <p:cond delay="0"/>
+                                  </p:stCondLst>
+                                  <p:childTnLst>
+                                    <p:set>
+                                      <p:cBhvr>
+                                        <p:cTn id="38" dur="1" fill="hold">
+                                          <p:stCondLst>
+                                            <p:cond delay="0"/>
+                                          </p:stCondLst>
+                                        </p:cTn>
+                                        <p:tgtEl>
+                                          <p:spTgt spid="25"/>
+                                        </p:tgtEl>
+                                        <p:attrNameLst>
+                                          <p:attrName>style.visibility</p:attrName>
+                                        </p:attrNameLst>
+                                      </p:cBhvr>
+                                      <p:to>
+                                        <p:strVal val="visible"/>
+                                      </p:to>
+                                    </p:set>
+                                    <p:animEffect transition="in" filter="fade">
+                                      <p:cBhvr>
+                                        <p:cTn id="39" dur="500"/>
+                                        <p:tgtEl>
+                                          <p:spTgt spid="25"/>
+                                        </p:tgtEl>
+                                      </p:cBhvr>
+                                    </p:animEffect>
+                                  </p:childTnLst>
+                                </p:cTn>
+                              </p:par>
+                            </p:childTnLst>
+                          </p:cTn>
+                        </p:par>
+                      </p:childTnLst>
+                    </p:cTn>
+                  </p:par>
+                  <p:par>
+                    <p:cTn id="40" fill="hold">
+                      <p:stCondLst>
+                        <p:cond delay="indefinite"/>
+                      </p:stCondLst>
+                      <p:childTnLst>
+                        <p:par>
+                          <p:cTn id="41" fill="hold">
+                            <p:stCondLst>
+                              <p:cond delay="0"/>
+                            </p:stCondLst>
+                            <p:childTnLst>
+                              <p:par>
+                                <p:cTn id="42" presetID="10" presetClass="entr" presetSubtype="0" fill="hold" grpId="0" nodeType="clickEffect">
+                                  <p:stCondLst>
+                                    <p:cond delay="0"/>
+                                  </p:stCondLst>
+                                  <p:childTnLst>
+                                    <p:set>
+                                      <p:cBhvr>
+                                        <p:cTn id="43" dur="1" fill="hold">
+                                          <p:stCondLst>
+                                            <p:cond delay="0"/>
+                                          </p:stCondLst>
+                                        </p:cTn>
+                                        <p:tgtEl>
+                                          <p:spTgt spid="26"/>
+                                        </p:tgtEl>
+                                        <p:attrNameLst>
+                                          <p:attrName>style.visibility</p:attrName>
+                                        </p:attrNameLst>
+                                      </p:cBhvr>
+                                      <p:to>
+                                        <p:strVal val="visible"/>
+                                      </p:to>
+                                    </p:set>
+                                    <p:animEffect transition="in" filter="fade">
+                                      <p:cBhvr>
+                                        <p:cTn id="44" dur="500"/>
+                                        <p:tgtEl>
+                                          <p:spTgt spid="26"/>
+                                        </p:tgtEl>
+                                      </p:cBhvr>
+                                    </p:animEffect>
+                                  </p:childTnLst>
+                                </p:cTn>
+                              </p:par>
+                            </p:childTnLst>
+                          </p:cTn>
+                        </p:par>
+                      </p:childTnLst>
+                    </p:cTn>
+                  </p:par>
+                  <p:par>
+                    <p:cTn id="45" fill="hold">
+                      <p:stCondLst>
+                        <p:cond delay="indefinite"/>
+                      </p:stCondLst>
+                      <p:childTnLst>
+                        <p:par>
+                          <p:cTn id="46" fill="hold">
+                            <p:stCondLst>
+                              <p:cond delay="0"/>
+                            </p:stCondLst>
+                            <p:childTnLst>
+                              <p:par>
+                                <p:cTn id="47" presetID="10" presetClass="entr" presetSubtype="0" fill="hold" grpId="0" nodeType="clickEffect">
+                                  <p:stCondLst>
+                                    <p:cond delay="0"/>
+                                  </p:stCondLst>
+                                  <p:childTnLst>
+                                    <p:set>
+                                      <p:cBhvr>
+                                        <p:cTn id="48" dur="1" fill="hold">
+                                          <p:stCondLst>
+                                            <p:cond delay="0"/>
+                                          </p:stCondLst>
+                                        </p:cTn>
+                                        <p:tgtEl>
+                                          <p:spTgt spid="29"/>
+                                        </p:tgtEl>
+                                        <p:attrNameLst>
+                                          <p:attrName>style.visibility</p:attrName>
+                                        </p:attrNameLst>
+                                      </p:cBhvr>
+                                      <p:to>
+                                        <p:strVal val="visible"/>
+                                      </p:to>
+                                    </p:set>
+                                    <p:animEffect transition="in" filter="fade">
+                                      <p:cBhvr>
+                                        <p:cTn id="49" dur="500"/>
+                                        <p:tgtEl>
+                                          <p:spTgt spid="29"/>
+                                        </p:tgtEl>
+                                      </p:cBhvr>
+                                    </p:animEffect>
+                                  </p:childTnLst>
+                                </p:cTn>
+                              </p:par>
+                            </p:childTnLst>
+                          </p:cTn>
+                        </p:par>
+                      </p:childTnLst>
+                    </p:cTn>
+                  </p:par>
+                  <p:par>
+                    <p:cTn id="50" fill="hold">
+                      <p:stCondLst>
+                        <p:cond delay="indefinite"/>
+                      </p:stCondLst>
+                      <p:childTnLst>
+                        <p:par>
+                          <p:cTn id="51" fill="hold">
+                            <p:stCondLst>
+                              <p:cond delay="0"/>
+                            </p:stCondLst>
+                            <p:childTnLst>
+                              <p:par>
+                                <p:cTn id="52" presetID="10" presetClass="entr" presetSubtype="0" fill="hold" grpId="0" nodeType="clickEffect">
+                                  <p:stCondLst>
+                                    <p:cond delay="0"/>
+                                  </p:stCondLst>
+                                  <p:childTnLst>
+                                    <p:set>
+                                      <p:cBhvr>
+                                        <p:cTn id="53" dur="1" fill="hold">
+                                          <p:stCondLst>
+                                            <p:cond delay="0"/>
+                                          </p:stCondLst>
+                                        </p:cTn>
+                                        <p:tgtEl>
+                                          <p:spTgt spid="30"/>
+                                        </p:tgtEl>
+                                        <p:attrNameLst>
+                                          <p:attrName>style.visibility</p:attrName>
+                                        </p:attrNameLst>
+                                      </p:cBhvr>
+                                      <p:to>
+                                        <p:strVal val="visible"/>
+                                      </p:to>
+                                    </p:set>
+                                    <p:animEffect transition="in" filter="fade">
+                                      <p:cBhvr>
+                                        <p:cTn id="54" dur="500"/>
+                                        <p:tgtEl>
+                                          <p:spTgt spid="30"/>
+                                        </p:tgtEl>
+                                      </p:cBhvr>
+                                    </p:animEffect>
+                                  </p:childTnLst>
+                                </p:cTn>
+                              </p:par>
+                            </p:childTnLst>
+                          </p:cTn>
+                        </p:par>
+                      </p:childTnLst>
+                    </p:cTn>
+                  </p:par>
+                  <p:par>
+                    <p:cTn id="55" fill="hold">
+                      <p:stCondLst>
+                        <p:cond delay="indefinite"/>
+                      </p:stCondLst>
+                      <p:childTnLst>
+                        <p:par>
+                          <p:cTn id="56" fill="hold">
+                            <p:stCondLst>
+                              <p:cond delay="0"/>
+                            </p:stCondLst>
+                            <p:childTnLst>
+                              <p:par>
+                                <p:cTn id="57" presetID="10" presetClass="entr" presetSubtype="0" fill="hold" grpId="0" nodeType="clickEffect">
+                                  <p:stCondLst>
+                                    <p:cond delay="0"/>
+                                  </p:stCondLst>
+                                  <p:childTnLst>
+                                    <p:set>
+                                      <p:cBhvr>
+                                        <p:cTn id="58" dur="1" fill="hold">
+                                          <p:stCondLst>
+                                            <p:cond delay="0"/>
+                                          </p:stCondLst>
+                                        </p:cTn>
+                                        <p:tgtEl>
+                                          <p:spTgt spid="33"/>
+                                        </p:tgtEl>
+                                        <p:attrNameLst>
+                                          <p:attrName>style.visibility</p:attrName>
+                                        </p:attrNameLst>
+                                      </p:cBhvr>
+                                      <p:to>
+                                        <p:strVal val="visible"/>
+                                      </p:to>
+                                    </p:set>
+                                    <p:animEffect transition="in" filter="fade">
+                                      <p:cBhvr>
+                                        <p:cTn id="59" dur="500"/>
+                                        <p:tgtEl>
+                                          <p:spTgt spid="33"/>
+                                        </p:tgtEl>
+                                      </p:cBhvr>
+                                    </p:animEffect>
+                                  </p:childTnLst>
+                                </p:cTn>
+                              </p:par>
+                            </p:childTnLst>
+                          </p:cTn>
+                        </p:par>
+                      </p:childTnLst>
+                    </p:cTn>
+                  </p:par>
+                  <p:par>
+                    <p:cTn id="60" fill="hold">
+                      <p:stCondLst>
+                        <p:cond delay="indefinite"/>
+                      </p:stCondLst>
+                      <p:childTnLst>
+                        <p:par>
+                          <p:cTn id="61" fill="hold">
+                            <p:stCondLst>
+                              <p:cond delay="0"/>
+                            </p:stCondLst>
+                            <p:childTnLst>
+                              <p:par>
+                                <p:cTn id="62" presetID="10" presetClass="entr" presetSubtype="0" fill="hold" grpId="0" nodeType="clickEffect">
+                                  <p:stCondLst>
+                                    <p:cond delay="0"/>
+                                  </p:stCondLst>
+                                  <p:childTnLst>
+                                    <p:set>
+                                      <p:cBhvr>
+                                        <p:cTn id="63" dur="1" fill="hold">
+                                          <p:stCondLst>
+                                            <p:cond delay="0"/>
+                                          </p:stCondLst>
+                                        </p:cTn>
+                                        <p:tgtEl>
+                                          <p:spTgt spid="34"/>
+                                        </p:tgtEl>
+                                        <p:attrNameLst>
+                                          <p:attrName>style.visibility</p:attrName>
+                                        </p:attrNameLst>
+                                      </p:cBhvr>
+                                      <p:to>
+                                        <p:strVal val="visible"/>
+                                      </p:to>
+                                    </p:set>
+                                    <p:animEffect transition="in" filter="fade">
+                                      <p:cBhvr>
+                                        <p:cTn id="64" dur="500"/>
+                                        <p:tgtEl>
+                                          <p:spTgt spid="34"/>
+                                        </p:tgtEl>
+                                      </p:cBhvr>
+                                    </p:animEffect>
+                                  </p:childTnLst>
+                                </p:cTn>
+                              </p:par>
+                            </p:childTnLst>
+                          </p:cTn>
+                        </p:par>
+                      </p:childTnLst>
+                    </p:cTn>
+                  </p:par>
+                  <p:par>
+                    <p:cTn id="65" fill="hold">
+                      <p:stCondLst>
+                        <p:cond delay="indefinite"/>
+                      </p:stCondLst>
+                      <p:childTnLst>
+                        <p:par>
+                          <p:cTn id="66" fill="hold">
+                            <p:stCondLst>
+                              <p:cond delay="0"/>
+                            </p:stCondLst>
+                            <p:childTnLst>
+                              <p:par>
+                                <p:cTn id="67" presetID="10" presetClass="entr" presetSubtype="0" fill="hold" grpId="0" nodeType="clickEffect">
+                                  <p:stCondLst>
+                                    <p:cond delay="0"/>
+                                  </p:stCondLst>
+                                  <p:childTnLst>
+                                    <p:set>
+                                      <p:cBhvr>
+                                        <p:cTn id="68" dur="1" fill="hold">
+                                          <p:stCondLst>
+                                            <p:cond delay="0"/>
+                                          </p:stCondLst>
+                                        </p:cTn>
+                                        <p:tgtEl>
+                                          <p:spTgt spid="37"/>
+                                        </p:tgtEl>
+                                        <p:attrNameLst>
+                                          <p:attrName>style.visibility</p:attrName>
+                                        </p:attrNameLst>
+                                      </p:cBhvr>
+                                      <p:to>
+                                        <p:strVal val="visible"/>
+                                      </p:to>
+                                    </p:set>
+                                    <p:animEffect transition="in" filter="fade">
+                                      <p:cBhvr>
+                                        <p:cTn id="69" dur="500"/>
+                                        <p:tgtEl>
+                                          <p:spTgt spid="37"/>
+                                        </p:tgtEl>
+                                      </p:cBhvr>
+                                    </p:animEffect>
+                                  </p:childTnLst>
+                                </p:cTn>
+                              </p:par>
+                            </p:childTnLst>
+                          </p:cTn>
+                        </p:par>
+                      </p:childTnLst>
+                    </p:cTn>
+                  </p:par>
+                  <p:par>
+                    <p:cTn id="70" fill="hold">
+                      <p:stCondLst>
+                        <p:cond delay="indefinite"/>
+                      </p:stCondLst>
+                      <p:childTnLst>
+                        <p:par>
+                          <p:cTn id="71" fill="hold">
+                            <p:stCondLst>
+                              <p:cond delay="0"/>
+                            </p:stCondLst>
+                            <p:childTnLst>
+                              <p:par>
+                                <p:cTn id="72" presetID="10" presetClass="entr" presetSubtype="0" fill="hold" grpId="0" nodeType="clickEffect">
+                                  <p:stCondLst>
+                                    <p:cond delay="0"/>
+                                  </p:stCondLst>
+                                  <p:childTnLst>
+                                    <p:set>
+                                      <p:cBhvr>
+                                        <p:cTn id="73" dur="1" fill="hold">
+                                          <p:stCondLst>
+                                            <p:cond delay="0"/>
+                                          </p:stCondLst>
+                                        </p:cTn>
+                                        <p:tgtEl>
+                                          <p:spTgt spid="38"/>
+                                        </p:tgtEl>
+                                        <p:attrNameLst>
+                                          <p:attrName>style.visibility</p:attrName>
+                                        </p:attrNameLst>
+                                      </p:cBhvr>
+                                      <p:to>
+                                        <p:strVal val="visible"/>
+                                      </p:to>
+                                    </p:set>
+                                    <p:animEffect transition="in" filter="fade">
+                                      <p:cBhvr>
+                                        <p:cTn id="74" dur="500"/>
+                                        <p:tgtEl>
+                                          <p:spTgt spid="38"/>
+                                        </p:tgtEl>
+                                      </p:cBhvr>
+                                    </p:animEffect>
+                                  </p:childTnLst>
+                                </p:cTn>
+                              </p:par>
+                            </p:childTnLst>
+                          </p:cTn>
+                        </p:par>
+                      </p:childTnLst>
+                    </p:cTn>
+                  </p:par>
+                </p:childTnLst>
+              </p:cTn>
+              <p:prevCondLst>
+                <p:cond evt="onPrev" delay="0">
+                  <p:tgtEl>
+                    <p:sldTgt/>
+                  </p:tgtEl>
+                </p:cond>
+              </p:prevCondLst>
+              <p:nextCondLst>
+                <p:cond evt="onNext" delay="0">
+                  <p:tgtEl>
+                    <p:sldTgt/>
+                  </p:tgtEl>
+                </p:cond>
+              </p:nextCondLst>
+            </p:seq>
+          </p:childTnLst>
+        </p:cTn>
+      </p:par>
+    </p:tnLst>
+  </p:timing>
+</p:sld>
+</file>
+
+<file path=ppt/slides/slide25.xml><?xml version="1.0" encoding="utf-8"?>
+<p:sld xmlns:a="http://schemas.openxmlformats.org/drawingml/2006/main" xmlns:p="http://schemas.openxmlformats.org/presentationml/2006/main" xmlns:r="http://schemas.openxmlformats.org/officeDocument/2006/relationships">
+  <p:cSld>
+    <p:spTree>
+      <p:nvGrpSpPr>
+        <p:cNvPr id="1" name=""/>
+        <p:cNvGrpSpPr/>
+        <p:nvPr/>
+      </p:nvGrpSpPr>
+      <p:grpSpPr/>
+      <p:sp>
+        <p:nvSpPr>
+          <p:cNvPr id="2" name="Fondo"/>
+          <p:cNvSpPr/>
+          <p:nvPr/>
+        </p:nvSpPr>
+        <p:spPr>
+          <a:xfrm>
+            <a:off x="0" y="0"/>
+            <a:ext cx="12191695" cy="6858000"/>
+          </a:xfrm>
+          <a:prstGeom prst="rect">
+            <a:avLst/>
+          </a:prstGeom>
+          <a:solidFill>
+            <a:srgbClr val="FCFBF8"/>
+          </a:solidFill>
+          <a:ln>
+            <a:noFill/>
+          </a:ln>
+          <a:effectLst/>
+        </p:spPr>
+        <p:style>
+          <a:lnRef idx="1">
+            <a:schemeClr val="accent1"/>
+          </a:lnRef>
+          <a:fillRef idx="3">
+            <a:schemeClr val="accent1"/>
+          </a:fillRef>
+          <a:effectRef idx="2">
+            <a:schemeClr val="accent1"/>
+          </a:effectRef>
+          <a:fontRef idx="minor">
+            <a:schemeClr val="lt1"/>
+          </a:fontRef>
+        </p:style>
+        <p:txBody>
+          <a:bodyPr rtlCol="0" anchor="ctr"/>
+          <a:lstStyle/>
+          <a:p/>
+        </p:txBody>
+      </p:sp>
+      <p:sp>
+        <p:nvSpPr>
+          <p:cNvPr id="3" name="Cabecera"/>
+          <p:cNvSpPr/>
+          <p:nvPr/>
+        </p:nvSpPr>
+        <p:spPr>
+          <a:xfrm>
+            <a:off x="0" y="0"/>
+            <a:ext cx="12191695" cy="1078992"/>
+          </a:xfrm>
+          <a:prstGeom prst="rect">
+            <a:avLst/>
+          </a:prstGeom>
+          <a:solidFill>
+            <a:srgbClr val="1E9E74"/>
+          </a:solidFill>
+          <a:ln>
+            <a:noFill/>
+          </a:ln>
+          <a:effectLst/>
+        </p:spPr>
+        <p:style>
+          <a:lnRef idx="1">
+            <a:schemeClr val="accent1"/>
+          </a:lnRef>
+          <a:fillRef idx="3">
+            <a:schemeClr val="accent1"/>
+          </a:fillRef>
+          <a:effectRef idx="2">
+            <a:schemeClr val="accent1"/>
+          </a:effectRef>
+          <a:fontRef idx="minor">
+            <a:schemeClr val="lt1"/>
+          </a:fontRef>
+        </p:style>
+        <p:txBody>
+          <a:bodyPr rtlCol="0" anchor="ctr"/>
+          <a:lstStyle/>
+          <a:p/>
+        </p:txBody>
+      </p:sp>
+      <p:sp>
+        <p:nvSpPr>
+          <p:cNvPr id="4" name="Chip"/>
+          <p:cNvSpPr/>
+          <p:nvPr/>
+        </p:nvSpPr>
+        <p:spPr>
+          <a:xfrm>
+            <a:off x="457200" y="182880"/>
+            <a:ext cx="3017520" cy="292608"/>
+          </a:xfrm>
+          <a:prstGeom prst="roundRect">
+            <a:avLst>
+              <a:gd name="adj" fmla="val 50000"/>
+            </a:avLst>
+          </a:prstGeom>
+          <a:solidFill>
+            <a:srgbClr val="FFFFFF"/>
+          </a:solidFill>
+          <a:ln>
+            <a:noFill/>
+          </a:ln>
+          <a:effectLst/>
+        </p:spPr>
+        <p:style>
+          <a:lnRef idx="1">
+            <a:schemeClr val="accent1"/>
+          </a:lnRef>
+          <a:fillRef idx="3">
+            <a:schemeClr val="accent1"/>
+          </a:fillRef>
+          <a:effectRef idx="2">
+            <a:schemeClr val="accent1"/>
+          </a:effectRef>
+          <a:fontRef idx="minor">
+            <a:schemeClr val="lt1"/>
+          </a:fontRef>
+        </p:style>
+        <p:txBody>
+          <a:bodyPr rtlCol="0" anchor="ctr"/>
+          <a:lstStyle/>
+          <a:p/>
+        </p:txBody>
+      </p:sp>
+      <p:sp>
+        <p:nvSpPr>
+          <p:cNvPr id="5" name="ChipTxt"/>
+          <p:cNvSpPr txBox="1"/>
+          <p:nvPr/>
+        </p:nvSpPr>
+        <p:spPr>
+          <a:xfrm>
+            <a:off x="457200" y="173736"/>
+            <a:ext cx="3017520" cy="310896"/>
+          </a:xfrm>
+          <a:prstGeom prst="rect">
+            <a:avLst/>
+          </a:prstGeom>
+          <a:noFill/>
+        </p:spPr>
+        <p:txBody>
+          <a:bodyPr wrap="square" anchor="ctr" lIns="45720" rIns="45720" tIns="27432" bIns="27432">
+            <a:normAutofit/>
+          </a:bodyPr>
+          <a:lstStyle/>
+          <a:p>
+            <a:pPr algn="ctr"/>
+            <a:r>
+              <a:rPr sz="950" b="1">
+                <a:solidFill>
+                  <a:srgbClr val="157355"/>
+                </a:solidFill>
+                <a:latin typeface="Inter"/>
+              </a:rPr>
+              <a:t>RETO 4 · CREATIEVE BEPERKING</a:t>
+            </a:r>
+          </a:p>
+        </p:txBody>
+      </p:sp>
+      <p:sp>
+        <p:nvSpPr>
+          <p:cNvPr id="6" name="Titulo"/>
+          <p:cNvSpPr txBox="1"/>
+          <p:nvPr/>
+        </p:nvSpPr>
+        <p:spPr>
+          <a:xfrm>
+            <a:off x="457200" y="502920"/>
+            <a:ext cx="8412480" cy="475488"/>
+          </a:xfrm>
+          <a:prstGeom prst="rect">
+            <a:avLst/>
+          </a:prstGeom>
+          <a:noFill/>
+        </p:spPr>
+        <p:txBody>
+          <a:bodyPr wrap="square" anchor="t" lIns="45720" rIns="45720" tIns="27432" bIns="27432">
+            <a:normAutofit/>
+          </a:bodyPr>
+          <a:lstStyle/>
+          <a:p>
+            <a:pPr algn="l"/>
+            <a:r>
+              <a:rPr sz="2700" b="1">
+                <a:solidFill>
+                  <a:srgbClr val="FFFFFF"/>
+                </a:solidFill>
+                <a:latin typeface="Bricolage Grotesque"/>
+              </a:rPr>
+              <a:t>Preguntas prohibidas</a:t>
+            </a:r>
+          </a:p>
+        </p:txBody>
+      </p:sp>
+      <p:sp>
+        <p:nvSpPr>
+          <p:cNvPr id="7" name="Badges"/>
+          <p:cNvSpPr txBox="1"/>
+          <p:nvPr/>
+        </p:nvSpPr>
+        <p:spPr>
+          <a:xfrm>
+            <a:off x="9052560" y="256032"/>
+            <a:ext cx="2651760" cy="640080"/>
+          </a:xfrm>
+          <a:prstGeom prst="rect">
+            <a:avLst/>
+          </a:prstGeom>
+          <a:noFill/>
+        </p:spPr>
+        <p:txBody>
+          <a:bodyPr wrap="square" anchor="t" lIns="45720" rIns="45720" tIns="27432" bIns="27432">
+            <a:normAutofit/>
+          </a:bodyPr>
+          <a:lstStyle/>
+          <a:p>
+            <a:pPr algn="r"/>
+            <a:r>
+              <a:rPr sz="1000">
+                <a:solidFill>
+                  <a:srgbClr val="E4F4EE"/>
+                </a:solidFill>
+                <a:latin typeface="Inter"/>
+              </a:rPr>
+              <a:t>👥 En parejas</a:t>
+            </a:r>
+          </a:p>
+          <a:p>
+            <a:pPr algn="r"/>
+            <a:r>
+              <a:rPr sz="1000">
+                <a:solidFill>
+                  <a:srgbClr val="E4F4EE"/>
+                </a:solidFill>
+                <a:latin typeface="Inter"/>
+              </a:rPr>
+              <a:t>± 10 min · ★★★</a:t>
+            </a:r>
+          </a:p>
+        </p:txBody>
+      </p:sp>
+      <p:sp>
+        <p:nvSpPr>
+          <p:cNvPr id="8" name="Gancho"/>
+          <p:cNvSpPr txBox="1"/>
+          <p:nvPr/>
+        </p:nvSpPr>
+        <p:spPr>
+          <a:xfrm>
+            <a:off x="457200" y="1225296"/>
+            <a:ext cx="11274552" cy="566928"/>
+          </a:xfrm>
+          <a:prstGeom prst="rect">
+            <a:avLst/>
+          </a:prstGeom>
+          <a:noFill/>
+        </p:spPr>
+        <p:txBody>
+          <a:bodyPr wrap="square" anchor="t" lIns="45720" rIns="45720" tIns="27432" bIns="27432">
+            <a:normAutofit/>
+          </a:bodyPr>
+          <a:lstStyle/>
+          <a:p>
+            <a:pPr algn="l"/>
+            <a:r>
+              <a:rPr sz="1600" b="1">
+                <a:solidFill>
+                  <a:srgbClr val="157355"/>
+                </a:solidFill>
+                <a:latin typeface="Bricolage Grotesque"/>
+              </a:rPr>
+              <a:t>Necesitas la misma información. Pero tres preguntas están prohibidas.</a:t>
+            </a:r>
+          </a:p>
+          <a:p>
+            <a:pPr algn="l"/>
+            <a:r>
+              <a:rPr sz="1100" i="1">
+                <a:solidFill>
+                  <a:srgbClr val="6A6E78"/>
+                </a:solidFill>
+                <a:latin typeface="Inter"/>
+              </a:rPr>
+              <a:t>Je hebt dezelfde informatie nodig. Maar drie vragen zijn verboden.</a:t>
+            </a:r>
+          </a:p>
+        </p:txBody>
+      </p:sp>
+      <p:sp>
+        <p:nvSpPr>
+          <p:cNvPr id="9" name="ReglaCaja"/>
+          <p:cNvSpPr/>
+          <p:nvPr/>
+        </p:nvSpPr>
+        <p:spPr>
+          <a:xfrm>
+            <a:off x="457200" y="1847088"/>
+            <a:ext cx="11274552" cy="658368"/>
+          </a:xfrm>
+          <a:prstGeom prst="roundRect">
+            <a:avLst>
+              <a:gd name="adj" fmla="val 5000"/>
+            </a:avLst>
+          </a:prstGeom>
+          <a:solidFill>
+            <a:srgbClr val="FBF3D6"/>
+          </a:solidFill>
+          <a:ln>
+            <a:noFill/>
+          </a:ln>
+          <a:effectLst/>
+        </p:spPr>
+        <p:style>
+          <a:lnRef idx="1">
+            <a:schemeClr val="accent1"/>
+          </a:lnRef>
+          <a:fillRef idx="3">
+            <a:schemeClr val="accent1"/>
+          </a:fillRef>
+          <a:effectRef idx="2">
+            <a:schemeClr val="accent1"/>
+          </a:effectRef>
+          <a:fontRef idx="minor">
+            <a:schemeClr val="lt1"/>
+          </a:fontRef>
+        </p:style>
+        <p:txBody>
+          <a:bodyPr rtlCol="0" anchor="ctr"/>
+          <a:lstStyle/>
+          <a:p/>
+        </p:txBody>
+      </p:sp>
+      <p:sp>
+        <p:nvSpPr>
+          <p:cNvPr id="10" name="ReglaTxt"/>
+          <p:cNvSpPr txBox="1"/>
+          <p:nvPr/>
+        </p:nvSpPr>
+        <p:spPr>
+          <a:xfrm>
+            <a:off x="603504" y="1883664"/>
+            <a:ext cx="10972800" cy="585216"/>
+          </a:xfrm>
+          <a:prstGeom prst="rect">
+            <a:avLst/>
+          </a:prstGeom>
+          <a:noFill/>
+        </p:spPr>
+        <p:txBody>
+          <a:bodyPr wrap="square" anchor="t" lIns="45720" rIns="45720" tIns="27432" bIns="27432">
+            <a:normAutofit/>
+          </a:bodyPr>
+          <a:lstStyle/>
+          <a:p>
+            <a:pPr algn="l"/>
+            <a:r>
+              <a:rPr sz="850" b="1">
+                <a:solidFill>
+                  <a:srgbClr val="B7860B"/>
+                </a:solidFill>
+                <a:latin typeface="Inter"/>
+              </a:rPr>
+              <a:t>LA REGLA DEL RETO</a:t>
+            </a:r>
+          </a:p>
+          <a:p>
+            <a:pPr algn="l"/>
+            <a:r>
+              <a:rPr sz="1100">
+                <a:solidFill>
+                  <a:srgbClr val="20242E"/>
+                </a:solidFill>
+                <a:latin typeface="Inter"/>
+              </a:rPr>
+              <a:t>De drie rechtstreekse vragen zijn verboden. Je moet er dus omheen: met een voorstel, een vergelijking of een gok die je laat bevestigen.</a:t>
+            </a:r>
+          </a:p>
+        </p:txBody>
+      </p:sp>
+      <p:sp>
+        <p:nvSpPr>
+          <p:cNvPr id="11" name="Tarjeta 0"/>
+          <p:cNvSpPr/>
+          <p:nvPr/>
+        </p:nvSpPr>
+        <p:spPr>
+          <a:xfrm>
+            <a:off x="457200" y="2670048"/>
+            <a:ext cx="2708910" cy="1170432"/>
+          </a:xfrm>
+          <a:prstGeom prst="roundRect">
+            <a:avLst>
+              <a:gd name="adj" fmla="val 6000"/>
+            </a:avLst>
+          </a:prstGeom>
+          <a:solidFill>
+            <a:srgbClr val="FFFFFF"/>
+          </a:solidFill>
+          <a:ln w="12700">
+            <a:solidFill>
+              <a:srgbClr val="E4E3DE"/>
+            </a:solidFill>
+          </a:ln>
+          <a:effectLst/>
+        </p:spPr>
+        <p:style>
+          <a:lnRef idx="1">
+            <a:schemeClr val="accent1"/>
+          </a:lnRef>
+          <a:fillRef idx="3">
+            <a:schemeClr val="accent1"/>
+          </a:fillRef>
+          <a:effectRef idx="2">
+            <a:schemeClr val="accent1"/>
+          </a:effectRef>
+          <a:fontRef idx="minor">
+            <a:schemeClr val="lt1"/>
+          </a:fontRef>
+        </p:style>
+        <p:txBody>
+          <a:bodyPr rtlCol="0" anchor="ctr"/>
+          <a:lstStyle/>
+          <a:p/>
+        </p:txBody>
+      </p:sp>
+      <p:sp>
+        <p:nvSpPr>
+          <p:cNvPr id="12" name="TarjetaTxt 0"/>
+          <p:cNvSpPr txBox="1"/>
+          <p:nvPr/>
+        </p:nvSpPr>
+        <p:spPr>
+          <a:xfrm>
+            <a:off x="548640" y="2724912"/>
+            <a:ext cx="2526030" cy="1060704"/>
+          </a:xfrm>
+          <a:prstGeom prst="rect">
+            <a:avLst/>
+          </a:prstGeom>
+          <a:noFill/>
+        </p:spPr>
+        <p:txBody>
+          <a:bodyPr wrap="square" anchor="t" lIns="45720" rIns="45720" tIns="27432" bIns="27432">
+            <a:normAutofit/>
+          </a:bodyPr>
+          <a:lstStyle/>
+          <a:p>
+            <a:pPr algn="l"/>
+            <a:r>
+              <a:rPr sz="1100" b="1">
+                <a:solidFill>
+                  <a:srgbClr val="157355"/>
+                </a:solidFill>
+                <a:latin typeface="Bricolage Grotesque"/>
+              </a:rPr>
+              <a:t>PROHIBIDA</a:t>
+            </a:r>
+          </a:p>
+          <a:p>
+            <a:pPr algn="l"/>
+            <a:r>
+              <a:rPr sz="1000">
+                <a:solidFill>
+                  <a:srgbClr val="20242E"/>
+                </a:solidFill>
+                <a:latin typeface="Inter"/>
+              </a:rPr>
+              <a:t>¿Cuántos años tienes?</a:t>
+            </a:r>
+          </a:p>
+        </p:txBody>
+      </p:sp>
+      <p:sp>
+        <p:nvSpPr>
+          <p:cNvPr id="13" name="Tarjeta 1"/>
+          <p:cNvSpPr/>
+          <p:nvPr/>
+        </p:nvSpPr>
+        <p:spPr>
+          <a:xfrm>
+            <a:off x="3312414" y="2670048"/>
+            <a:ext cx="2708910" cy="1170432"/>
+          </a:xfrm>
+          <a:prstGeom prst="roundRect">
+            <a:avLst>
+              <a:gd name="adj" fmla="val 6000"/>
+            </a:avLst>
+          </a:prstGeom>
+          <a:solidFill>
+            <a:srgbClr val="FFFFFF"/>
+          </a:solidFill>
+          <a:ln w="12700">
+            <a:solidFill>
+              <a:srgbClr val="E4E3DE"/>
+            </a:solidFill>
+          </a:ln>
+          <a:effectLst/>
+        </p:spPr>
+        <p:style>
+          <a:lnRef idx="1">
+            <a:schemeClr val="accent1"/>
+          </a:lnRef>
+          <a:fillRef idx="3">
+            <a:schemeClr val="accent1"/>
+          </a:fillRef>
+          <a:effectRef idx="2">
+            <a:schemeClr val="accent1"/>
+          </a:effectRef>
+          <a:fontRef idx="minor">
+            <a:schemeClr val="lt1"/>
+          </a:fontRef>
+        </p:style>
+        <p:txBody>
+          <a:bodyPr rtlCol="0" anchor="ctr"/>
+          <a:lstStyle/>
+          <a:p/>
+        </p:txBody>
+      </p:sp>
+      <p:sp>
+        <p:nvSpPr>
+          <p:cNvPr id="14" name="TarjetaTxt 1"/>
+          <p:cNvSpPr txBox="1"/>
+          <p:nvPr/>
+        </p:nvSpPr>
+        <p:spPr>
+          <a:xfrm>
+            <a:off x="3403854" y="2724912"/>
+            <a:ext cx="2526030" cy="1060704"/>
+          </a:xfrm>
+          <a:prstGeom prst="rect">
+            <a:avLst/>
+          </a:prstGeom>
+          <a:noFill/>
+        </p:spPr>
+        <p:txBody>
+          <a:bodyPr wrap="square" anchor="t" lIns="45720" rIns="45720" tIns="27432" bIns="27432">
+            <a:normAutofit/>
+          </a:bodyPr>
+          <a:lstStyle/>
+          <a:p>
+            <a:pPr algn="l"/>
+            <a:r>
+              <a:rPr sz="1100" b="1">
+                <a:solidFill>
+                  <a:srgbClr val="157355"/>
+                </a:solidFill>
+                <a:latin typeface="Bricolage Grotesque"/>
+              </a:rPr>
+              <a:t>PROHIBIDA</a:t>
+            </a:r>
+          </a:p>
+          <a:p>
+            <a:pPr algn="l"/>
+            <a:r>
+              <a:rPr sz="1000">
+                <a:solidFill>
+                  <a:srgbClr val="20242E"/>
+                </a:solidFill>
+                <a:latin typeface="Inter"/>
+              </a:rPr>
+              <a:t>¿Dónde vives?</a:t>
+            </a:r>
+          </a:p>
+        </p:txBody>
+      </p:sp>
+      <p:sp>
+        <p:nvSpPr>
+          <p:cNvPr id="15" name="Tarjeta 2"/>
+          <p:cNvSpPr/>
+          <p:nvPr/>
+        </p:nvSpPr>
+        <p:spPr>
+          <a:xfrm>
+            <a:off x="6167628" y="2670048"/>
+            <a:ext cx="2708910" cy="1170432"/>
+          </a:xfrm>
+          <a:prstGeom prst="roundRect">
+            <a:avLst>
+              <a:gd name="adj" fmla="val 6000"/>
+            </a:avLst>
+          </a:prstGeom>
+          <a:solidFill>
+            <a:srgbClr val="FFFFFF"/>
+          </a:solidFill>
+          <a:ln w="12700">
+            <a:solidFill>
+              <a:srgbClr val="E4E3DE"/>
+            </a:solidFill>
+          </a:ln>
+          <a:effectLst/>
+        </p:spPr>
+        <p:style>
+          <a:lnRef idx="1">
+            <a:schemeClr val="accent1"/>
+          </a:lnRef>
+          <a:fillRef idx="3">
+            <a:schemeClr val="accent1"/>
+          </a:fillRef>
+          <a:effectRef idx="2">
+            <a:schemeClr val="accent1"/>
+          </a:effectRef>
+          <a:fontRef idx="minor">
+            <a:schemeClr val="lt1"/>
+          </a:fontRef>
+        </p:style>
+        <p:txBody>
+          <a:bodyPr rtlCol="0" anchor="ctr"/>
+          <a:lstStyle/>
+          <a:p/>
+        </p:txBody>
+      </p:sp>
+      <p:sp>
+        <p:nvSpPr>
+          <p:cNvPr id="16" name="TarjetaTxt 2"/>
+          <p:cNvSpPr txBox="1"/>
+          <p:nvPr/>
+        </p:nvSpPr>
+        <p:spPr>
+          <a:xfrm>
+            <a:off x="6259068" y="2724912"/>
+            <a:ext cx="2526030" cy="1060704"/>
+          </a:xfrm>
+          <a:prstGeom prst="rect">
+            <a:avLst/>
+          </a:prstGeom>
+          <a:noFill/>
+        </p:spPr>
+        <p:txBody>
+          <a:bodyPr wrap="square" anchor="t" lIns="45720" rIns="45720" tIns="27432" bIns="27432">
+            <a:normAutofit/>
+          </a:bodyPr>
+          <a:lstStyle/>
+          <a:p>
+            <a:pPr algn="l"/>
+            <a:r>
+              <a:rPr sz="1100" b="1">
+                <a:solidFill>
+                  <a:srgbClr val="157355"/>
+                </a:solidFill>
+                <a:latin typeface="Bricolage Grotesque"/>
+              </a:rPr>
+              <a:t>PROHIBIDA</a:t>
+            </a:r>
+          </a:p>
+          <a:p>
+            <a:pPr algn="l"/>
+            <a:r>
+              <a:rPr sz="1000">
+                <a:solidFill>
+                  <a:srgbClr val="20242E"/>
+                </a:solidFill>
+                <a:latin typeface="Inter"/>
+              </a:rPr>
+              <a:t>¿Qué lenguas hablas?</a:t>
+            </a:r>
+          </a:p>
+        </p:txBody>
+      </p:sp>
+      <p:sp>
+        <p:nvSpPr>
+          <p:cNvPr id="17" name="Tarjeta 3"/>
+          <p:cNvSpPr/>
+          <p:nvPr/>
+        </p:nvSpPr>
+        <p:spPr>
+          <a:xfrm>
+            <a:off x="9022842" y="2670048"/>
+            <a:ext cx="2708910" cy="1170432"/>
+          </a:xfrm>
+          <a:prstGeom prst="roundRect">
+            <a:avLst>
+              <a:gd name="adj" fmla="val 6000"/>
+            </a:avLst>
+          </a:prstGeom>
+          <a:solidFill>
+            <a:srgbClr val="FFFFFF"/>
+          </a:solidFill>
+          <a:ln w="12700">
+            <a:solidFill>
+              <a:srgbClr val="E4E3DE"/>
+            </a:solidFill>
+          </a:ln>
+          <a:effectLst/>
+        </p:spPr>
+        <p:style>
+          <a:lnRef idx="1">
+            <a:schemeClr val="accent1"/>
+          </a:lnRef>
+          <a:fillRef idx="3">
+            <a:schemeClr val="accent1"/>
+          </a:fillRef>
+          <a:effectRef idx="2">
+            <a:schemeClr val="accent1"/>
+          </a:effectRef>
+          <a:fontRef idx="minor">
+            <a:schemeClr val="lt1"/>
+          </a:fontRef>
+        </p:style>
+        <p:txBody>
+          <a:bodyPr rtlCol="0" anchor="ctr"/>
+          <a:lstStyle/>
+          <a:p/>
+        </p:txBody>
+      </p:sp>
+      <p:sp>
+        <p:nvSpPr>
+          <p:cNvPr id="18" name="TarjetaTxt 3"/>
+          <p:cNvSpPr txBox="1"/>
+          <p:nvPr/>
+        </p:nvSpPr>
+        <p:spPr>
+          <a:xfrm>
+            <a:off x="9114282" y="2724912"/>
+            <a:ext cx="2526030" cy="859536"/>
+          </a:xfrm>
+          <a:prstGeom prst="rect">
+            <a:avLst/>
+          </a:prstGeom>
+          <a:noFill/>
+        </p:spPr>
+        <p:txBody>
+          <a:bodyPr wrap="square" anchor="t" lIns="45720" rIns="45720" tIns="27432" bIns="27432">
+            <a:normAutofit/>
+          </a:bodyPr>
+          <a:lstStyle/>
+          <a:p>
+            <a:pPr algn="l"/>
+            <a:r>
+              <a:rPr sz="1100" b="1">
+                <a:solidFill>
+                  <a:srgbClr val="157355"/>
+                </a:solidFill>
+                <a:latin typeface="Bricolage Grotesque"/>
+              </a:rPr>
+              <a:t>rodeo</a:t>
+            </a:r>
+          </a:p>
+          <a:p>
+            <a:pPr algn="l"/>
+            <a:r>
+              <a:rPr sz="1000">
+                <a:solidFill>
+                  <a:srgbClr val="20242E"/>
+                </a:solidFill>
+                <a:latin typeface="Inter"/>
+              </a:rPr>
+              <a:t>¿Eres del dos mil nueve?</a:t>
+            </a:r>
+          </a:p>
+        </p:txBody>
+      </p:sp>
+      <p:sp>
+        <p:nvSpPr>
+          <p:cNvPr id="19" name="Onthul 3"/>
+          <p:cNvSpPr/>
+          <p:nvPr/>
+        </p:nvSpPr>
+        <p:spPr>
+          <a:xfrm>
+            <a:off x="9114282" y="3547872"/>
+            <a:ext cx="2526030" cy="237744"/>
+          </a:xfrm>
+          <a:prstGeom prst="roundRect">
+            <a:avLst>
+              <a:gd name="adj" fmla="val 20000"/>
+            </a:avLst>
+          </a:prstGeom>
+          <a:solidFill>
+            <a:srgbClr val="E4F4EE"/>
+          </a:solidFill>
+          <a:ln>
+            <a:noFill/>
+          </a:ln>
+          <a:effectLst/>
+        </p:spPr>
+        <p:style>
+          <a:lnRef idx="1">
+            <a:schemeClr val="accent1"/>
+          </a:lnRef>
+          <a:fillRef idx="3">
+            <a:schemeClr val="accent1"/>
+          </a:fillRef>
+          <a:effectRef idx="2">
+            <a:schemeClr val="accent1"/>
+          </a:effectRef>
+          <a:fontRef idx="minor">
+            <a:schemeClr val="lt1"/>
+          </a:fontRef>
+        </p:style>
+        <p:txBody>
+          <a:bodyPr rtlCol="0" anchor="ctr"/>
+          <a:lstStyle/>
+          <a:p/>
+        </p:txBody>
+      </p:sp>
+      <p:sp>
+        <p:nvSpPr>
+          <p:cNvPr id="20" name="OnthulTxt 3"/>
+          <p:cNvSpPr txBox="1"/>
+          <p:nvPr/>
+        </p:nvSpPr>
+        <p:spPr>
+          <a:xfrm>
+            <a:off x="9132570" y="3547872"/>
+            <a:ext cx="2489454" cy="237744"/>
+          </a:xfrm>
+          <a:prstGeom prst="rect">
+            <a:avLst/>
+          </a:prstGeom>
+          <a:noFill/>
+        </p:spPr>
+        <p:txBody>
+          <a:bodyPr wrap="square" anchor="ctr" lIns="45720" rIns="45720" tIns="27432" bIns="27432">
+            <a:normAutofit/>
+          </a:bodyPr>
+          <a:lstStyle/>
+          <a:p>
+            <a:pPr algn="l"/>
+            <a:r>
+              <a:rPr sz="850" b="1">
+                <a:solidFill>
+                  <a:srgbClr val="157355"/>
+                </a:solidFill>
+                <a:latin typeface="Inter"/>
+              </a:rPr>
+              <a:t>gok het geboortejaar en laat beve…</a:t>
+            </a:r>
+          </a:p>
+        </p:txBody>
+      </p:sp>
+      <p:sp>
+        <p:nvSpPr>
+          <p:cNvPr id="21" name="Tarjeta 4"/>
+          <p:cNvSpPr/>
+          <p:nvPr/>
+        </p:nvSpPr>
+        <p:spPr>
+          <a:xfrm>
+            <a:off x="457200" y="3968496"/>
+            <a:ext cx="2708910" cy="1170432"/>
+          </a:xfrm>
+          <a:prstGeom prst="roundRect">
+            <a:avLst>
+              <a:gd name="adj" fmla="val 6000"/>
+            </a:avLst>
+          </a:prstGeom>
+          <a:solidFill>
+            <a:srgbClr val="FFFFFF"/>
+          </a:solidFill>
+          <a:ln w="12700">
+            <a:solidFill>
+              <a:srgbClr val="E4E3DE"/>
+            </a:solidFill>
+          </a:ln>
+          <a:effectLst/>
+        </p:spPr>
+        <p:style>
+          <a:lnRef idx="1">
+            <a:schemeClr val="accent1"/>
+          </a:lnRef>
+          <a:fillRef idx="3">
+            <a:schemeClr val="accent1"/>
+          </a:fillRef>
+          <a:effectRef idx="2">
+            <a:schemeClr val="accent1"/>
+          </a:effectRef>
+          <a:fontRef idx="minor">
+            <a:schemeClr val="lt1"/>
+          </a:fontRef>
+        </p:style>
+        <p:txBody>
+          <a:bodyPr rtlCol="0" anchor="ctr"/>
+          <a:lstStyle/>
+          <a:p/>
+        </p:txBody>
+      </p:sp>
+      <p:sp>
+        <p:nvSpPr>
+          <p:cNvPr id="22" name="TarjetaTxt 4"/>
+          <p:cNvSpPr txBox="1"/>
+          <p:nvPr/>
+        </p:nvSpPr>
+        <p:spPr>
+          <a:xfrm>
+            <a:off x="548640" y="4023360"/>
+            <a:ext cx="2526030" cy="859536"/>
+          </a:xfrm>
+          <a:prstGeom prst="rect">
+            <a:avLst/>
+          </a:prstGeom>
+          <a:noFill/>
+        </p:spPr>
+        <p:txBody>
+          <a:bodyPr wrap="square" anchor="t" lIns="45720" rIns="45720" tIns="27432" bIns="27432">
+            <a:normAutofit/>
+          </a:bodyPr>
+          <a:lstStyle/>
+          <a:p>
+            <a:pPr algn="l"/>
+            <a:r>
+              <a:rPr sz="1100" b="1">
+                <a:solidFill>
+                  <a:srgbClr val="157355"/>
+                </a:solidFill>
+                <a:latin typeface="Bricolage Grotesque"/>
+              </a:rPr>
+              <a:t>rodeo</a:t>
+            </a:r>
+          </a:p>
+          <a:p>
+            <a:pPr algn="l"/>
+            <a:r>
+              <a:rPr sz="1000">
+                <a:solidFill>
+                  <a:srgbClr val="20242E"/>
+                </a:solidFill>
+                <a:latin typeface="Inter"/>
+              </a:rPr>
+              <a:t>¿Tienes la misma edad que yo?</a:t>
+            </a:r>
+          </a:p>
+        </p:txBody>
+      </p:sp>
+      <p:sp>
+        <p:nvSpPr>
+          <p:cNvPr id="23" name="Onthul 4"/>
+          <p:cNvSpPr/>
+          <p:nvPr/>
+        </p:nvSpPr>
+        <p:spPr>
+          <a:xfrm>
+            <a:off x="548640" y="4846320"/>
+            <a:ext cx="2526030" cy="237744"/>
+          </a:xfrm>
+          <a:prstGeom prst="roundRect">
+            <a:avLst>
+              <a:gd name="adj" fmla="val 20000"/>
+            </a:avLst>
+          </a:prstGeom>
+          <a:solidFill>
+            <a:srgbClr val="E4F4EE"/>
+          </a:solidFill>
+          <a:ln>
+            <a:noFill/>
+          </a:ln>
+          <a:effectLst/>
+        </p:spPr>
+        <p:style>
+          <a:lnRef idx="1">
+            <a:schemeClr val="accent1"/>
+          </a:lnRef>
+          <a:fillRef idx="3">
+            <a:schemeClr val="accent1"/>
+          </a:fillRef>
+          <a:effectRef idx="2">
+            <a:schemeClr val="accent1"/>
+          </a:effectRef>
+          <a:fontRef idx="minor">
+            <a:schemeClr val="lt1"/>
+          </a:fontRef>
+        </p:style>
+        <p:txBody>
+          <a:bodyPr rtlCol="0" anchor="ctr"/>
+          <a:lstStyle/>
+          <a:p/>
+        </p:txBody>
+      </p:sp>
+      <p:sp>
+        <p:nvSpPr>
+          <p:cNvPr id="24" name="OnthulTxt 4"/>
+          <p:cNvSpPr txBox="1"/>
+          <p:nvPr/>
+        </p:nvSpPr>
+        <p:spPr>
+          <a:xfrm>
+            <a:off x="566928" y="4846320"/>
+            <a:ext cx="2489454" cy="237744"/>
+          </a:xfrm>
+          <a:prstGeom prst="rect">
+            <a:avLst/>
+          </a:prstGeom>
+          <a:noFill/>
+        </p:spPr>
+        <p:txBody>
+          <a:bodyPr wrap="square" anchor="ctr" lIns="45720" rIns="45720" tIns="27432" bIns="27432">
+            <a:normAutofit/>
+          </a:bodyPr>
+          <a:lstStyle/>
+          <a:p>
+            <a:pPr algn="l"/>
+            <a:r>
+              <a:rPr sz="850" b="1">
+                <a:solidFill>
+                  <a:srgbClr val="157355"/>
+                </a:solidFill>
+                <a:latin typeface="Inter"/>
+              </a:rPr>
+              <a:t>vergelijk met jezelf</a:t>
+            </a:r>
+          </a:p>
+        </p:txBody>
+      </p:sp>
+      <p:sp>
+        <p:nvSpPr>
+          <p:cNvPr id="25" name="Tarjeta 5"/>
+          <p:cNvSpPr/>
+          <p:nvPr/>
+        </p:nvSpPr>
+        <p:spPr>
+          <a:xfrm>
+            <a:off x="3312414" y="3968496"/>
+            <a:ext cx="2708910" cy="1170432"/>
+          </a:xfrm>
+          <a:prstGeom prst="roundRect">
+            <a:avLst>
+              <a:gd name="adj" fmla="val 6000"/>
+            </a:avLst>
+          </a:prstGeom>
+          <a:solidFill>
+            <a:srgbClr val="FFFFFF"/>
+          </a:solidFill>
+          <a:ln w="12700">
+            <a:solidFill>
+              <a:srgbClr val="E4E3DE"/>
+            </a:solidFill>
+          </a:ln>
+          <a:effectLst/>
+        </p:spPr>
+        <p:style>
+          <a:lnRef idx="1">
+            <a:schemeClr val="accent1"/>
+          </a:lnRef>
+          <a:fillRef idx="3">
+            <a:schemeClr val="accent1"/>
+          </a:fillRef>
+          <a:effectRef idx="2">
+            <a:schemeClr val="accent1"/>
+          </a:effectRef>
+          <a:fontRef idx="minor">
+            <a:schemeClr val="lt1"/>
+          </a:fontRef>
+        </p:style>
+        <p:txBody>
+          <a:bodyPr rtlCol="0" anchor="ctr"/>
+          <a:lstStyle/>
+          <a:p/>
+        </p:txBody>
+      </p:sp>
+      <p:sp>
+        <p:nvSpPr>
+          <p:cNvPr id="26" name="TarjetaTxt 5"/>
+          <p:cNvSpPr txBox="1"/>
+          <p:nvPr/>
+        </p:nvSpPr>
+        <p:spPr>
+          <a:xfrm>
+            <a:off x="3403854" y="4023360"/>
+            <a:ext cx="2526030" cy="859536"/>
+          </a:xfrm>
+          <a:prstGeom prst="rect">
+            <a:avLst/>
+          </a:prstGeom>
+          <a:noFill/>
+        </p:spPr>
+        <p:txBody>
+          <a:bodyPr wrap="square" anchor="t" lIns="45720" rIns="45720" tIns="27432" bIns="27432">
+            <a:normAutofit/>
+          </a:bodyPr>
+          <a:lstStyle/>
+          <a:p>
+            <a:pPr algn="l"/>
+            <a:r>
+              <a:rPr sz="1100" b="1">
+                <a:solidFill>
+                  <a:srgbClr val="157355"/>
+                </a:solidFill>
+                <a:latin typeface="Bricolage Grotesque"/>
+              </a:rPr>
+              <a:t>rodeo</a:t>
+            </a:r>
+          </a:p>
+          <a:p>
+            <a:pPr algn="l"/>
+            <a:r>
+              <a:rPr sz="1000">
+                <a:solidFill>
+                  <a:srgbClr val="20242E"/>
+                </a:solidFill>
+                <a:latin typeface="Inter"/>
+              </a:rPr>
+              <a:t>¿Vienes al instituto en bici o en tren?</a:t>
+            </a:r>
+          </a:p>
+        </p:txBody>
+      </p:sp>
+      <p:sp>
+        <p:nvSpPr>
+          <p:cNvPr id="27" name="Onthul 5"/>
+          <p:cNvSpPr/>
+          <p:nvPr/>
+        </p:nvSpPr>
+        <p:spPr>
+          <a:xfrm>
+            <a:off x="3403854" y="4846320"/>
+            <a:ext cx="2526030" cy="237744"/>
+          </a:xfrm>
+          <a:prstGeom prst="roundRect">
+            <a:avLst>
+              <a:gd name="adj" fmla="val 20000"/>
+            </a:avLst>
+          </a:prstGeom>
+          <a:solidFill>
+            <a:srgbClr val="E4F4EE"/>
+          </a:solidFill>
+          <a:ln>
+            <a:noFill/>
+          </a:ln>
+          <a:effectLst/>
+        </p:spPr>
+        <p:style>
+          <a:lnRef idx="1">
+            <a:schemeClr val="accent1"/>
+          </a:lnRef>
+          <a:fillRef idx="3">
+            <a:schemeClr val="accent1"/>
+          </a:fillRef>
+          <a:effectRef idx="2">
+            <a:schemeClr val="accent1"/>
+          </a:effectRef>
+          <a:fontRef idx="minor">
+            <a:schemeClr val="lt1"/>
+          </a:fontRef>
+        </p:style>
+        <p:txBody>
+          <a:bodyPr rtlCol="0" anchor="ctr"/>
+          <a:lstStyle/>
+          <a:p/>
+        </p:txBody>
+      </p:sp>
+      <p:sp>
+        <p:nvSpPr>
+          <p:cNvPr id="28" name="OnthulTxt 5"/>
+          <p:cNvSpPr txBox="1"/>
+          <p:nvPr/>
+        </p:nvSpPr>
+        <p:spPr>
+          <a:xfrm>
+            <a:off x="3422142" y="4846320"/>
+            <a:ext cx="2489454" cy="237744"/>
+          </a:xfrm>
+          <a:prstGeom prst="rect">
+            <a:avLst/>
+          </a:prstGeom>
+          <a:noFill/>
+        </p:spPr>
+        <p:txBody>
+          <a:bodyPr wrap="square" anchor="ctr" lIns="45720" rIns="45720" tIns="27432" bIns="27432">
+            <a:normAutofit/>
+          </a:bodyPr>
+          <a:lstStyle/>
+          <a:p>
+            <a:pPr algn="l"/>
+            <a:r>
+              <a:rPr sz="850" b="1">
+                <a:solidFill>
+                  <a:srgbClr val="157355"/>
+                </a:solidFill>
+                <a:latin typeface="Inter"/>
+              </a:rPr>
+              <a:t>vervoer verraadt de afstand</a:t>
+            </a:r>
+          </a:p>
+        </p:txBody>
+      </p:sp>
+      <p:sp>
+        <p:nvSpPr>
+          <p:cNvPr id="29" name="Tarjeta 6"/>
+          <p:cNvSpPr/>
+          <p:nvPr/>
+        </p:nvSpPr>
+        <p:spPr>
+          <a:xfrm>
+            <a:off x="6167628" y="3968496"/>
+            <a:ext cx="2708910" cy="1170432"/>
+          </a:xfrm>
+          <a:prstGeom prst="roundRect">
+            <a:avLst>
+              <a:gd name="adj" fmla="val 6000"/>
+            </a:avLst>
+          </a:prstGeom>
+          <a:solidFill>
+            <a:srgbClr val="FFFFFF"/>
+          </a:solidFill>
+          <a:ln w="12700">
+            <a:solidFill>
+              <a:srgbClr val="E4E3DE"/>
+            </a:solidFill>
+          </a:ln>
+          <a:effectLst/>
+        </p:spPr>
+        <p:style>
+          <a:lnRef idx="1">
+            <a:schemeClr val="accent1"/>
+          </a:lnRef>
+          <a:fillRef idx="3">
+            <a:schemeClr val="accent1"/>
+          </a:fillRef>
+          <a:effectRef idx="2">
+            <a:schemeClr val="accent1"/>
+          </a:effectRef>
+          <a:fontRef idx="minor">
+            <a:schemeClr val="lt1"/>
+          </a:fontRef>
+        </p:style>
+        <p:txBody>
+          <a:bodyPr rtlCol="0" anchor="ctr"/>
+          <a:lstStyle/>
+          <a:p/>
+        </p:txBody>
+      </p:sp>
+      <p:sp>
+        <p:nvSpPr>
+          <p:cNvPr id="30" name="TarjetaTxt 6"/>
+          <p:cNvSpPr txBox="1"/>
+          <p:nvPr/>
+        </p:nvSpPr>
+        <p:spPr>
+          <a:xfrm>
+            <a:off x="6259068" y="4023360"/>
+            <a:ext cx="2526030" cy="859536"/>
+          </a:xfrm>
+          <a:prstGeom prst="rect">
+            <a:avLst/>
+          </a:prstGeom>
+          <a:noFill/>
+        </p:spPr>
+        <p:txBody>
+          <a:bodyPr wrap="square" anchor="t" lIns="45720" rIns="45720" tIns="27432" bIns="27432">
+            <a:normAutofit/>
+          </a:bodyPr>
+          <a:lstStyle/>
+          <a:p>
+            <a:pPr algn="l"/>
+            <a:r>
+              <a:rPr sz="1100" b="1">
+                <a:solidFill>
+                  <a:srgbClr val="157355"/>
+                </a:solidFill>
+                <a:latin typeface="Bricolage Grotesque"/>
+              </a:rPr>
+              <a:t>rodeo</a:t>
+            </a:r>
+          </a:p>
+          <a:p>
+            <a:pPr algn="l"/>
+            <a:r>
+              <a:rPr sz="1000">
+                <a:solidFill>
+                  <a:srgbClr val="20242E"/>
+                </a:solidFill>
+                <a:latin typeface="Inter"/>
+              </a:rPr>
+              <a:t>¿Tu ciudad es grande?</a:t>
+            </a:r>
+          </a:p>
+        </p:txBody>
+      </p:sp>
+      <p:sp>
+        <p:nvSpPr>
+          <p:cNvPr id="31" name="Onthul 6"/>
+          <p:cNvSpPr/>
+          <p:nvPr/>
+        </p:nvSpPr>
+        <p:spPr>
+          <a:xfrm>
+            <a:off x="6259068" y="4846320"/>
+            <a:ext cx="2526030" cy="237744"/>
+          </a:xfrm>
+          <a:prstGeom prst="roundRect">
+            <a:avLst>
+              <a:gd name="adj" fmla="val 20000"/>
+            </a:avLst>
+          </a:prstGeom>
+          <a:solidFill>
+            <a:srgbClr val="E4F4EE"/>
+          </a:solidFill>
+          <a:ln>
+            <a:noFill/>
+          </a:ln>
+          <a:effectLst/>
+        </p:spPr>
+        <p:style>
+          <a:lnRef idx="1">
+            <a:schemeClr val="accent1"/>
+          </a:lnRef>
+          <a:fillRef idx="3">
+            <a:schemeClr val="accent1"/>
+          </a:fillRef>
+          <a:effectRef idx="2">
+            <a:schemeClr val="accent1"/>
+          </a:effectRef>
+          <a:fontRef idx="minor">
+            <a:schemeClr val="lt1"/>
+          </a:fontRef>
+        </p:style>
+        <p:txBody>
+          <a:bodyPr rtlCol="0" anchor="ctr"/>
+          <a:lstStyle/>
+          <a:p/>
+        </p:txBody>
+      </p:sp>
+      <p:sp>
+        <p:nvSpPr>
+          <p:cNvPr id="32" name="OnthulTxt 6"/>
+          <p:cNvSpPr txBox="1"/>
+          <p:nvPr/>
+        </p:nvSpPr>
+        <p:spPr>
+          <a:xfrm>
+            <a:off x="6277356" y="4846320"/>
+            <a:ext cx="2489454" cy="237744"/>
+          </a:xfrm>
+          <a:prstGeom prst="rect">
+            <a:avLst/>
+          </a:prstGeom>
+          <a:noFill/>
+        </p:spPr>
+        <p:txBody>
+          <a:bodyPr wrap="square" anchor="ctr" lIns="45720" rIns="45720" tIns="27432" bIns="27432">
+            <a:normAutofit/>
+          </a:bodyPr>
+          <a:lstStyle/>
+          <a:p>
+            <a:pPr algn="l"/>
+            <a:r>
+              <a:rPr sz="850" b="1">
+                <a:solidFill>
+                  <a:srgbClr val="157355"/>
+                </a:solidFill>
+                <a:latin typeface="Inter"/>
+              </a:rPr>
+              <a:t>eigenschap in plaats van naam</a:t>
+            </a:r>
+          </a:p>
+        </p:txBody>
+      </p:sp>
+      <p:sp>
+        <p:nvSpPr>
+          <p:cNvPr id="33" name="Tarjeta 7"/>
+          <p:cNvSpPr/>
+          <p:nvPr/>
+        </p:nvSpPr>
+        <p:spPr>
+          <a:xfrm>
+            <a:off x="9022842" y="3968496"/>
+            <a:ext cx="2708910" cy="1170432"/>
+          </a:xfrm>
+          <a:prstGeom prst="roundRect">
+            <a:avLst>
+              <a:gd name="adj" fmla="val 6000"/>
+            </a:avLst>
+          </a:prstGeom>
+          <a:solidFill>
+            <a:srgbClr val="FFFFFF"/>
+          </a:solidFill>
+          <a:ln w="12700">
+            <a:solidFill>
+              <a:srgbClr val="E4E3DE"/>
+            </a:solidFill>
+          </a:ln>
+          <a:effectLst/>
+        </p:spPr>
+        <p:style>
+          <a:lnRef idx="1">
+            <a:schemeClr val="accent1"/>
+          </a:lnRef>
+          <a:fillRef idx="3">
+            <a:schemeClr val="accent1"/>
+          </a:fillRef>
+          <a:effectRef idx="2">
+            <a:schemeClr val="accent1"/>
+          </a:effectRef>
+          <a:fontRef idx="minor">
+            <a:schemeClr val="lt1"/>
+          </a:fontRef>
+        </p:style>
+        <p:txBody>
+          <a:bodyPr rtlCol="0" anchor="ctr"/>
+          <a:lstStyle/>
+          <a:p/>
+        </p:txBody>
+      </p:sp>
+      <p:sp>
+        <p:nvSpPr>
+          <p:cNvPr id="34" name="TarjetaTxt 7"/>
+          <p:cNvSpPr txBox="1"/>
+          <p:nvPr/>
+        </p:nvSpPr>
+        <p:spPr>
+          <a:xfrm>
+            <a:off x="9114282" y="4023360"/>
+            <a:ext cx="2526030" cy="859536"/>
+          </a:xfrm>
+          <a:prstGeom prst="rect">
+            <a:avLst/>
+          </a:prstGeom>
+          <a:noFill/>
+        </p:spPr>
+        <p:txBody>
+          <a:bodyPr wrap="square" anchor="t" lIns="45720" rIns="45720" tIns="27432" bIns="27432">
+            <a:normAutofit/>
+          </a:bodyPr>
+          <a:lstStyle/>
+          <a:p>
+            <a:pPr algn="l"/>
+            <a:r>
+              <a:rPr sz="1100" b="1">
+                <a:solidFill>
+                  <a:srgbClr val="157355"/>
+                </a:solidFill>
+                <a:latin typeface="Bricolage Grotesque"/>
+              </a:rPr>
+              <a:t>rodeo</a:t>
+            </a:r>
+          </a:p>
+          <a:p>
+            <a:pPr algn="l"/>
+            <a:r>
+              <a:rPr sz="1000">
+                <a:solidFill>
+                  <a:srgbClr val="20242E"/>
+                </a:solidFill>
+                <a:latin typeface="Inter"/>
+              </a:rPr>
+              <a:t>¿Hablas español en casa?</a:t>
+            </a:r>
+          </a:p>
+        </p:txBody>
+      </p:sp>
+      <p:sp>
+        <p:nvSpPr>
+          <p:cNvPr id="35" name="Onthul 7"/>
+          <p:cNvSpPr/>
+          <p:nvPr/>
+        </p:nvSpPr>
+        <p:spPr>
+          <a:xfrm>
+            <a:off x="9114282" y="4846320"/>
+            <a:ext cx="2526030" cy="237744"/>
+          </a:xfrm>
+          <a:prstGeom prst="roundRect">
+            <a:avLst>
+              <a:gd name="adj" fmla="val 20000"/>
+            </a:avLst>
+          </a:prstGeom>
+          <a:solidFill>
+            <a:srgbClr val="E4F4EE"/>
+          </a:solidFill>
+          <a:ln>
+            <a:noFill/>
+          </a:ln>
+          <a:effectLst/>
+        </p:spPr>
+        <p:style>
+          <a:lnRef idx="1">
+            <a:schemeClr val="accent1"/>
+          </a:lnRef>
+          <a:fillRef idx="3">
+            <a:schemeClr val="accent1"/>
+          </a:fillRef>
+          <a:effectRef idx="2">
+            <a:schemeClr val="accent1"/>
+          </a:effectRef>
+          <a:fontRef idx="minor">
+            <a:schemeClr val="lt1"/>
+          </a:fontRef>
+        </p:style>
+        <p:txBody>
+          <a:bodyPr rtlCol="0" anchor="ctr"/>
+          <a:lstStyle/>
+          <a:p/>
+        </p:txBody>
+      </p:sp>
+      <p:sp>
+        <p:nvSpPr>
+          <p:cNvPr id="36" name="OnthulTxt 7"/>
+          <p:cNvSpPr txBox="1"/>
+          <p:nvPr/>
+        </p:nvSpPr>
+        <p:spPr>
+          <a:xfrm>
+            <a:off x="9132570" y="4846320"/>
+            <a:ext cx="2489454" cy="237744"/>
+          </a:xfrm>
+          <a:prstGeom prst="rect">
+            <a:avLst/>
+          </a:prstGeom>
+          <a:noFill/>
+        </p:spPr>
+        <p:txBody>
+          <a:bodyPr wrap="square" anchor="ctr" lIns="45720" rIns="45720" tIns="27432" bIns="27432">
+            <a:normAutofit/>
+          </a:bodyPr>
+          <a:lstStyle/>
+          <a:p>
+            <a:pPr algn="l"/>
+            <a:r>
+              <a:rPr sz="850" b="1">
+                <a:solidFill>
+                  <a:srgbClr val="157355"/>
+                </a:solidFill>
+                <a:latin typeface="Inter"/>
+              </a:rPr>
+              <a:t>test één taal per keer</a:t>
+            </a:r>
+          </a:p>
+        </p:txBody>
+      </p:sp>
+      <p:sp>
+        <p:nvSpPr>
+          <p:cNvPr id="37" name="Tarjeta 8"/>
+          <p:cNvSpPr/>
+          <p:nvPr/>
+        </p:nvSpPr>
+        <p:spPr>
+          <a:xfrm>
+            <a:off x="457200" y="5266944"/>
+            <a:ext cx="2708910" cy="1170432"/>
+          </a:xfrm>
+          <a:prstGeom prst="roundRect">
+            <a:avLst>
+              <a:gd name="adj" fmla="val 6000"/>
+            </a:avLst>
+          </a:prstGeom>
+          <a:solidFill>
+            <a:srgbClr val="FFFFFF"/>
+          </a:solidFill>
+          <a:ln w="12700">
+            <a:solidFill>
+              <a:srgbClr val="E4E3DE"/>
+            </a:solidFill>
+          </a:ln>
+          <a:effectLst/>
+        </p:spPr>
+        <p:style>
+          <a:lnRef idx="1">
+            <a:schemeClr val="accent1"/>
+          </a:lnRef>
+          <a:fillRef idx="3">
+            <a:schemeClr val="accent1"/>
+          </a:fillRef>
+          <a:effectRef idx="2">
+            <a:schemeClr val="accent1"/>
+          </a:effectRef>
+          <a:fontRef idx="minor">
+            <a:schemeClr val="lt1"/>
+          </a:fontRef>
+        </p:style>
+        <p:txBody>
+          <a:bodyPr rtlCol="0" anchor="ctr"/>
+          <a:lstStyle/>
+          <a:p/>
+        </p:txBody>
+      </p:sp>
+      <p:sp>
+        <p:nvSpPr>
+          <p:cNvPr id="38" name="TarjetaTxt 8"/>
+          <p:cNvSpPr txBox="1"/>
+          <p:nvPr/>
+        </p:nvSpPr>
+        <p:spPr>
+          <a:xfrm>
+            <a:off x="548640" y="5321808"/>
+            <a:ext cx="2526030" cy="859536"/>
+          </a:xfrm>
+          <a:prstGeom prst="rect">
+            <a:avLst/>
+          </a:prstGeom>
+          <a:noFill/>
+        </p:spPr>
+        <p:txBody>
+          <a:bodyPr wrap="square" anchor="t" lIns="45720" rIns="45720" tIns="27432" bIns="27432">
+            <a:normAutofit/>
+          </a:bodyPr>
+          <a:lstStyle/>
+          <a:p>
+            <a:pPr algn="l"/>
+            <a:r>
+              <a:rPr sz="1100" b="1">
+                <a:solidFill>
+                  <a:srgbClr val="157355"/>
+                </a:solidFill>
+                <a:latin typeface="Bricolage Grotesque"/>
+              </a:rPr>
+              <a:t>rodeo</a:t>
+            </a:r>
+          </a:p>
+          <a:p>
+            <a:pPr algn="l"/>
+            <a:r>
+              <a:rPr sz="1000">
+                <a:solidFill>
+                  <a:srgbClr val="20242E"/>
+                </a:solidFill>
+                <a:latin typeface="Inter"/>
+              </a:rPr>
+              <a:t>¿Ves series en inglés sin subtítulos?</a:t>
+            </a:r>
+          </a:p>
+        </p:txBody>
+      </p:sp>
+      <p:sp>
+        <p:nvSpPr>
+          <p:cNvPr id="39" name="Onthul 8"/>
+          <p:cNvSpPr/>
+          <p:nvPr/>
+        </p:nvSpPr>
+        <p:spPr>
+          <a:xfrm>
+            <a:off x="548640" y="6144768"/>
+            <a:ext cx="2526030" cy="237744"/>
+          </a:xfrm>
+          <a:prstGeom prst="roundRect">
+            <a:avLst>
+              <a:gd name="adj" fmla="val 20000"/>
+            </a:avLst>
+          </a:prstGeom>
+          <a:solidFill>
+            <a:srgbClr val="E4F4EE"/>
+          </a:solidFill>
+          <a:ln>
+            <a:noFill/>
+          </a:ln>
+          <a:effectLst/>
+        </p:spPr>
+        <p:style>
+          <a:lnRef idx="1">
+            <a:schemeClr val="accent1"/>
+          </a:lnRef>
+          <a:fillRef idx="3">
+            <a:schemeClr val="accent1"/>
+          </a:fillRef>
+          <a:effectRef idx="2">
+            <a:schemeClr val="accent1"/>
+          </a:effectRef>
+          <a:fontRef idx="minor">
+            <a:schemeClr val="lt1"/>
+          </a:fontRef>
+        </p:style>
+        <p:txBody>
+          <a:bodyPr rtlCol="0" anchor="ctr"/>
+          <a:lstStyle/>
+          <a:p/>
+        </p:txBody>
+      </p:sp>
+      <p:sp>
+        <p:nvSpPr>
+          <p:cNvPr id="40" name="OnthulTxt 8"/>
+          <p:cNvSpPr txBox="1"/>
+          <p:nvPr/>
+        </p:nvSpPr>
+        <p:spPr>
+          <a:xfrm>
+            <a:off x="566928" y="6144768"/>
+            <a:ext cx="2489454" cy="237744"/>
+          </a:xfrm>
+          <a:prstGeom prst="rect">
+            <a:avLst/>
+          </a:prstGeom>
+          <a:noFill/>
+        </p:spPr>
+        <p:txBody>
+          <a:bodyPr wrap="square" anchor="ctr" lIns="45720" rIns="45720" tIns="27432" bIns="27432">
+            <a:normAutofit/>
+          </a:bodyPr>
+          <a:lstStyle/>
+          <a:p>
+            <a:pPr algn="l"/>
+            <a:r>
+              <a:rPr sz="850" b="1">
+                <a:solidFill>
+                  <a:srgbClr val="157355"/>
+                </a:solidFill>
+                <a:latin typeface="Inter"/>
+              </a:rPr>
+              <a:t>gewoonte verraadt het niveau</a:t>
+            </a:r>
+          </a:p>
+        </p:txBody>
+      </p:sp>
+    </p:spTree>
+  </p:cSld>
+  <p:clrMapOvr>
+    <a:masterClrMapping/>
+  </p:clrMapOvr>
+  <p:timing>
+    <p:tnLst>
+      <p:par>
+        <p:cTn id="1" dur="indefinite" restart="never" nodeType="tmRoot">
+          <p:childTnLst>
+            <p:seq concurrent="1" nextAc="seek">
+              <p:cTn id="2" dur="indefinite" nodeType="mainSeq">
+                <p:childTnLst>
+                  <p:par>
+                    <p:cTn id="5" fill="hold">
+                      <p:stCondLst>
+                        <p:cond delay="indefinite"/>
+                      </p:stCondLst>
+                      <p:childTnLst>
+                        <p:par>
+                          <p:cTn id="6" fill="hold">
+                            <p:stCondLst>
+                              <p:cond delay="0"/>
+                            </p:stCondLst>
+                            <p:childTnLst>
+                              <p:par>
+                                <p:cTn id="7" presetID="10" presetClass="entr" presetSubtype="0" fill="hold" grpId="0" nodeType="clickEffect">
+                                  <p:stCondLst>
+                                    <p:cond delay="0"/>
+                                  </p:stCondLst>
+                                  <p:childTnLst>
+                                    <p:set>
+                                      <p:cBhvr>
+                                        <p:cTn id="8" dur="1" fill="hold">
+                                          <p:stCondLst>
+                                            <p:cond delay="0"/>
+                                          </p:stCondLst>
+                                        </p:cTn>
+                                        <p:tgtEl>
+                                          <p:spTgt spid="19"/>
+                                        </p:tgtEl>
+                                        <p:attrNameLst>
+                                          <p:attrName>style.visibility</p:attrName>
+                                        </p:attrNameLst>
+                                      </p:cBhvr>
+                                      <p:to>
+                                        <p:strVal val="visible"/>
+                                      </p:to>
+                                    </p:set>
+                                    <p:animEffect transition="in" filter="fade">
+                                      <p:cBhvr>
+                                        <p:cTn id="9" dur="500"/>
+                                        <p:tgtEl>
+                                          <p:spTgt spid="19"/>
+                                        </p:tgtEl>
+                                      </p:cBhvr>
+                                    </p:animEffect>
+                                  </p:childTnLst>
+                                </p:cTn>
+                              </p:par>
+                            </p:childTnLst>
+                          </p:cTn>
+                        </p:par>
+                      </p:childTnLst>
+                    </p:cTn>
+                  </p:par>
+                  <p:par>
+                    <p:cTn id="10" fill="hold">
+                      <p:stCondLst>
+                        <p:cond delay="indefinite"/>
+                      </p:stCondLst>
+                      <p:childTnLst>
+                        <p:par>
+                          <p:cTn id="11" fill="hold">
+                            <p:stCondLst>
+                              <p:cond delay="0"/>
+                            </p:stCondLst>
+                            <p:childTnLst>
+                              <p:par>
+                                <p:cTn id="12" presetID="10" presetClass="entr" presetSubtype="0" fill="hold" grpId="0" nodeType="clickEffect">
+                                  <p:stCondLst>
+                                    <p:cond delay="0"/>
+                                  </p:stCondLst>
+                                  <p:childTnLst>
+                                    <p:set>
+                                      <p:cBhvr>
+                                        <p:cTn id="13" dur="1" fill="hold">
+                                          <p:stCondLst>
+                                            <p:cond delay="0"/>
+                                          </p:stCondLst>
+                                        </p:cTn>
+                                        <p:tgtEl>
+                                          <p:spTgt spid="20"/>
+                                        </p:tgtEl>
+                                        <p:attrNameLst>
+                                          <p:attrName>style.visibility</p:attrName>
+                                        </p:attrNameLst>
+                                      </p:cBhvr>
+                                      <p:to>
+                                        <p:strVal val="visible"/>
+                                      </p:to>
+                                    </p:set>
+                                    <p:animEffect transition="in" filter="fade">
+                                      <p:cBhvr>
+                                        <p:cTn id="14" dur="500"/>
+                                        <p:tgtEl>
+                                          <p:spTgt spid="20"/>
+                                        </p:tgtEl>
+                                      </p:cBhvr>
+                                    </p:animEffect>
+                                  </p:childTnLst>
+                                </p:cTn>
+                              </p:par>
+                            </p:childTnLst>
+                          </p:cTn>
+                        </p:par>
+                      </p:childTnLst>
+                    </p:cTn>
+                  </p:par>
+                  <p:par>
+                    <p:cTn id="15" fill="hold">
+                      <p:stCondLst>
+                        <p:cond delay="indefinite"/>
+                      </p:stCondLst>
+                      <p:childTnLst>
+                        <p:par>
+                          <p:cTn id="16" fill="hold">
+                            <p:stCondLst>
+                              <p:cond delay="0"/>
+                            </p:stCondLst>
+                            <p:childTnLst>
+                              <p:par>
+                                <p:cTn id="17" presetID="10" presetClass="entr" presetSubtype="0" fill="hold" grpId="0" nodeType="clickEffect">
+                                  <p:stCondLst>
+                                    <p:cond delay="0"/>
+                                  </p:stCondLst>
+                                  <p:childTnLst>
+                                    <p:set>
+                                      <p:cBhvr>
+                                        <p:cTn id="18" dur="1" fill="hold">
+                                          <p:stCondLst>
+                                            <p:cond delay="0"/>
+                                          </p:stCondLst>
+                                        </p:cTn>
+                                        <p:tgtEl>
+                                          <p:spTgt spid="23"/>
+                                        </p:tgtEl>
+                                        <p:attrNameLst>
+                                          <p:attrName>style.visibility</p:attrName>
+                                        </p:attrNameLst>
+                                      </p:cBhvr>
+                                      <p:to>
+                                        <p:strVal val="visible"/>
+                                      </p:to>
+                                    </p:set>
+                                    <p:animEffect transition="in" filter="fade">
+                                      <p:cBhvr>
+                                        <p:cTn id="19" dur="500"/>
+                                        <p:tgtEl>
+                                          <p:spTgt spid="23"/>
+                                        </p:tgtEl>
+                                      </p:cBhvr>
+                                    </p:animEffect>
+                                  </p:childTnLst>
+                                </p:cTn>
+                              </p:par>
+                            </p:childTnLst>
+                          </p:cTn>
+                        </p:par>
+                      </p:childTnLst>
+                    </p:cTn>
+                  </p:par>
+                  <p:par>
+                    <p:cTn id="20" fill="hold">
+                      <p:stCondLst>
+                        <p:cond delay="indefinite"/>
+                      </p:stCondLst>
+                      <p:childTnLst>
+                        <p:par>
+                          <p:cTn id="21" fill="hold">
+                            <p:stCondLst>
+                              <p:cond delay="0"/>
+                            </p:stCondLst>
+                            <p:childTnLst>
+                              <p:par>
+                                <p:cTn id="22" presetID="10" presetClass="entr" presetSubtype="0" fill="hold" grpId="0" nodeType="clickEffect">
+                                  <p:stCondLst>
+                                    <p:cond delay="0"/>
+                                  </p:stCondLst>
+                                  <p:childTnLst>
+                                    <p:set>
+                                      <p:cBhvr>
+                                        <p:cTn id="23" dur="1" fill="hold">
+                                          <p:stCondLst>
+                                            <p:cond delay="0"/>
+                                          </p:stCondLst>
+                                        </p:cTn>
+                                        <p:tgtEl>
+                                          <p:spTgt spid="24"/>
+                                        </p:tgtEl>
+                                        <p:attrNameLst>
+                                          <p:attrName>style.visibility</p:attrName>
+                                        </p:attrNameLst>
+                                      </p:cBhvr>
+                                      <p:to>
+                                        <p:strVal val="visible"/>
+                                      </p:to>
+                                    </p:set>
+                                    <p:animEffect transition="in" filter="fade">
+                                      <p:cBhvr>
+                                        <p:cTn id="24" dur="500"/>
+                                        <p:tgtEl>
+                                          <p:spTgt spid="24"/>
+                                        </p:tgtEl>
+                                      </p:cBhvr>
+                                    </p:animEffect>
+                                  </p:childTnLst>
+                                </p:cTn>
+                              </p:par>
+                            </p:childTnLst>
+                          </p:cTn>
+                        </p:par>
+                      </p:childTnLst>
+                    </p:cTn>
+                  </p:par>
+                  <p:par>
+                    <p:cTn id="25" fill="hold">
+                      <p:stCondLst>
+                        <p:cond delay="indefinite"/>
+                      </p:stCondLst>
+                      <p:childTnLst>
+                        <p:par>
+                          <p:cTn id="26" fill="hold">
+                            <p:stCondLst>
+                              <p:cond delay="0"/>
+                            </p:stCondLst>
+                            <p:childTnLst>
+                              <p:par>
+                                <p:cTn id="27" presetID="10" presetClass="entr" presetSubtype="0" fill="hold" grpId="0" nodeType="clickEffect">
+                                  <p:stCondLst>
+                                    <p:cond delay="0"/>
+                                  </p:stCondLst>
+                                  <p:childTnLst>
+                                    <p:set>
+                                      <p:cBhvr>
+                                        <p:cTn id="28" dur="1" fill="hold">
+                                          <p:stCondLst>
+                                            <p:cond delay="0"/>
+                                          </p:stCondLst>
+                                        </p:cTn>
+                                        <p:tgtEl>
+                                          <p:spTgt spid="27"/>
+                                        </p:tgtEl>
+                                        <p:attrNameLst>
+                                          <p:attrName>style.visibility</p:attrName>
+                                        </p:attrNameLst>
+                                      </p:cBhvr>
+                                      <p:to>
+                                        <p:strVal val="visible"/>
+                                      </p:to>
+                                    </p:set>
+                                    <p:animEffect transition="in" filter="fade">
+                                      <p:cBhvr>
+                                        <p:cTn id="29" dur="500"/>
+                                        <p:tgtEl>
+                                          <p:spTgt spid="27"/>
+                                        </p:tgtEl>
+                                      </p:cBhvr>
+                                    </p:animEffect>
+                                  </p:childTnLst>
+                                </p:cTn>
+                              </p:par>
+                            </p:childTnLst>
+                          </p:cTn>
+                        </p:par>
+                      </p:childTnLst>
+                    </p:cTn>
+                  </p:par>
+                  <p:par>
+                    <p:cTn id="30" fill="hold">
+                      <p:stCondLst>
+                        <p:cond delay="indefinite"/>
+                      </p:stCondLst>
+                      <p:childTnLst>
+                        <p:par>
+                          <p:cTn id="31" fill="hold">
+                            <p:stCondLst>
+                              <p:cond delay="0"/>
+                            </p:stCondLst>
+                            <p:childTnLst>
+                              <p:par>
+                                <p:cTn id="32" presetID="10" presetClass="entr" presetSubtype="0" fill="hold" grpId="0" nodeType="clickEffect">
+                                  <p:stCondLst>
+                                    <p:cond delay="0"/>
+                                  </p:stCondLst>
+                                  <p:childTnLst>
+                                    <p:set>
+                                      <p:cBhvr>
+                                        <p:cTn id="33" dur="1" fill="hold">
+                                          <p:stCondLst>
+                                            <p:cond delay="0"/>
+                                          </p:stCondLst>
+                                        </p:cTn>
+                                        <p:tgtEl>
+                                          <p:spTgt spid="28"/>
+                                        </p:tgtEl>
+                                        <p:attrNameLst>
+                                          <p:attrName>style.visibility</p:attrName>
+                                        </p:attrNameLst>
+                                      </p:cBhvr>
+                                      <p:to>
+                                        <p:strVal val="visible"/>
+                                      </p:to>
+                                    </p:set>
+                                    <p:animEffect transition="in" filter="fade">
+                                      <p:cBhvr>
+                                        <p:cTn id="34" dur="500"/>
+                                        <p:tgtEl>
+                                          <p:spTgt spid="28"/>
+                                        </p:tgtEl>
+                                      </p:cBhvr>
+                                    </p:animEffect>
+                                  </p:childTnLst>
+                                </p:cTn>
+                              </p:par>
+                            </p:childTnLst>
+                          </p:cTn>
+                        </p:par>
+                      </p:childTnLst>
+                    </p:cTn>
+                  </p:par>
+                  <p:par>
+                    <p:cTn id="35" fill="hold">
+                      <p:stCondLst>
+                        <p:cond delay="indefinite"/>
+                      </p:stCondLst>
+                      <p:childTnLst>
+                        <p:par>
+                          <p:cTn id="36" fill="hold">
+                            <p:stCondLst>
+                              <p:cond delay="0"/>
+                            </p:stCondLst>
+                            <p:childTnLst>
+                              <p:par>
+                                <p:cTn id="37" presetID="10" presetClass="entr" presetSubtype="0" fill="hold" grpId="0" nodeType="clickEffect">
+                                  <p:stCondLst>
+                                    <p:cond delay="0"/>
+                                  </p:stCondLst>
+                                  <p:childTnLst>
+                                    <p:set>
+                                      <p:cBhvr>
+                                        <p:cTn id="38" dur="1" fill="hold">
+                                          <p:stCondLst>
+                                            <p:cond delay="0"/>
+                                          </p:stCondLst>
+                                        </p:cTn>
+                                        <p:tgtEl>
+                                          <p:spTgt spid="31"/>
+                                        </p:tgtEl>
+                                        <p:attrNameLst>
+                                          <p:attrName>style.visibility</p:attrName>
+                                        </p:attrNameLst>
+                                      </p:cBhvr>
+                                      <p:to>
+                                        <p:strVal val="visible"/>
+                                      </p:to>
+                                    </p:set>
+                                    <p:animEffect transition="in" filter="fade">
+                                      <p:cBhvr>
+                                        <p:cTn id="39" dur="500"/>
+                                        <p:tgtEl>
+                                          <p:spTgt spid="31"/>
+                                        </p:tgtEl>
+                                      </p:cBhvr>
+                                    </p:animEffect>
+                                  </p:childTnLst>
+                                </p:cTn>
+                              </p:par>
+                            </p:childTnLst>
+                          </p:cTn>
+                        </p:par>
+                      </p:childTnLst>
+                    </p:cTn>
+                  </p:par>
+                  <p:par>
+                    <p:cTn id="40" fill="hold">
+                      <p:stCondLst>
+                        <p:cond delay="indefinite"/>
+                      </p:stCondLst>
+                      <p:childTnLst>
+                        <p:par>
+                          <p:cTn id="41" fill="hold">
+                            <p:stCondLst>
+                              <p:cond delay="0"/>
+                            </p:stCondLst>
+                            <p:childTnLst>
+                              <p:par>
+                                <p:cTn id="42" presetID="10" presetClass="entr" presetSubtype="0" fill="hold" grpId="0" nodeType="clickEffect">
+                                  <p:stCondLst>
+                                    <p:cond delay="0"/>
+                                  </p:stCondLst>
+                                  <p:childTnLst>
+                                    <p:set>
+                                      <p:cBhvr>
+                                        <p:cTn id="43" dur="1" fill="hold">
+                                          <p:stCondLst>
+                                            <p:cond delay="0"/>
+                                          </p:stCondLst>
+                                        </p:cTn>
+                                        <p:tgtEl>
+                                          <p:spTgt spid="32"/>
+                                        </p:tgtEl>
+                                        <p:attrNameLst>
+                                          <p:attrName>style.visibility</p:attrName>
+                                        </p:attrNameLst>
+                                      </p:cBhvr>
+                                      <p:to>
+                                        <p:strVal val="visible"/>
+                                      </p:to>
+                                    </p:set>
+                                    <p:animEffect transition="in" filter="fade">
+                                      <p:cBhvr>
+                                        <p:cTn id="44" dur="500"/>
+                                        <p:tgtEl>
+                                          <p:spTgt spid="32"/>
+                                        </p:tgtEl>
+                                      </p:cBhvr>
+                                    </p:animEffect>
+                                  </p:childTnLst>
+                                </p:cTn>
+                              </p:par>
+                            </p:childTnLst>
+                          </p:cTn>
+                        </p:par>
+                      </p:childTnLst>
+                    </p:cTn>
+                  </p:par>
+                  <p:par>
+                    <p:cTn id="45" fill="hold">
+                      <p:stCondLst>
+                        <p:cond delay="indefinite"/>
+                      </p:stCondLst>
+                      <p:childTnLst>
+                        <p:par>
+                          <p:cTn id="46" fill="hold">
+                            <p:stCondLst>
+                              <p:cond delay="0"/>
+                            </p:stCondLst>
+                            <p:childTnLst>
+                              <p:par>
+                                <p:cTn id="47" presetID="10" presetClass="entr" presetSubtype="0" fill="hold" grpId="0" nodeType="clickEffect">
+                                  <p:stCondLst>
+                                    <p:cond delay="0"/>
+                                  </p:stCondLst>
+                                  <p:childTnLst>
+                                    <p:set>
+                                      <p:cBhvr>
+                                        <p:cTn id="48" dur="1" fill="hold">
+                                          <p:stCondLst>
+                                            <p:cond delay="0"/>
+                                          </p:stCondLst>
+                                        </p:cTn>
+                                        <p:tgtEl>
+                                          <p:spTgt spid="35"/>
+                                        </p:tgtEl>
+                                        <p:attrNameLst>
+                                          <p:attrName>style.visibility</p:attrName>
+                                        </p:attrNameLst>
+                                      </p:cBhvr>
+                                      <p:to>
+                                        <p:strVal val="visible"/>
+                                      </p:to>
+                                    </p:set>
+                                    <p:animEffect transition="in" filter="fade">
+                                      <p:cBhvr>
+                                        <p:cTn id="49" dur="500"/>
+                                        <p:tgtEl>
+                                          <p:spTgt spid="35"/>
+                                        </p:tgtEl>
+                                      </p:cBhvr>
+                                    </p:animEffect>
+                                  </p:childTnLst>
+                                </p:cTn>
+                              </p:par>
+                            </p:childTnLst>
+                          </p:cTn>
+                        </p:par>
+                      </p:childTnLst>
+                    </p:cTn>
+                  </p:par>
+                  <p:par>
+                    <p:cTn id="50" fill="hold">
+                      <p:stCondLst>
+                        <p:cond delay="indefinite"/>
+                      </p:stCondLst>
+                      <p:childTnLst>
+                        <p:par>
+                          <p:cTn id="51" fill="hold">
+                            <p:stCondLst>
+                              <p:cond delay="0"/>
+                            </p:stCondLst>
+                            <p:childTnLst>
+                              <p:par>
+                                <p:cTn id="52" presetID="10" presetClass="entr" presetSubtype="0" fill="hold" grpId="0" nodeType="clickEffect">
+                                  <p:stCondLst>
+                                    <p:cond delay="0"/>
+                                  </p:stCondLst>
+                                  <p:childTnLst>
+                                    <p:set>
+                                      <p:cBhvr>
+                                        <p:cTn id="53" dur="1" fill="hold">
+                                          <p:stCondLst>
+                                            <p:cond delay="0"/>
+                                          </p:stCondLst>
+                                        </p:cTn>
+                                        <p:tgtEl>
+                                          <p:spTgt spid="36"/>
+                                        </p:tgtEl>
+                                        <p:attrNameLst>
+                                          <p:attrName>style.visibility</p:attrName>
+                                        </p:attrNameLst>
+                                      </p:cBhvr>
+                                      <p:to>
+                                        <p:strVal val="visible"/>
+                                      </p:to>
+                                    </p:set>
+                                    <p:animEffect transition="in" filter="fade">
+                                      <p:cBhvr>
+                                        <p:cTn id="54" dur="500"/>
+                                        <p:tgtEl>
+                                          <p:spTgt spid="36"/>
+                                        </p:tgtEl>
+                                      </p:cBhvr>
+                                    </p:animEffect>
+                                  </p:childTnLst>
+                                </p:cTn>
+                              </p:par>
+                            </p:childTnLst>
+                          </p:cTn>
+                        </p:par>
+                      </p:childTnLst>
+                    </p:cTn>
+                  </p:par>
+                  <p:par>
+                    <p:cTn id="55" fill="hold">
+                      <p:stCondLst>
+                        <p:cond delay="indefinite"/>
+                      </p:stCondLst>
+                      <p:childTnLst>
+                        <p:par>
+                          <p:cTn id="56" fill="hold">
+                            <p:stCondLst>
+                              <p:cond delay="0"/>
+                            </p:stCondLst>
+                            <p:childTnLst>
+                              <p:par>
+                                <p:cTn id="57" presetID="10" presetClass="entr" presetSubtype="0" fill="hold" grpId="0" nodeType="clickEffect">
+                                  <p:stCondLst>
+                                    <p:cond delay="0"/>
+                                  </p:stCondLst>
+                                  <p:childTnLst>
+                                    <p:set>
+                                      <p:cBhvr>
+                                        <p:cTn id="58" dur="1" fill="hold">
+                                          <p:stCondLst>
+                                            <p:cond delay="0"/>
+                                          </p:stCondLst>
+                                        </p:cTn>
+                                        <p:tgtEl>
+                                          <p:spTgt spid="39"/>
+                                        </p:tgtEl>
+                                        <p:attrNameLst>
+                                          <p:attrName>style.visibility</p:attrName>
+                                        </p:attrNameLst>
+                                      </p:cBhvr>
+                                      <p:to>
+                                        <p:strVal val="visible"/>
+                                      </p:to>
+                                    </p:set>
+                                    <p:animEffect transition="in" filter="fade">
+                                      <p:cBhvr>
+                                        <p:cTn id="59" dur="500"/>
+                                        <p:tgtEl>
+                                          <p:spTgt spid="39"/>
+                                        </p:tgtEl>
+                                      </p:cBhvr>
+                                    </p:animEffect>
+                                  </p:childTnLst>
+                                </p:cTn>
+                              </p:par>
+                            </p:childTnLst>
+                          </p:cTn>
+                        </p:par>
+                      </p:childTnLst>
+                    </p:cTn>
+                  </p:par>
+                  <p:par>
+                    <p:cTn id="60" fill="hold">
+                      <p:stCondLst>
+                        <p:cond delay="indefinite"/>
+                      </p:stCondLst>
+                      <p:childTnLst>
+                        <p:par>
+                          <p:cTn id="61" fill="hold">
+                            <p:stCondLst>
+                              <p:cond delay="0"/>
+                            </p:stCondLst>
+                            <p:childTnLst>
+                              <p:par>
+                                <p:cTn id="62" presetID="10" presetClass="entr" presetSubtype="0" fill="hold" grpId="0" nodeType="clickEffect">
+                                  <p:stCondLst>
+                                    <p:cond delay="0"/>
+                                  </p:stCondLst>
+                                  <p:childTnLst>
+                                    <p:set>
+                                      <p:cBhvr>
+                                        <p:cTn id="63" dur="1" fill="hold">
+                                          <p:stCondLst>
+                                            <p:cond delay="0"/>
+                                          </p:stCondLst>
+                                        </p:cTn>
+                                        <p:tgtEl>
+                                          <p:spTgt spid="40"/>
+                                        </p:tgtEl>
+                                        <p:attrNameLst>
+                                          <p:attrName>style.visibility</p:attrName>
+                                        </p:attrNameLst>
+                                      </p:cBhvr>
+                                      <p:to>
+                                        <p:strVal val="visible"/>
+                                      </p:to>
+                                    </p:set>
+                                    <p:animEffect transition="in" filter="fade">
+                                      <p:cBhvr>
+                                        <p:cTn id="64" dur="500"/>
+                                        <p:tgtEl>
+                                          <p:spTgt spid="40"/>
+                                        </p:tgtEl>
+                                      </p:cBhvr>
+                                    </p:animEffect>
+                                  </p:childTnLst>
+                                </p:cTn>
+                              </p:par>
+                            </p:childTnLst>
+                          </p:cTn>
+                        </p:par>
+                      </p:childTnLst>
+                    </p:cTn>
+                  </p:par>
+                </p:childTnLst>
+              </p:cTn>
+              <p:prevCondLst>
+                <p:cond evt="onPrev" delay="0">
+                  <p:tgtEl>
+                    <p:sldTgt/>
+                  </p:tgtEl>
+                </p:cond>
+              </p:prevCondLst>
+              <p:nextCondLst>
+                <p:cond evt="onNext" delay="0">
+                  <p:tgtEl>
+                    <p:sldTgt/>
+                  </p:tgtEl>
+                </p:cond>
+              </p:nextCondLst>
+            </p:seq>
+          </p:childTnLst>
+        </p:cTn>
+      </p:par>
+    </p:tnLst>
+  </p:timing>
+</p:sld>
+</file>
+
+<file path=ppt/slides/slide26.xml><?xml version="1.0" encoding="utf-8"?>
+<p:sld xmlns:a="http://schemas.openxmlformats.org/drawingml/2006/main" xmlns:p="http://schemas.openxmlformats.org/presentationml/2006/main" xmlns:r="http://schemas.openxmlformats.org/officeDocument/2006/relationships">
+  <p:cSld>
+    <p:spTree>
+      <p:nvGrpSpPr>
+        <p:cNvPr id="1" name=""/>
+        <p:cNvGrpSpPr/>
+        <p:nvPr/>
+      </p:nvGrpSpPr>
+      <p:grpSpPr/>
+      <p:sp>
+        <p:nvSpPr>
+          <p:cNvPr id="2" name="Fondo"/>
+          <p:cNvSpPr/>
+          <p:nvPr/>
+        </p:nvSpPr>
+        <p:spPr>
+          <a:xfrm>
+            <a:off x="0" y="0"/>
+            <a:ext cx="12191695" cy="6858000"/>
+          </a:xfrm>
+          <a:prstGeom prst="rect">
+            <a:avLst/>
+          </a:prstGeom>
+          <a:solidFill>
+            <a:srgbClr val="FCFBF8"/>
+          </a:solidFill>
+          <a:ln>
+            <a:noFill/>
+          </a:ln>
+          <a:effectLst/>
+        </p:spPr>
+        <p:style>
+          <a:lnRef idx="1">
+            <a:schemeClr val="accent1"/>
+          </a:lnRef>
+          <a:fillRef idx="3">
+            <a:schemeClr val="accent1"/>
+          </a:fillRef>
+          <a:effectRef idx="2">
+            <a:schemeClr val="accent1"/>
+          </a:effectRef>
+          <a:fontRef idx="minor">
+            <a:schemeClr val="lt1"/>
+          </a:fontRef>
+        </p:style>
+        <p:txBody>
+          <a:bodyPr rtlCol="0" anchor="ctr"/>
+          <a:lstStyle/>
+          <a:p/>
+        </p:txBody>
+      </p:sp>
+      <p:sp>
+        <p:nvSpPr>
+          <p:cNvPr id="3" name="Cabecera"/>
+          <p:cNvSpPr/>
+          <p:nvPr/>
+        </p:nvSpPr>
+        <p:spPr>
+          <a:xfrm>
+            <a:off x="0" y="0"/>
+            <a:ext cx="12191695" cy="1078992"/>
+          </a:xfrm>
+          <a:prstGeom prst="rect">
+            <a:avLst/>
+          </a:prstGeom>
+          <a:solidFill>
+            <a:srgbClr val="1E9E74"/>
+          </a:solidFill>
+          <a:ln>
+            <a:noFill/>
+          </a:ln>
+          <a:effectLst/>
+        </p:spPr>
+        <p:style>
+          <a:lnRef idx="1">
+            <a:schemeClr val="accent1"/>
+          </a:lnRef>
+          <a:fillRef idx="3">
+            <a:schemeClr val="accent1"/>
+          </a:fillRef>
+          <a:effectRef idx="2">
+            <a:schemeClr val="accent1"/>
+          </a:effectRef>
+          <a:fontRef idx="minor">
+            <a:schemeClr val="lt1"/>
+          </a:fontRef>
+        </p:style>
+        <p:txBody>
+          <a:bodyPr rtlCol="0" anchor="ctr"/>
+          <a:lstStyle/>
+          <a:p/>
+        </p:txBody>
+      </p:sp>
+      <p:sp>
+        <p:nvSpPr>
+          <p:cNvPr id="4" name="Chip"/>
+          <p:cNvSpPr/>
+          <p:nvPr/>
+        </p:nvSpPr>
+        <p:spPr>
+          <a:xfrm>
+            <a:off x="457200" y="182880"/>
+            <a:ext cx="3017520" cy="292608"/>
+          </a:xfrm>
+          <a:prstGeom prst="roundRect">
+            <a:avLst>
+              <a:gd name="adj" fmla="val 50000"/>
+            </a:avLst>
+          </a:prstGeom>
+          <a:solidFill>
+            <a:srgbClr val="FFFFFF"/>
+          </a:solidFill>
+          <a:ln>
+            <a:noFill/>
+          </a:ln>
+          <a:effectLst/>
+        </p:spPr>
+        <p:style>
+          <a:lnRef idx="1">
+            <a:schemeClr val="accent1"/>
+          </a:lnRef>
+          <a:fillRef idx="3">
+            <a:schemeClr val="accent1"/>
+          </a:fillRef>
+          <a:effectRef idx="2">
+            <a:schemeClr val="accent1"/>
+          </a:effectRef>
+          <a:fontRef idx="minor">
+            <a:schemeClr val="lt1"/>
+          </a:fontRef>
+        </p:style>
+        <p:txBody>
+          <a:bodyPr rtlCol="0" anchor="ctr"/>
+          <a:lstStyle/>
+          <a:p/>
+        </p:txBody>
+      </p:sp>
+      <p:sp>
+        <p:nvSpPr>
+          <p:cNvPr id="5" name="ChipTxt"/>
+          <p:cNvSpPr txBox="1"/>
+          <p:nvPr/>
+        </p:nvSpPr>
+        <p:spPr>
+          <a:xfrm>
+            <a:off x="457200" y="173736"/>
+            <a:ext cx="3017520" cy="310896"/>
+          </a:xfrm>
+          <a:prstGeom prst="rect">
+            <a:avLst/>
+          </a:prstGeom>
+          <a:noFill/>
+        </p:spPr>
+        <p:txBody>
+          <a:bodyPr wrap="square" anchor="ctr" lIns="45720" rIns="45720" tIns="27432" bIns="27432">
+            <a:normAutofit/>
+          </a:bodyPr>
+          <a:lstStyle/>
+          <a:p>
+            <a:pPr algn="ctr"/>
+            <a:r>
+              <a:rPr sz="950" b="1">
+                <a:solidFill>
+                  <a:srgbClr val="157355"/>
+                </a:solidFill>
+                <a:latin typeface="Inter"/>
+              </a:rPr>
+              <a:t>RETO 9 · ONDERHANDELING &amp; DILEMMA</a:t>
+            </a:r>
+          </a:p>
+        </p:txBody>
+      </p:sp>
+      <p:sp>
+        <p:nvSpPr>
+          <p:cNvPr id="6" name="Titulo"/>
+          <p:cNvSpPr txBox="1"/>
+          <p:nvPr/>
+        </p:nvSpPr>
+        <p:spPr>
+          <a:xfrm>
+            <a:off x="457200" y="502920"/>
+            <a:ext cx="8412480" cy="475488"/>
+          </a:xfrm>
+          <a:prstGeom prst="rect">
+            <a:avLst/>
+          </a:prstGeom>
+          <a:noFill/>
+        </p:spPr>
+        <p:txBody>
+          <a:bodyPr wrap="square" anchor="t" lIns="45720" rIns="45720" tIns="27432" bIns="27432">
+            <a:normAutofit/>
+          </a:bodyPr>
+          <a:lstStyle/>
+          <a:p>
+            <a:pPr algn="l"/>
+            <a:r>
+              <a:rPr sz="2700" b="1">
+                <a:solidFill>
+                  <a:srgbClr val="FFFFFF"/>
+                </a:solidFill>
+                <a:latin typeface="Bricolage Grotesque"/>
+              </a:rPr>
+              <a:t>Perfil para el algoritmo</a:t>
+            </a:r>
+          </a:p>
+        </p:txBody>
+      </p:sp>
+      <p:sp>
+        <p:nvSpPr>
+          <p:cNvPr id="7" name="Badges"/>
+          <p:cNvSpPr txBox="1"/>
+          <p:nvPr/>
+        </p:nvSpPr>
+        <p:spPr>
+          <a:xfrm>
+            <a:off x="9052560" y="256032"/>
+            <a:ext cx="2651760" cy="640080"/>
+          </a:xfrm>
+          <a:prstGeom prst="rect">
+            <a:avLst/>
+          </a:prstGeom>
+          <a:noFill/>
+        </p:spPr>
+        <p:txBody>
+          <a:bodyPr wrap="square" anchor="t" lIns="45720" rIns="45720" tIns="27432" bIns="27432">
+            <a:normAutofit/>
+          </a:bodyPr>
+          <a:lstStyle/>
+          <a:p>
+            <a:pPr algn="r"/>
+            <a:r>
+              <a:rPr sz="1000">
+                <a:solidFill>
+                  <a:srgbClr val="E4F4EE"/>
+                </a:solidFill>
+                <a:latin typeface="Inter"/>
+              </a:rPr>
+              <a:t>🏫 Toda la clase</a:t>
+            </a:r>
+          </a:p>
+          <a:p>
+            <a:pPr algn="r"/>
+            <a:r>
+              <a:rPr sz="1000">
+                <a:solidFill>
+                  <a:srgbClr val="E4F4EE"/>
+                </a:solidFill>
+                <a:latin typeface="Inter"/>
+              </a:rPr>
+              <a:t>± 15 min · ★★★</a:t>
+            </a:r>
+          </a:p>
+        </p:txBody>
+      </p:sp>
+      <p:sp>
+        <p:nvSpPr>
+          <p:cNvPr id="8" name="Gancho"/>
+          <p:cNvSpPr txBox="1"/>
+          <p:nvPr/>
+        </p:nvSpPr>
+        <p:spPr>
+          <a:xfrm>
+            <a:off x="457200" y="1225296"/>
+            <a:ext cx="11274552" cy="566928"/>
+          </a:xfrm>
+          <a:prstGeom prst="rect">
+            <a:avLst/>
+          </a:prstGeom>
+          <a:noFill/>
+        </p:spPr>
+        <p:txBody>
+          <a:bodyPr wrap="square" anchor="t" lIns="45720" rIns="45720" tIns="27432" bIns="27432">
+            <a:normAutofit/>
+          </a:bodyPr>
+          <a:lstStyle/>
+          <a:p>
+            <a:pPr algn="l"/>
+            <a:r>
+              <a:rPr sz="1600" b="1">
+                <a:solidFill>
+                  <a:srgbClr val="157355"/>
+                </a:solidFill>
+                <a:latin typeface="Bricolage Grotesque"/>
+              </a:rPr>
+              <a:t>Escribe tu perfil. Hoy la clase es el algoritmo, y tiene que justificarse.</a:t>
+            </a:r>
+          </a:p>
+          <a:p>
+            <a:pPr algn="l"/>
+            <a:r>
+              <a:rPr sz="1100" i="1">
+                <a:solidFill>
+                  <a:srgbClr val="6A6E78"/>
+                </a:solidFill>
+                <a:latin typeface="Inter"/>
+              </a:rPr>
+              <a:t>Schrijf je profiel. Vandaag is de klas het algoritme — en het moet zich verantwoorden.</a:t>
+            </a:r>
+          </a:p>
+        </p:txBody>
+      </p:sp>
+      <p:sp>
+        <p:nvSpPr>
+          <p:cNvPr id="9" name="ReglaCaja"/>
+          <p:cNvSpPr/>
+          <p:nvPr/>
+        </p:nvSpPr>
+        <p:spPr>
+          <a:xfrm>
+            <a:off x="457200" y="1847088"/>
+            <a:ext cx="11274552" cy="658368"/>
+          </a:xfrm>
+          <a:prstGeom prst="roundRect">
+            <a:avLst>
+              <a:gd name="adj" fmla="val 5000"/>
+            </a:avLst>
+          </a:prstGeom>
+          <a:solidFill>
+            <a:srgbClr val="FBF3D6"/>
+          </a:solidFill>
+          <a:ln>
+            <a:noFill/>
+          </a:ln>
+          <a:effectLst/>
+        </p:spPr>
+        <p:style>
+          <a:lnRef idx="1">
+            <a:schemeClr val="accent1"/>
+          </a:lnRef>
+          <a:fillRef idx="3">
+            <a:schemeClr val="accent1"/>
+          </a:fillRef>
+          <a:effectRef idx="2">
+            <a:schemeClr val="accent1"/>
+          </a:effectRef>
+          <a:fontRef idx="minor">
+            <a:schemeClr val="lt1"/>
+          </a:fontRef>
+        </p:style>
+        <p:txBody>
+          <a:bodyPr rtlCol="0" anchor="ctr"/>
+          <a:lstStyle/>
+          <a:p/>
+        </p:txBody>
+      </p:sp>
+      <p:sp>
+        <p:nvSpPr>
+          <p:cNvPr id="10" name="ReglaTxt"/>
+          <p:cNvSpPr txBox="1"/>
+          <p:nvPr/>
+        </p:nvSpPr>
+        <p:spPr>
+          <a:xfrm>
+            <a:off x="603504" y="1883664"/>
+            <a:ext cx="10972800" cy="585216"/>
+          </a:xfrm>
+          <a:prstGeom prst="rect">
+            <a:avLst/>
+          </a:prstGeom>
+          <a:noFill/>
+        </p:spPr>
+        <p:txBody>
+          <a:bodyPr wrap="square" anchor="t" lIns="45720" rIns="45720" tIns="27432" bIns="27432">
+            <a:normAutofit/>
+          </a:bodyPr>
+          <a:lstStyle/>
+          <a:p>
+            <a:pPr algn="l"/>
+            <a:r>
+              <a:rPr sz="850" b="1">
+                <a:solidFill>
+                  <a:srgbClr val="B7860B"/>
+                </a:solidFill>
+                <a:latin typeface="Inter"/>
+              </a:rPr>
+              <a:t>LA REGLA DEL RETO</a:t>
+            </a:r>
+          </a:p>
+          <a:p>
+            <a:pPr algn="l"/>
+            <a:r>
+              <a:rPr sz="1100">
+                <a:solidFill>
+                  <a:srgbClr val="20242E"/>
+                </a:solidFill>
+                <a:latin typeface="Inter"/>
+              </a:rPr>
+              <a:t>Het algoritme mag niemand koppelen op naam of op wie bevriend is. Alleen gegevens uit de profielen tellen, en de reden moet met «son» of «tienen» geformuleerd worden.</a:t>
+            </a:r>
+          </a:p>
+        </p:txBody>
+      </p:sp>
+      <p:sp>
+        <p:nvSpPr>
+          <p:cNvPr id="11" name="Tarjeta 0"/>
+          <p:cNvSpPr/>
+          <p:nvPr/>
+        </p:nvSpPr>
+        <p:spPr>
+          <a:xfrm>
+            <a:off x="457200" y="2670048"/>
+            <a:ext cx="2708910" cy="1170432"/>
+          </a:xfrm>
+          <a:prstGeom prst="roundRect">
+            <a:avLst>
+              <a:gd name="adj" fmla="val 6000"/>
+            </a:avLst>
+          </a:prstGeom>
+          <a:solidFill>
+            <a:srgbClr val="FFFFFF"/>
+          </a:solidFill>
+          <a:ln w="12700">
+            <a:solidFill>
+              <a:srgbClr val="E4E3DE"/>
+            </a:solidFill>
+          </a:ln>
+          <a:effectLst/>
+        </p:spPr>
+        <p:style>
+          <a:lnRef idx="1">
+            <a:schemeClr val="accent1"/>
+          </a:lnRef>
+          <a:fillRef idx="3">
+            <a:schemeClr val="accent1"/>
+          </a:fillRef>
+          <a:effectRef idx="2">
+            <a:schemeClr val="accent1"/>
+          </a:effectRef>
+          <a:fontRef idx="minor">
+            <a:schemeClr val="lt1"/>
+          </a:fontRef>
+        </p:style>
+        <p:txBody>
+          <a:bodyPr rtlCol="0" anchor="ctr"/>
+          <a:lstStyle/>
+          <a:p/>
+        </p:txBody>
+      </p:sp>
+      <p:sp>
+        <p:nvSpPr>
+          <p:cNvPr id="12" name="TarjetaTxt 0"/>
+          <p:cNvSpPr txBox="1"/>
+          <p:nvPr/>
+        </p:nvSpPr>
+        <p:spPr>
+          <a:xfrm>
+            <a:off x="548640" y="2724912"/>
+            <a:ext cx="2526030" cy="1060704"/>
+          </a:xfrm>
+          <a:prstGeom prst="rect">
+            <a:avLst/>
+          </a:prstGeom>
+          <a:noFill/>
+        </p:spPr>
+        <p:txBody>
+          <a:bodyPr wrap="square" anchor="t" lIns="45720" rIns="45720" tIns="27432" bIns="27432">
+            <a:normAutofit/>
+          </a:bodyPr>
+          <a:lstStyle/>
+          <a:p>
+            <a:pPr algn="l"/>
+            <a:r>
+              <a:rPr sz="1100" b="1">
+                <a:solidFill>
+                  <a:srgbClr val="157355"/>
+                </a:solidFill>
+                <a:latin typeface="Bricolage Grotesque"/>
+              </a:rPr>
+              <a:t>Tu perfil</a:t>
+            </a:r>
+          </a:p>
+          <a:p>
+            <a:pPr algn="l"/>
+            <a:r>
+              <a:rPr sz="1000">
+                <a:solidFill>
+                  <a:srgbClr val="20242E"/>
+                </a:solidFill>
+                <a:latin typeface="Inter"/>
+              </a:rPr>
+              <a:t>Tengo … años.</a:t>
+            </a:r>
+          </a:p>
+        </p:txBody>
+      </p:sp>
+      <p:sp>
+        <p:nvSpPr>
+          <p:cNvPr id="13" name="Tarjeta 1"/>
+          <p:cNvSpPr/>
+          <p:nvPr/>
+        </p:nvSpPr>
+        <p:spPr>
+          <a:xfrm>
+            <a:off x="3312414" y="2670048"/>
+            <a:ext cx="2708910" cy="1170432"/>
+          </a:xfrm>
+          <a:prstGeom prst="roundRect">
+            <a:avLst>
+              <a:gd name="adj" fmla="val 6000"/>
+            </a:avLst>
+          </a:prstGeom>
+          <a:solidFill>
+            <a:srgbClr val="FFFFFF"/>
+          </a:solidFill>
+          <a:ln w="12700">
+            <a:solidFill>
+              <a:srgbClr val="E4E3DE"/>
+            </a:solidFill>
+          </a:ln>
+          <a:effectLst/>
+        </p:spPr>
+        <p:style>
+          <a:lnRef idx="1">
+            <a:schemeClr val="accent1"/>
+          </a:lnRef>
+          <a:fillRef idx="3">
+            <a:schemeClr val="accent1"/>
+          </a:fillRef>
+          <a:effectRef idx="2">
+            <a:schemeClr val="accent1"/>
+          </a:effectRef>
+          <a:fontRef idx="minor">
+            <a:schemeClr val="lt1"/>
+          </a:fontRef>
+        </p:style>
+        <p:txBody>
+          <a:bodyPr rtlCol="0" anchor="ctr"/>
+          <a:lstStyle/>
+          <a:p/>
+        </p:txBody>
+      </p:sp>
+      <p:sp>
+        <p:nvSpPr>
+          <p:cNvPr id="14" name="TarjetaTxt 1"/>
+          <p:cNvSpPr txBox="1"/>
+          <p:nvPr/>
+        </p:nvSpPr>
+        <p:spPr>
+          <a:xfrm>
+            <a:off x="3403854" y="2724912"/>
+            <a:ext cx="2526030" cy="1060704"/>
+          </a:xfrm>
+          <a:prstGeom prst="rect">
+            <a:avLst/>
+          </a:prstGeom>
+          <a:noFill/>
+        </p:spPr>
+        <p:txBody>
+          <a:bodyPr wrap="square" anchor="t" lIns="45720" rIns="45720" tIns="27432" bIns="27432">
+            <a:normAutofit/>
+          </a:bodyPr>
+          <a:lstStyle/>
+          <a:p>
+            <a:pPr algn="l"/>
+            <a:r>
+              <a:rPr sz="1100" b="1">
+                <a:solidFill>
+                  <a:srgbClr val="157355"/>
+                </a:solidFill>
+                <a:latin typeface="Bricolage Grotesque"/>
+              </a:rPr>
+              <a:t>Tu perfil</a:t>
+            </a:r>
+          </a:p>
+          <a:p>
+            <a:pPr algn="l"/>
+            <a:r>
+              <a:rPr sz="1000">
+                <a:solidFill>
+                  <a:srgbClr val="20242E"/>
+                </a:solidFill>
+                <a:latin typeface="Inter"/>
+              </a:rPr>
+              <a:t>Soy de … y vivo en …</a:t>
+            </a:r>
+          </a:p>
+        </p:txBody>
+      </p:sp>
+      <p:sp>
+        <p:nvSpPr>
+          <p:cNvPr id="15" name="Tarjeta 2"/>
+          <p:cNvSpPr/>
+          <p:nvPr/>
+        </p:nvSpPr>
+        <p:spPr>
+          <a:xfrm>
+            <a:off x="6167628" y="2670048"/>
+            <a:ext cx="2708910" cy="1170432"/>
+          </a:xfrm>
+          <a:prstGeom prst="roundRect">
+            <a:avLst>
+              <a:gd name="adj" fmla="val 6000"/>
+            </a:avLst>
+          </a:prstGeom>
+          <a:solidFill>
+            <a:srgbClr val="FFFFFF"/>
+          </a:solidFill>
+          <a:ln w="12700">
+            <a:solidFill>
+              <a:srgbClr val="E4E3DE"/>
+            </a:solidFill>
+          </a:ln>
+          <a:effectLst/>
+        </p:spPr>
+        <p:style>
+          <a:lnRef idx="1">
+            <a:schemeClr val="accent1"/>
+          </a:lnRef>
+          <a:fillRef idx="3">
+            <a:schemeClr val="accent1"/>
+          </a:fillRef>
+          <a:effectRef idx="2">
+            <a:schemeClr val="accent1"/>
+          </a:effectRef>
+          <a:fontRef idx="minor">
+            <a:schemeClr val="lt1"/>
+          </a:fontRef>
+        </p:style>
+        <p:txBody>
+          <a:bodyPr rtlCol="0" anchor="ctr"/>
+          <a:lstStyle/>
+          <a:p/>
+        </p:txBody>
+      </p:sp>
+      <p:sp>
+        <p:nvSpPr>
+          <p:cNvPr id="16" name="TarjetaTxt 2"/>
+          <p:cNvSpPr txBox="1"/>
+          <p:nvPr/>
+        </p:nvSpPr>
+        <p:spPr>
+          <a:xfrm>
+            <a:off x="6259068" y="2724912"/>
+            <a:ext cx="2526030" cy="1060704"/>
+          </a:xfrm>
+          <a:prstGeom prst="rect">
+            <a:avLst/>
+          </a:prstGeom>
+          <a:noFill/>
+        </p:spPr>
+        <p:txBody>
+          <a:bodyPr wrap="square" anchor="t" lIns="45720" rIns="45720" tIns="27432" bIns="27432">
+            <a:normAutofit/>
+          </a:bodyPr>
+          <a:lstStyle/>
+          <a:p>
+            <a:pPr algn="l"/>
+            <a:r>
+              <a:rPr sz="1100" b="1">
+                <a:solidFill>
+                  <a:srgbClr val="157355"/>
+                </a:solidFill>
+                <a:latin typeface="Bricolage Grotesque"/>
+              </a:rPr>
+              <a:t>Tu perfil</a:t>
+            </a:r>
+          </a:p>
+          <a:p>
+            <a:pPr algn="l"/>
+            <a:r>
+              <a:rPr sz="1000">
+                <a:solidFill>
+                  <a:srgbClr val="20242E"/>
+                </a:solidFill>
+                <a:latin typeface="Inter"/>
+              </a:rPr>
+              <a:t>Hablo … y estudio …</a:t>
+            </a:r>
+          </a:p>
+        </p:txBody>
+      </p:sp>
+      <p:sp>
+        <p:nvSpPr>
+          <p:cNvPr id="17" name="Tarjeta 3"/>
+          <p:cNvSpPr/>
+          <p:nvPr/>
+        </p:nvSpPr>
+        <p:spPr>
+          <a:xfrm>
+            <a:off x="9022842" y="2670048"/>
+            <a:ext cx="2708910" cy="1170432"/>
+          </a:xfrm>
+          <a:prstGeom prst="roundRect">
+            <a:avLst>
+              <a:gd name="adj" fmla="val 6000"/>
+            </a:avLst>
+          </a:prstGeom>
+          <a:solidFill>
+            <a:srgbClr val="FFFFFF"/>
+          </a:solidFill>
+          <a:ln w="12700">
+            <a:solidFill>
+              <a:srgbClr val="E4E3DE"/>
+            </a:solidFill>
+          </a:ln>
+          <a:effectLst/>
+        </p:spPr>
+        <p:style>
+          <a:lnRef idx="1">
+            <a:schemeClr val="accent1"/>
+          </a:lnRef>
+          <a:fillRef idx="3">
+            <a:schemeClr val="accent1"/>
+          </a:fillRef>
+          <a:effectRef idx="2">
+            <a:schemeClr val="accent1"/>
+          </a:effectRef>
+          <a:fontRef idx="minor">
+            <a:schemeClr val="lt1"/>
+          </a:fontRef>
+        </p:style>
+        <p:txBody>
+          <a:bodyPr rtlCol="0" anchor="ctr"/>
+          <a:lstStyle/>
+          <a:p/>
+        </p:txBody>
+      </p:sp>
+      <p:sp>
+        <p:nvSpPr>
+          <p:cNvPr id="18" name="TarjetaTxt 3"/>
+          <p:cNvSpPr txBox="1"/>
+          <p:nvPr/>
+        </p:nvSpPr>
+        <p:spPr>
+          <a:xfrm>
+            <a:off x="9114282" y="2724912"/>
+            <a:ext cx="2526030" cy="1060704"/>
+          </a:xfrm>
+          <a:prstGeom prst="rect">
+            <a:avLst/>
+          </a:prstGeom>
+          <a:noFill/>
+        </p:spPr>
+        <p:txBody>
+          <a:bodyPr wrap="square" anchor="t" lIns="45720" rIns="45720" tIns="27432" bIns="27432">
+            <a:normAutofit/>
+          </a:bodyPr>
+          <a:lstStyle/>
+          <a:p>
+            <a:pPr algn="l"/>
+            <a:r>
+              <a:rPr sz="1100" b="1">
+                <a:solidFill>
+                  <a:srgbClr val="157355"/>
+                </a:solidFill>
+                <a:latin typeface="Bricolage Grotesque"/>
+              </a:rPr>
+              <a:t>Tu perfil</a:t>
+            </a:r>
+          </a:p>
+          <a:p>
+            <a:pPr algn="l"/>
+            <a:r>
+              <a:rPr sz="1000">
+                <a:solidFill>
+                  <a:srgbClr val="20242E"/>
+                </a:solidFill>
+                <a:latin typeface="Inter"/>
+              </a:rPr>
+              <a:t>En mi tiempo libre …</a:t>
+            </a:r>
+          </a:p>
+        </p:txBody>
+      </p:sp>
+      <p:sp>
+        <p:nvSpPr>
+          <p:cNvPr id="19" name="Tarjeta 4"/>
+          <p:cNvSpPr/>
+          <p:nvPr/>
+        </p:nvSpPr>
+        <p:spPr>
+          <a:xfrm>
+            <a:off x="457200" y="3968496"/>
+            <a:ext cx="2708910" cy="1170432"/>
+          </a:xfrm>
+          <a:prstGeom prst="roundRect">
+            <a:avLst>
+              <a:gd name="adj" fmla="val 6000"/>
+            </a:avLst>
+          </a:prstGeom>
+          <a:solidFill>
+            <a:srgbClr val="FFFFFF"/>
+          </a:solidFill>
+          <a:ln w="12700">
+            <a:solidFill>
+              <a:srgbClr val="E4E3DE"/>
+            </a:solidFill>
+          </a:ln>
+          <a:effectLst/>
+        </p:spPr>
+        <p:style>
+          <a:lnRef idx="1">
+            <a:schemeClr val="accent1"/>
+          </a:lnRef>
+          <a:fillRef idx="3">
+            <a:schemeClr val="accent1"/>
+          </a:fillRef>
+          <a:effectRef idx="2">
+            <a:schemeClr val="accent1"/>
+          </a:effectRef>
+          <a:fontRef idx="minor">
+            <a:schemeClr val="lt1"/>
+          </a:fontRef>
+        </p:style>
+        <p:txBody>
+          <a:bodyPr rtlCol="0" anchor="ctr"/>
+          <a:lstStyle/>
+          <a:p/>
+        </p:txBody>
+      </p:sp>
+      <p:sp>
+        <p:nvSpPr>
+          <p:cNvPr id="20" name="TarjetaTxt 4"/>
+          <p:cNvSpPr txBox="1"/>
+          <p:nvPr/>
+        </p:nvSpPr>
+        <p:spPr>
+          <a:xfrm>
+            <a:off x="548640" y="4023360"/>
+            <a:ext cx="2526030" cy="1060704"/>
+          </a:xfrm>
+          <a:prstGeom prst="rect">
+            <a:avLst/>
+          </a:prstGeom>
+          <a:noFill/>
+        </p:spPr>
+        <p:txBody>
+          <a:bodyPr wrap="square" anchor="t" lIns="45720" rIns="45720" tIns="27432" bIns="27432">
+            <a:normAutofit/>
+          </a:bodyPr>
+          <a:lstStyle/>
+          <a:p>
+            <a:pPr algn="l"/>
+            <a:r>
+              <a:rPr sz="1100" b="1">
+                <a:solidFill>
+                  <a:srgbClr val="157355"/>
+                </a:solidFill>
+                <a:latin typeface="Bricolage Grotesque"/>
+              </a:rPr>
+              <a:t>El algoritmo</a:t>
+            </a:r>
+          </a:p>
+          <a:p>
+            <a:pPr algn="l"/>
+            <a:r>
+              <a:rPr sz="1000">
+                <a:solidFill>
+                  <a:srgbClr val="20242E"/>
+                </a:solidFill>
+                <a:latin typeface="Inter"/>
+              </a:rPr>
+              <a:t>El uno y el siete son pareja porque los dos son de …</a:t>
+            </a:r>
+          </a:p>
+        </p:txBody>
+      </p:sp>
+      <p:sp>
+        <p:nvSpPr>
+          <p:cNvPr id="21" name="Tarjeta 5"/>
+          <p:cNvSpPr/>
+          <p:nvPr/>
+        </p:nvSpPr>
+        <p:spPr>
+          <a:xfrm>
+            <a:off x="3312414" y="3968496"/>
+            <a:ext cx="2708910" cy="1170432"/>
+          </a:xfrm>
+          <a:prstGeom prst="roundRect">
+            <a:avLst>
+              <a:gd name="adj" fmla="val 6000"/>
+            </a:avLst>
+          </a:prstGeom>
+          <a:solidFill>
+            <a:srgbClr val="FFFFFF"/>
+          </a:solidFill>
+          <a:ln w="12700">
+            <a:solidFill>
+              <a:srgbClr val="E4E3DE"/>
+            </a:solidFill>
+          </a:ln>
+          <a:effectLst/>
+        </p:spPr>
+        <p:style>
+          <a:lnRef idx="1">
+            <a:schemeClr val="accent1"/>
+          </a:lnRef>
+          <a:fillRef idx="3">
+            <a:schemeClr val="accent1"/>
+          </a:fillRef>
+          <a:effectRef idx="2">
+            <a:schemeClr val="accent1"/>
+          </a:effectRef>
+          <a:fontRef idx="minor">
+            <a:schemeClr val="lt1"/>
+          </a:fontRef>
+        </p:style>
+        <p:txBody>
+          <a:bodyPr rtlCol="0" anchor="ctr"/>
+          <a:lstStyle/>
+          <a:p/>
+        </p:txBody>
+      </p:sp>
+      <p:sp>
+        <p:nvSpPr>
+          <p:cNvPr id="22" name="TarjetaTxt 5"/>
+          <p:cNvSpPr txBox="1"/>
+          <p:nvPr/>
+        </p:nvSpPr>
+        <p:spPr>
+          <a:xfrm>
+            <a:off x="3403854" y="4023360"/>
+            <a:ext cx="2526030" cy="1060704"/>
+          </a:xfrm>
+          <a:prstGeom prst="rect">
+            <a:avLst/>
+          </a:prstGeom>
+          <a:noFill/>
+        </p:spPr>
+        <p:txBody>
+          <a:bodyPr wrap="square" anchor="t" lIns="45720" rIns="45720" tIns="27432" bIns="27432">
+            <a:normAutofit/>
+          </a:bodyPr>
+          <a:lstStyle/>
+          <a:p>
+            <a:pPr algn="l"/>
+            <a:r>
+              <a:rPr sz="1100" b="1">
+                <a:solidFill>
+                  <a:srgbClr val="157355"/>
+                </a:solidFill>
+                <a:latin typeface="Bricolage Grotesque"/>
+              </a:rPr>
+              <a:t>El algoritmo</a:t>
+            </a:r>
+          </a:p>
+          <a:p>
+            <a:pPr algn="l"/>
+            <a:r>
+              <a:rPr sz="1000">
+                <a:solidFill>
+                  <a:srgbClr val="20242E"/>
+                </a:solidFill>
+                <a:latin typeface="Inter"/>
+              </a:rPr>
+              <a:t>… porque tienen la misma edad.</a:t>
+            </a:r>
+          </a:p>
+        </p:txBody>
+      </p:sp>
+      <p:sp>
+        <p:nvSpPr>
+          <p:cNvPr id="23" name="Tarjeta 6"/>
+          <p:cNvSpPr/>
+          <p:nvPr/>
+        </p:nvSpPr>
+        <p:spPr>
+          <a:xfrm>
+            <a:off x="6167628" y="3968496"/>
+            <a:ext cx="2708910" cy="1170432"/>
+          </a:xfrm>
+          <a:prstGeom prst="roundRect">
+            <a:avLst>
+              <a:gd name="adj" fmla="val 6000"/>
+            </a:avLst>
+          </a:prstGeom>
+          <a:solidFill>
+            <a:srgbClr val="FFFFFF"/>
+          </a:solidFill>
+          <a:ln w="12700">
+            <a:solidFill>
+              <a:srgbClr val="E4E3DE"/>
+            </a:solidFill>
+          </a:ln>
+          <a:effectLst/>
+        </p:spPr>
+        <p:style>
+          <a:lnRef idx="1">
+            <a:schemeClr val="accent1"/>
+          </a:lnRef>
+          <a:fillRef idx="3">
+            <a:schemeClr val="accent1"/>
+          </a:fillRef>
+          <a:effectRef idx="2">
+            <a:schemeClr val="accent1"/>
+          </a:effectRef>
+          <a:fontRef idx="minor">
+            <a:schemeClr val="lt1"/>
+          </a:fontRef>
+        </p:style>
+        <p:txBody>
+          <a:bodyPr rtlCol="0" anchor="ctr"/>
+          <a:lstStyle/>
+          <a:p/>
+        </p:txBody>
+      </p:sp>
+      <p:sp>
+        <p:nvSpPr>
+          <p:cNvPr id="24" name="TarjetaTxt 6"/>
+          <p:cNvSpPr txBox="1"/>
+          <p:nvPr/>
+        </p:nvSpPr>
+        <p:spPr>
+          <a:xfrm>
+            <a:off x="6259068" y="4023360"/>
+            <a:ext cx="2526030" cy="1060704"/>
+          </a:xfrm>
+          <a:prstGeom prst="rect">
+            <a:avLst/>
+          </a:prstGeom>
+          <a:noFill/>
+        </p:spPr>
+        <p:txBody>
+          <a:bodyPr wrap="square" anchor="t" lIns="45720" rIns="45720" tIns="27432" bIns="27432">
+            <a:normAutofit/>
+          </a:bodyPr>
+          <a:lstStyle/>
+          <a:p>
+            <a:pPr algn="l"/>
+            <a:r>
+              <a:rPr sz="1100" b="1">
+                <a:solidFill>
+                  <a:srgbClr val="157355"/>
+                </a:solidFill>
+                <a:latin typeface="Bricolage Grotesque"/>
+              </a:rPr>
+              <a:t>El algoritmo</a:t>
+            </a:r>
+          </a:p>
+          <a:p>
+            <a:pPr algn="l"/>
+            <a:r>
+              <a:rPr sz="1000">
+                <a:solidFill>
+                  <a:srgbClr val="20242E"/>
+                </a:solidFill>
+                <a:latin typeface="Inter"/>
+              </a:rPr>
+              <a:t>… porque los dos hablan …</a:t>
+            </a:r>
+          </a:p>
+        </p:txBody>
+      </p:sp>
+      <p:sp>
+        <p:nvSpPr>
+          <p:cNvPr id="25" name="Tarjeta 7"/>
+          <p:cNvSpPr/>
+          <p:nvPr/>
+        </p:nvSpPr>
+        <p:spPr>
+          <a:xfrm>
+            <a:off x="9022842" y="3968496"/>
+            <a:ext cx="2708910" cy="1170432"/>
+          </a:xfrm>
+          <a:prstGeom prst="roundRect">
+            <a:avLst>
+              <a:gd name="adj" fmla="val 6000"/>
+            </a:avLst>
+          </a:prstGeom>
+          <a:solidFill>
+            <a:srgbClr val="FFFFFF"/>
+          </a:solidFill>
+          <a:ln w="12700">
+            <a:solidFill>
+              <a:srgbClr val="E4E3DE"/>
+            </a:solidFill>
+          </a:ln>
+          <a:effectLst/>
+        </p:spPr>
+        <p:style>
+          <a:lnRef idx="1">
+            <a:schemeClr val="accent1"/>
+          </a:lnRef>
+          <a:fillRef idx="3">
+            <a:schemeClr val="accent1"/>
+          </a:fillRef>
+          <a:effectRef idx="2">
+            <a:schemeClr val="accent1"/>
+          </a:effectRef>
+          <a:fontRef idx="minor">
+            <a:schemeClr val="lt1"/>
+          </a:fontRef>
+        </p:style>
+        <p:txBody>
+          <a:bodyPr rtlCol="0" anchor="ctr"/>
+          <a:lstStyle/>
+          <a:p/>
+        </p:txBody>
+      </p:sp>
+      <p:sp>
+        <p:nvSpPr>
+          <p:cNvPr id="26" name="TarjetaTxt 7"/>
+          <p:cNvSpPr txBox="1"/>
+          <p:nvPr/>
+        </p:nvSpPr>
+        <p:spPr>
+          <a:xfrm>
+            <a:off x="9114282" y="4023360"/>
+            <a:ext cx="2526030" cy="1060704"/>
+          </a:xfrm>
+          <a:prstGeom prst="rect">
+            <a:avLst/>
+          </a:prstGeom>
+          <a:noFill/>
+        </p:spPr>
+        <p:txBody>
+          <a:bodyPr wrap="square" anchor="t" lIns="45720" rIns="45720" tIns="27432" bIns="27432">
+            <a:normAutofit/>
+          </a:bodyPr>
+          <a:lstStyle/>
+          <a:p>
+            <a:pPr algn="l"/>
+            <a:r>
+              <a:rPr sz="1100" b="1">
+                <a:solidFill>
+                  <a:srgbClr val="157355"/>
+                </a:solidFill>
+                <a:latin typeface="Bricolage Grotesque"/>
+              </a:rPr>
+              <a:t>El algoritmo</a:t>
+            </a:r>
+          </a:p>
+          <a:p>
+            <a:pPr algn="l"/>
+            <a:r>
+              <a:rPr sz="1000">
+                <a:solidFill>
+                  <a:srgbClr val="20242E"/>
+                </a:solidFill>
+                <a:latin typeface="Inter"/>
+              </a:rPr>
+              <a:t>No, porque uno vive en la ciudad y el otro en un pueblo.</a:t>
+            </a:r>
+          </a:p>
+        </p:txBody>
+      </p:sp>
+      <p:sp>
+        <p:nvSpPr>
+          <p:cNvPr id="27" name="Tarjeta 8"/>
+          <p:cNvSpPr/>
+          <p:nvPr/>
+        </p:nvSpPr>
+        <p:spPr>
+          <a:xfrm>
+            <a:off x="457200" y="5266944"/>
+            <a:ext cx="2708910" cy="1170432"/>
+          </a:xfrm>
+          <a:prstGeom prst="roundRect">
+            <a:avLst>
+              <a:gd name="adj" fmla="val 6000"/>
+            </a:avLst>
+          </a:prstGeom>
+          <a:solidFill>
+            <a:srgbClr val="FFFFFF"/>
+          </a:solidFill>
+          <a:ln w="12700">
+            <a:solidFill>
+              <a:srgbClr val="E4E3DE"/>
+            </a:solidFill>
+          </a:ln>
+          <a:effectLst/>
+        </p:spPr>
+        <p:style>
+          <a:lnRef idx="1">
+            <a:schemeClr val="accent1"/>
+          </a:lnRef>
+          <a:fillRef idx="3">
+            <a:schemeClr val="accent1"/>
+          </a:fillRef>
+          <a:effectRef idx="2">
+            <a:schemeClr val="accent1"/>
+          </a:effectRef>
+          <a:fontRef idx="minor">
+            <a:schemeClr val="lt1"/>
+          </a:fontRef>
+        </p:style>
+        <p:txBody>
+          <a:bodyPr rtlCol="0" anchor="ctr"/>
+          <a:lstStyle/>
+          <a:p/>
+        </p:txBody>
+      </p:sp>
+      <p:sp>
+        <p:nvSpPr>
+          <p:cNvPr id="28" name="TarjetaTxt 8"/>
+          <p:cNvSpPr txBox="1"/>
+          <p:nvPr/>
+        </p:nvSpPr>
+        <p:spPr>
+          <a:xfrm>
+            <a:off x="548640" y="5321808"/>
+            <a:ext cx="2526030" cy="1060704"/>
+          </a:xfrm>
+          <a:prstGeom prst="rect">
+            <a:avLst/>
+          </a:prstGeom>
+          <a:noFill/>
+        </p:spPr>
+        <p:txBody>
+          <a:bodyPr wrap="square" anchor="t" lIns="45720" rIns="45720" tIns="27432" bIns="27432">
+            <a:normAutofit/>
+          </a:bodyPr>
+          <a:lstStyle/>
+          <a:p>
+            <a:pPr algn="l"/>
+            <a:r>
+              <a:rPr sz="1100" b="1">
+                <a:solidFill>
+                  <a:srgbClr val="157355"/>
+                </a:solidFill>
+                <a:latin typeface="Bricolage Grotesque"/>
+              </a:rPr>
+              <a:t>Perfil 3</a:t>
+            </a:r>
+          </a:p>
+          <a:p>
+            <a:pPr algn="l"/>
+            <a:r>
+              <a:rPr sz="1000">
+                <a:solidFill>
+                  <a:srgbClr val="20242E"/>
+                </a:solidFill>
+                <a:latin typeface="Inter"/>
+              </a:rPr>
+              <a:t>Tengo 16 años. Soy de Bélgica y vivo en un pueblo. Hablo neerlandés e inglés.</a:t>
+            </a:r>
+          </a:p>
+        </p:txBody>
+      </p:sp>
+      <p:sp>
+        <p:nvSpPr>
+          <p:cNvPr id="29" name="Tarjeta 9"/>
+          <p:cNvSpPr/>
+          <p:nvPr/>
+        </p:nvSpPr>
+        <p:spPr>
+          <a:xfrm>
+            <a:off x="3312414" y="5266944"/>
+            <a:ext cx="2708910" cy="1170432"/>
+          </a:xfrm>
+          <a:prstGeom prst="roundRect">
+            <a:avLst>
+              <a:gd name="adj" fmla="val 6000"/>
+            </a:avLst>
+          </a:prstGeom>
+          <a:solidFill>
+            <a:srgbClr val="FFFFFF"/>
+          </a:solidFill>
+          <a:ln w="12700">
+            <a:solidFill>
+              <a:srgbClr val="E4E3DE"/>
+            </a:solidFill>
+          </a:ln>
+          <a:effectLst/>
+        </p:spPr>
+        <p:style>
+          <a:lnRef idx="1">
+            <a:schemeClr val="accent1"/>
+          </a:lnRef>
+          <a:fillRef idx="3">
+            <a:schemeClr val="accent1"/>
+          </a:fillRef>
+          <a:effectRef idx="2">
+            <a:schemeClr val="accent1"/>
+          </a:effectRef>
+          <a:fontRef idx="minor">
+            <a:schemeClr val="lt1"/>
+          </a:fontRef>
+        </p:style>
+        <p:txBody>
+          <a:bodyPr rtlCol="0" anchor="ctr"/>
+          <a:lstStyle/>
+          <a:p/>
+        </p:txBody>
+      </p:sp>
+      <p:sp>
+        <p:nvSpPr>
+          <p:cNvPr id="30" name="TarjetaTxt 9"/>
+          <p:cNvSpPr txBox="1"/>
+          <p:nvPr/>
+        </p:nvSpPr>
+        <p:spPr>
+          <a:xfrm>
+            <a:off x="3403854" y="5321808"/>
+            <a:ext cx="2526030" cy="1060704"/>
+          </a:xfrm>
+          <a:prstGeom prst="rect">
+            <a:avLst/>
+          </a:prstGeom>
+          <a:noFill/>
+        </p:spPr>
+        <p:txBody>
+          <a:bodyPr wrap="square" anchor="t" lIns="45720" rIns="45720" tIns="27432" bIns="27432">
+            <a:normAutofit/>
+          </a:bodyPr>
+          <a:lstStyle/>
+          <a:p>
+            <a:pPr algn="l"/>
+            <a:r>
+              <a:rPr sz="1100" b="1">
+                <a:solidFill>
+                  <a:srgbClr val="157355"/>
+                </a:solidFill>
+                <a:latin typeface="Bricolage Grotesque"/>
+              </a:rPr>
+              <a:t>Perfil 8</a:t>
+            </a:r>
+          </a:p>
+          <a:p>
+            <a:pPr algn="l"/>
+            <a:r>
+              <a:rPr sz="1000">
+                <a:solidFill>
+                  <a:srgbClr val="20242E"/>
+                </a:solidFill>
+                <a:latin typeface="Inter"/>
+              </a:rPr>
+              <a:t>Tengo 16 años. Soy de Bélgica y vivo en Gante. Hablo neerlandés, francés y un poco de español.</a:t>
             </a:r>
           </a:p>
         </p:txBody>
